--- a/ChasingTheLastULP.pptx
+++ b/ChasingTheLastULP.pptx
@@ -13,8 +13,14 @@
     <p:sldId id="261" r:id="rId7"/>
     <p:sldId id="262" r:id="rId8"/>
     <p:sldId id="263" r:id="rId9"/>
+    <p:sldId id="272" r:id="rId23"/>
     <p:sldId id="264" r:id="rId10"/>
+    <p:sldId id="273" r:id="rId24"/>
     <p:sldId id="265" r:id="rId11"/>
+    <p:sldId id="274" r:id="rId25"/>
+    <p:sldId id="275" r:id="rId26"/>
+    <p:sldId id="276" r:id="rId27"/>
+    <p:sldId id="277" r:id="rId28"/>
     <p:sldId id="266" r:id="rId12"/>
     <p:sldId id="267" r:id="rId13"/>
     <p:sldId id="268" r:id="rId14"/>
@@ -3919,6 +3925,1182 @@
 
 <file path=ppt/slides/slide10.xml><?xml version="1.0" encoding="utf-8"?>
 <p:sld xmlns:a="http://schemas.openxmlformats.org/drawingml/2006/main" xmlns:r="http://schemas.openxmlformats.org/officeDocument/2006/relationships" xmlns:p="http://schemas.openxmlformats.org/presentationml/2006/main">
+  <p:cSld name="Slide 9">
+    <p:bg>
+      <p:bgPr>
+        <a:solidFill>
+          <a:srgbClr val="FFFFFF"/>
+        </a:solidFill>
+      </p:bgPr>
+    </p:bg>
+    <p:spTree>
+      <p:nvGrpSpPr>
+        <p:cNvPr id="1" name=""/>
+        <p:cNvGrpSpPr/>
+        <p:nvPr/>
+      </p:nvGrpSpPr>
+      <p:grpSpPr>
+        <a:xfrm>
+          <a:off x="0" y="0"/>
+          <a:ext cx="0" cy="0"/>
+          <a:chOff x="0" y="0"/>
+          <a:chExt cx="0" cy="0"/>
+        </a:xfrm>
+      </p:grpSpPr>
+      <p:sp>
+        <p:nvSpPr>
+          <p:cNvPr id="2" name="Text 0"/>
+          <p:cNvSpPr txBox="1"/>
+          <p:nvPr/>
+        </p:nvSpPr>
+        <p:spPr>
+          <a:xfrm>
+            <a:off x="548640" y="365760"/>
+            <a:ext cx="7315200" cy="320040"/>
+          </a:xfrm>
+          <a:prstGeom prst="rect">
+            <a:avLst/>
+          </a:prstGeom>
+          <a:noFill/>
+          <a:ln/>
+        </p:spPr>
+        <p:txBody>
+          <a:bodyPr wrap="square" lIns="0" tIns="0" rIns="0" bIns="0" rtlCol="0" anchor="ctr"/>
+          <a:lstStyle/>
+          <a:p>
+            <a:pPr indent="0" marL="0">
+              <a:buNone/>
+            </a:pPr>
+            <a:r>
+              <a:rPr lang="en-US" sz="1200" b="1" spc="200" kern="0" dirty="0">
+                <a:solidFill>
+                  <a:srgbClr val="F2A93B"/>
+                </a:solidFill>
+                <a:latin typeface="Calibri" pitchFamily="34" charset="0"/>
+                <a:ea typeface="Calibri" pitchFamily="34" charset="-122"/>
+                <a:cs typeface="Calibri" pitchFamily="34" charset="-120"/>
+              </a:rPr>
+              <a:t>THE PROOF</a:t>
+            </a:r>
+            <a:endParaRPr lang="en-US" sz="1200" dirty="0"/>
+          </a:p>
+        </p:txBody>
+      </p:sp>
+      <p:sp>
+        <p:nvSpPr>
+          <p:cNvPr id="3" name="Text 1"/>
+          <p:cNvSpPr txBox="1"/>
+          <p:nvPr/>
+        </p:nvSpPr>
+        <p:spPr>
+          <a:xfrm>
+            <a:off x="548640" y="685800"/>
+            <a:ext cx="11064240" cy="822960"/>
+          </a:xfrm>
+          <a:prstGeom prst="rect">
+            <a:avLst/>
+          </a:prstGeom>
+          <a:noFill/>
+          <a:ln/>
+        </p:spPr>
+        <p:txBody>
+          <a:bodyPr wrap="square" lIns="0" tIns="0" rIns="0" bIns="0" rtlCol="0" anchor="ctr"/>
+          <a:lstStyle/>
+          <a:p>
+            <a:pPr indent="0" marL="0">
+              <a:buNone/>
+            </a:pPr>
+            <a:r>
+              <a:rPr lang="en-US" sz="3000" b="1" dirty="0">
+                <a:solidFill>
+                  <a:srgbClr val="0B1E3F"/>
+                </a:solidFill>
+                <a:latin typeface="Cambria" pitchFamily="34" charset="0"/>
+                <a:ea typeface="Cambria" pitchFamily="34" charset="-122"/>
+                <a:cs typeface="Cambria" pitchFamily="34" charset="-120"/>
+              </a:rPr>
+              <a:t>Force identical inputs, get identical outputs</a:t>
+            </a:r>
+            <a:endParaRPr lang="en-US" sz="3000" dirty="0"/>
+          </a:p>
+        </p:txBody>
+      </p:sp>
+      <p:sp>
+        <p:nvSpPr>
+          <p:cNvPr id="4" name="Text 2"/>
+          <p:cNvSpPr txBox="1"/>
+          <p:nvPr/>
+        </p:nvSpPr>
+        <p:spPr>
+          <a:xfrm>
+            <a:off x="548640" y="1783080"/>
+            <a:ext cx="10881360" cy="457200"/>
+          </a:xfrm>
+          <a:prstGeom prst="rect">
+            <a:avLst/>
+          </a:prstGeom>
+          <a:noFill/>
+          <a:ln/>
+        </p:spPr>
+        <p:txBody>
+          <a:bodyPr wrap="square" lIns="0" tIns="0" rIns="0" bIns="0" rtlCol="0" anchor="ctr"/>
+          <a:lstStyle/>
+          <a:p>
+            <a:pPr indent="0" marL="0">
+              <a:buNone/>
+            </a:pPr>
+            <a:r>
+              <a:rPr lang="en-US" sz="1300" dirty="0">
+                <a:solidFill>
+                  <a:srgbClr val="4A5B72"/>
+                </a:solidFill>
+                <a:latin typeface="Calibri" pitchFamily="34" charset="0"/>
+                <a:ea typeface="Calibri" pitchFamily="34" charset="-122"/>
+                <a:cs typeface="Calibri" pitchFamily="34" charset="-120"/>
+              </a:rPr>
+              <a:t>This session went further: no forcing at all. Fortran and JS were run completely independently, from their own natural starting points, using only the shared seed (42).</a:t>
+            </a:r>
+            <a:endParaRPr lang="en-US" sz="1300" dirty="0"/>
+          </a:p>
+        </p:txBody>
+      </p:sp>
+      <p:sp>
+        <p:nvSpPr>
+          <p:cNvPr id="5" name="Text 3"/>
+          <p:cNvSpPr txBox="1"/>
+          <p:nvPr/>
+        </p:nvSpPr>
+        <p:spPr>
+          <a:xfrm>
+            <a:off x="548640" y="2286000"/>
+            <a:ext cx="3657600" cy="274320"/>
+          </a:xfrm>
+          <a:prstGeom prst="rect">
+            <a:avLst/>
+          </a:prstGeom>
+          <a:noFill/>
+          <a:ln/>
+        </p:spPr>
+        <p:txBody>
+          <a:bodyPr wrap="square" lIns="0" tIns="0" rIns="0" bIns="0" rtlCol="0" anchor="ctr"/>
+          <a:lstStyle/>
+          <a:p>
+            <a:pPr indent="0" marL="0">
+              <a:buNone/>
+            </a:pPr>
+            <a:r>
+              <a:rPr lang="en-US" sz="1100" b="1" dirty="0">
+                <a:solidFill>
+                  <a:srgbClr val="C0392B"/>
+                </a:solidFill>
+                <a:latin typeface="Calibri" pitchFamily="34" charset="0"/>
+                <a:ea typeface="Calibri" pitchFamily="34" charset="-122"/>
+                <a:cs typeface="Calibri" pitchFamily="34" charset="-120"/>
+              </a:rPr>
+              <a:t>FULLY NATURAL RUN</a:t>
+            </a:r>
+            <a:endParaRPr lang="en-US" sz="1100" dirty="0"/>
+          </a:p>
+        </p:txBody>
+      </p:sp>
+      <p:sp>
+        <p:nvSpPr>
+          <p:cNvPr id="6" name="Shape 4"/>
+          <p:cNvSpPr/>
+          <p:nvPr/>
+        </p:nvSpPr>
+        <p:spPr>
+          <a:xfrm>
+            <a:off x="548640" y="2606040"/>
+            <a:ext cx="10881360" cy="502920"/>
+          </a:xfrm>
+          <a:prstGeom prst="roundRect">
+            <a:avLst>
+              <a:gd name="adj" fmla="val 10909"/>
+            </a:avLst>
+          </a:prstGeom>
+          <a:solidFill>
+            <a:srgbClr val="F3D9CC"/>
+          </a:solidFill>
+          <a:ln/>
+        </p:spPr>
+      </p:sp>
+      <p:sp>
+        <p:nvSpPr>
+          <p:cNvPr id="7" name="Shape 5"/>
+          <p:cNvSpPr/>
+          <p:nvPr/>
+        </p:nvSpPr>
+        <p:spPr>
+          <a:xfrm>
+            <a:off x="548640" y="2606040"/>
+            <a:ext cx="320040" cy="502920"/>
+          </a:xfrm>
+          <a:prstGeom prst="roundRect">
+            <a:avLst>
+              <a:gd name="adj" fmla="val 17143"/>
+            </a:avLst>
+          </a:prstGeom>
+          <a:solidFill>
+            <a:srgbClr val="2E8B57"/>
+          </a:solidFill>
+          <a:ln/>
+        </p:spPr>
+      </p:sp>
+      <p:sp>
+        <p:nvSpPr>
+          <p:cNvPr id="8" name="Text 6"/>
+          <p:cNvSpPr txBox="1"/>
+          <p:nvPr/>
+        </p:nvSpPr>
+        <p:spPr>
+          <a:xfrm>
+            <a:off x="1005840" y="2606040"/>
+            <a:ext cx="10241280" cy="502920"/>
+          </a:xfrm>
+          <a:prstGeom prst="rect">
+            <a:avLst/>
+          </a:prstGeom>
+          <a:noFill/>
+          <a:ln/>
+        </p:spPr>
+        <p:txBody>
+          <a:bodyPr wrap="square" lIns="0" tIns="0" rIns="0" bIns="0" rtlCol="0" anchor="ctr"/>
+          <a:lstStyle/>
+          <a:p>
+            <a:pPr indent="0" marL="0">
+              <a:buNone/>
+            </a:pPr>
+            <a:r>
+              <a:rPr lang="en-US" sz="1200" dirty="0">
+                <a:solidFill>
+                  <a:srgbClr val="8A3B26"/>
+                </a:solidFill>
+                <a:latin typeface="Calibri" pitchFamily="34" charset="0"/>
+                <a:ea typeface="Calibri" pitchFamily="34" charset="-122"/>
+                <a:cs typeface="Calibri" pitchFamily="34" charset="-120"/>
+              </a:rPr>
+              <a:t>pass 1 (65 iterations) and pass 2 (1,715 iterations, to ITMAX) — every rtol/y[ihi]/y[ilo] bit-identical throughout</a:t>
+            </a:r>
+            <a:endParaRPr lang="en-US" sz="1200" dirty="0"/>
+          </a:p>
+        </p:txBody>
+      </p:sp>
+      <p:sp>
+        <p:nvSpPr>
+          <p:cNvPr id="9" name="Text 7"/>
+          <p:cNvSpPr txBox="1"/>
+          <p:nvPr/>
+        </p:nvSpPr>
+        <p:spPr>
+          <a:xfrm>
+            <a:off x="548640" y="3383280"/>
+            <a:ext cx="10881360" cy="457200"/>
+          </a:xfrm>
+          <a:prstGeom prst="rect">
+            <a:avLst/>
+          </a:prstGeom>
+          <a:noFill/>
+          <a:ln/>
+        </p:spPr>
+        <p:txBody>
+          <a:bodyPr wrap="square" lIns="0" tIns="0" rIns="0" bIns="0" rtlCol="0" anchor="ctr"/>
+          <a:lstStyle/>
+          <a:p>
+            <a:pPr indent="0" marL="0">
+              <a:buNone/>
+            </a:pPr>
+            <a:r>
+              <a:rPr lang="en-US" sz="1300" dirty="0">
+                <a:solidFill>
+                  <a:srgbClr val="4A5B72"/>
+                </a:solidFill>
+                <a:latin typeface="Calibri" pitchFamily="34" charset="0"/>
+                <a:ea typeface="Calibri" pitchFamily="34" charset="-122"/>
+                <a:cs typeface="Calibri" pitchFamily="34" charset="-120"/>
+              </a:rPr>
+              <a:t>The raw best-fit parameter vector (all 15 parameters) was then compared directly — no forcing, no transplant.</a:t>
+            </a:r>
+            <a:endParaRPr lang="en-US" sz="1300" dirty="0"/>
+          </a:p>
+        </p:txBody>
+      </p:sp>
+      <p:sp>
+        <p:nvSpPr>
+          <p:cNvPr id="10" name="Text 8"/>
+          <p:cNvSpPr txBox="1"/>
+          <p:nvPr/>
+        </p:nvSpPr>
+        <p:spPr>
+          <a:xfrm>
+            <a:off x="548640" y="3886200"/>
+            <a:ext cx="3657600" cy="274320"/>
+          </a:xfrm>
+          <a:prstGeom prst="rect">
+            <a:avLst/>
+          </a:prstGeom>
+          <a:noFill/>
+          <a:ln/>
+        </p:spPr>
+        <p:txBody>
+          <a:bodyPr wrap="square" lIns="0" tIns="0" rIns="0" bIns="0" rtlCol="0" anchor="ctr"/>
+          <a:lstStyle/>
+          <a:p>
+            <a:pPr indent="0" marL="0">
+              <a:buNone/>
+            </a:pPr>
+            <a:r>
+              <a:rPr lang="en-US" sz="1100" b="1" dirty="0">
+                <a:solidFill>
+                  <a:srgbClr val="2E8B57"/>
+                </a:solidFill>
+                <a:latin typeface="Calibri" pitchFamily="34" charset="0"/>
+                <a:ea typeface="Calibri" pitchFamily="34" charset="-122"/>
+                <a:cs typeface="Calibri" pitchFamily="34" charset="-120"/>
+              </a:rPr>
+              <a:t>RESULT</a:t>
+            </a:r>
+            <a:endParaRPr lang="en-US" sz="1100" dirty="0"/>
+          </a:p>
+        </p:txBody>
+      </p:sp>
+      <p:sp>
+        <p:nvSpPr>
+          <p:cNvPr id="11" name="Shape 9"/>
+          <p:cNvSpPr/>
+          <p:nvPr/>
+        </p:nvSpPr>
+        <p:spPr>
+          <a:xfrm>
+            <a:off x="548640" y="4206240"/>
+            <a:ext cx="10881360" cy="502920"/>
+          </a:xfrm>
+          <a:prstGeom prst="roundRect">
+            <a:avLst>
+              <a:gd name="adj" fmla="val 10909"/>
+            </a:avLst>
+          </a:prstGeom>
+          <a:solidFill>
+            <a:srgbClr val="CFE8DA"/>
+          </a:solidFill>
+          <a:ln/>
+        </p:spPr>
+      </p:sp>
+      <p:sp>
+        <p:nvSpPr>
+          <p:cNvPr id="12" name="Text 10"/>
+          <p:cNvSpPr txBox="1"/>
+          <p:nvPr/>
+        </p:nvSpPr>
+        <p:spPr>
+          <a:xfrm>
+            <a:off x="822960" y="4206240"/>
+            <a:ext cx="10332720" cy="502920"/>
+          </a:xfrm>
+          <a:prstGeom prst="rect">
+            <a:avLst/>
+          </a:prstGeom>
+          <a:noFill/>
+          <a:ln/>
+        </p:spPr>
+        <p:txBody>
+          <a:bodyPr wrap="square" lIns="0" tIns="0" rIns="0" bIns="0" rtlCol="0" anchor="ctr"/>
+          <a:lstStyle/>
+          <a:p>
+            <a:pPr indent="0" marL="0">
+              <a:buNone/>
+            </a:pPr>
+            <a:r>
+              <a:rPr lang="en-US" sz="1200" b="1" dirty="0">
+                <a:solidFill>
+                  <a:srgbClr val="1E5C3D"/>
+                </a:solidFill>
+                <a:latin typeface="Calibri" pitchFamily="34" charset="0"/>
+                <a:ea typeface="Calibri" pitchFamily="34" charset="-122"/>
+                <a:cs typeface="Calibri" pitchFamily="34" charset="-120"/>
+              </a:rPr>
+              <a:t>bit-identical, every parameter, full precision</a:t>
+            </a:r>
+            <a:endParaRPr lang="en-US" sz="1200" dirty="0"/>
+          </a:p>
+        </p:txBody>
+      </p:sp>
+      <p:sp>
+        <p:nvSpPr>
+          <p:cNvPr id="13" name="Shape 11"/>
+          <p:cNvSpPr/>
+          <p:nvPr/>
+        </p:nvSpPr>
+        <p:spPr>
+          <a:xfrm>
+            <a:off x="548640" y="4937760"/>
+            <a:ext cx="10881360" cy="1371600"/>
+          </a:xfrm>
+          <a:prstGeom prst="roundRect">
+            <a:avLst>
+              <a:gd name="adj" fmla="val 6667"/>
+            </a:avLst>
+          </a:prstGeom>
+          <a:solidFill>
+            <a:srgbClr val="0B1E3F"/>
+          </a:solidFill>
+          <a:ln/>
+        </p:spPr>
+      </p:sp>
+      <p:sp>
+        <p:nvSpPr>
+          <p:cNvPr id="14" name="Text 12"/>
+          <p:cNvSpPr txBox="1"/>
+          <p:nvPr/>
+        </p:nvSpPr>
+        <p:spPr>
+          <a:xfrm>
+            <a:off x="822960" y="5074920"/>
+            <a:ext cx="3200400" cy="1097280"/>
+          </a:xfrm>
+          <a:prstGeom prst="rect">
+            <a:avLst/>
+          </a:prstGeom>
+          <a:noFill/>
+          <a:ln/>
+        </p:spPr>
+        <p:txBody>
+          <a:bodyPr wrap="square" lIns="0" tIns="0" rIns="0" bIns="0" rtlCol="0" anchor="ctr"/>
+          <a:lstStyle/>
+          <a:p>
+            <a:pPr indent="0" marL="0">
+              <a:buNone/>
+            </a:pPr>
+            <a:r>
+              <a:rPr lang="en-US" sz="4200" b="1" dirty="0">
+                <a:solidFill>
+                  <a:srgbClr val="F2A93B"/>
+                </a:solidFill>
+                <a:latin typeface="Cambria" pitchFamily="34" charset="0"/>
+                <a:ea typeface="Cambria" pitchFamily="34" charset="-122"/>
+                <a:cs typeface="Cambria" pitchFamily="34" charset="-120"/>
+              </a:rPr>
+              <a:t>1,715 / 1,715</a:t>
+            </a:r>
+            <a:endParaRPr lang="en-US" sz="4200" dirty="0"/>
+          </a:p>
+        </p:txBody>
+      </p:sp>
+      <p:sp>
+        <p:nvSpPr>
+          <p:cNvPr id="15" name="Text 13"/>
+          <p:cNvSpPr txBox="1"/>
+          <p:nvPr/>
+        </p:nvSpPr>
+        <p:spPr>
+          <a:xfrm>
+            <a:off x="4206240" y="5074920"/>
+            <a:ext cx="6949440" cy="1097280"/>
+          </a:xfrm>
+          <a:prstGeom prst="rect">
+            <a:avLst/>
+          </a:prstGeom>
+          <a:noFill/>
+          <a:ln/>
+        </p:spPr>
+        <p:txBody>
+          <a:bodyPr wrap="square" lIns="0" tIns="0" rIns="0" bIns="0" rtlCol="0" anchor="ctr"/>
+          <a:lstStyle/>
+          <a:p>
+            <a:pPr indent="0" marL="0">
+              <a:lnSpc>
+                <a:spcPct val="115000"/>
+              </a:lnSpc>
+              <a:buNone/>
+            </a:pPr>
+            <a:r>
+              <a:rPr lang="en-US" sz="1250" dirty="0">
+                <a:solidFill>
+                  <a:srgbClr val="AFC9E8"/>
+                </a:solidFill>
+                <a:latin typeface="Calibri" pitchFamily="34" charset="0"/>
+                <a:ea typeface="Calibri" pitchFamily="34" charset="-122"/>
+                <a:cs typeface="Calibri" pitchFamily="34" charset="-120"/>
+              </a:rPr>
+              <a:t>Every Pass-2 iteration bit-identical, unforced, to ITMAX — proving the entire per-evaluation math (particle generation, tilted-ring projection, convolution, χ2 sum, amoeba, vertex perturbation) has zero remaining bugs.</a:t>
+            </a:r>
+            <a:endParaRPr lang="en-US" sz="1250" dirty="0"/>
+          </a:p>
+        </p:txBody>
+      </p:sp>
+      <p:sp>
+        <p:nvSpPr>
+          <p:cNvPr id="16" name="Text 14"/>
+          <p:cNvSpPr txBox="1"/>
+          <p:nvPr/>
+        </p:nvSpPr>
+        <p:spPr>
+          <a:xfrm>
+            <a:off x="11521440" y="6446520"/>
+            <a:ext cx="457200" cy="274320"/>
+          </a:xfrm>
+          <a:prstGeom prst="rect">
+            <a:avLst/>
+          </a:prstGeom>
+          <a:noFill/>
+          <a:ln/>
+        </p:spPr>
+        <p:txBody>
+          <a:bodyPr wrap="square" lIns="0" tIns="0" rIns="0" bIns="0" rtlCol="0" anchor="ctr"/>
+          <a:lstStyle/>
+          <a:p>
+            <a:pPr algn="r" indent="0" marL="0">
+              <a:buNone/>
+            </a:pPr>
+            <a:r>
+              <a:rPr lang="en-US" sz="1000" dirty="0">
+                <a:solidFill>
+                  <a:srgbClr val="4A5B72"/>
+                </a:solidFill>
+                <a:latin typeface="Calibri" pitchFamily="34" charset="0"/>
+                <a:ea typeface="Calibri" pitchFamily="34" charset="-122"/>
+                <a:cs typeface="Calibri" pitchFamily="34" charset="-120"/>
+              </a:rPr>
+              <a:t>10</a:t>
+            </a:r>
+            <a:endParaRPr lang="en-US" sz="1000" dirty="0"/>
+          </a:p>
+        </p:txBody>
+      </p:sp>
+    </p:spTree>
+  </p:cSld>
+  <p:clrMapOvr>
+    <a:masterClrMapping/>
+  </p:clrMapOvr>
+</p:sld>
+</file>
+
+<file path=ppt/slides/slide11.xml><?xml version="1.0" encoding="utf-8"?>
+<p:sld xmlns:a="http://schemas.openxmlformats.org/drawingml/2006/main" xmlns:p="http://schemas.openxmlformats.org/presentationml/2006/main" xmlns:r="http://schemas.openxmlformats.org/officeDocument/2006/relationships">
+  <p:cSld>
+    <p:spTree>
+      <p:nvGrpSpPr>
+        <p:cNvPr id="1" name=""/>
+        <p:cNvGrpSpPr/>
+        <p:nvPr/>
+      </p:nvGrpSpPr>
+      <p:grpSpPr/>
+      <p:sp>
+        <p:nvSpPr>
+          <p:cNvPr id="2" name="Text 0"/>
+          <p:cNvSpPr txBox="1"/>
+          <p:nvPr/>
+        </p:nvSpPr>
+        <p:spPr>
+          <a:xfrm>
+            <a:off x="548640" y="365760"/>
+            <a:ext cx="7315200" cy="320040"/>
+          </a:xfrm>
+          <a:prstGeom prst="rect">
+            <a:avLst/>
+          </a:prstGeom>
+          <a:noFill/>
+          <a:ln/>
+        </p:spPr>
+        <p:txBody>
+          <a:bodyPr wrap="square" lIns="0" tIns="0" rIns="0" bIns="0" rtlCol="0" anchor="ctr"/>
+          <a:lstStyle/>
+          <a:p>
+            <a:pPr indent="0" marL="0">
+              <a:buNone/>
+            </a:pPr>
+            <a:r>
+              <a:rPr lang="en-US" sz="1200" b="1" spc="200" kern="0" dirty="0">
+                <a:solidFill>
+                  <a:srgbClr val="F2A93B"/>
+                </a:solidFill>
+                <a:latin typeface="Calibri" pitchFamily="34" charset="0"/>
+                <a:ea typeface="Calibri" pitchFamily="34" charset="-122"/>
+                <a:cs typeface="Calibri" pitchFamily="34" charset="-120"/>
+              </a:rPr>
+              <a:t>RULING OUT SOFIA-2</a:t>
+            </a:r>
+            <a:endParaRPr lang="en-US" sz="1200" dirty="0"/>
+          </a:p>
+        </p:txBody>
+      </p:sp>
+      <p:sp>
+        <p:nvSpPr>
+          <p:cNvPr id="3" name="Text 1"/>
+          <p:cNvSpPr txBox="1"/>
+          <p:nvPr/>
+        </p:nvSpPr>
+        <p:spPr>
+          <a:xfrm>
+            <a:off x="548640" y="685800"/>
+            <a:ext cx="11064240" cy="822960"/>
+          </a:xfrm>
+          <a:prstGeom prst="rect">
+            <a:avLst/>
+          </a:prstGeom>
+          <a:noFill/>
+          <a:ln/>
+        </p:spPr>
+        <p:txBody>
+          <a:bodyPr wrap="square" lIns="0" tIns="0" rIns="0" bIns="0" rtlCol="0" anchor="ctr"/>
+          <a:lstStyle/>
+          <a:p>
+            <a:pPr indent="0" marL="0">
+              <a:buNone/>
+            </a:pPr>
+            <a:r>
+              <a:rPr lang="en-US" sz="3000" b="1" dirty="0">
+                <a:solidFill>
+                  <a:srgbClr val="0B1E3F"/>
+                </a:solidFill>
+                <a:latin typeface="Cambria" pitchFamily="34" charset="0"/>
+                <a:ea typeface="Cambria" pitchFamily="34" charset="-122"/>
+                <a:cs typeface="Cambria" pitchFamily="34" charset="-120"/>
+              </a:rPr>
+              <a:t>A direct 2×2 control: same source-finder, same inputs, both platforms</a:t>
+            </a:r>
+            <a:endParaRPr lang="en-US" sz="3000" dirty="0"/>
+          </a:p>
+        </p:txBody>
+      </p:sp>
+      <p:sp>
+        <p:nvSpPr>
+          <p:cNvPr id="4" name="Text 2"/>
+          <p:cNvSpPr txBox="1"/>
+          <p:nvPr/>
+        </p:nvSpPr>
+        <p:spPr>
+          <a:xfrm>
+            <a:off x="548640" y="1600200"/>
+            <a:ext cx="11064240" cy="640080"/>
+          </a:xfrm>
+          <a:prstGeom prst="rect">
+            <a:avLst/>
+          </a:prstGeom>
+          <a:noFill/>
+          <a:ln/>
+        </p:spPr>
+        <p:txBody>
+          <a:bodyPr wrap="square" lIns="0" tIns="0" rIns="0" bIns="0" rtlCol="0" anchor="ctr"/>
+          <a:lstStyle/>
+          <a:p>
+            <a:pPr indent="0" marL="0">
+              <a:buNone/>
+            </a:pPr>
+            <a:r>
+              <a:rPr lang="en-US" sz="1400" dirty="0">
+                <a:solidFill>
+                  <a:srgbClr val="4A5B72"/>
+                </a:solidFill>
+                <a:latin typeface="Calibri" pitchFamily="34" charset="0"/>
+                <a:ea typeface="Calibri" pitchFamily="34" charset="-122"/>
+                <a:cs typeface="Calibri" pitchFamily="34" charset="-120"/>
+              </a:rPr>
+              <a:t>SoFiA-2 (native and wasm) was fed the exact same model cube from each side independently -- Fortran’s own cube, and JS’s own regenerated cube -- and its mask output compared bit-for-bit. If SoFiA itself introduced any divergence, native and wasm would disagree even on an identical input cube. They never did.</a:t>
+            </a:r>
+            <a:endParaRPr lang="en-US" sz="1400" dirty="0"/>
+          </a:p>
+        </p:txBody>
+      </p:sp>
+      <p:sp>
+        <p:nvSpPr>
+          <p:cNvPr id="5" name="Shape 3"/>
+          <p:cNvSpPr/>
+          <p:nvPr/>
+        </p:nvSpPr>
+        <p:spPr>
+          <a:xfrm>
+            <a:off x="548640" y="2560320"/>
+            <a:ext cx="3383280" cy="2651760"/>
+          </a:xfrm>
+          <a:prstGeom prst="roundRect">
+            <a:avLst>
+              <a:gd name="adj" fmla="val 2759"/>
+            </a:avLst>
+          </a:prstGeom>
+          <a:solidFill>
+            <a:srgbClr val="EAF1FB"/>
+          </a:solidFill>
+          <a:ln/>
+          <a:effectLst>
+            <a:outerShdw sx="100000" sy="100000" kx="0" ky="0" algn="bl" rotWithShape="0" blurRad="76200" dist="25400" dir="5400000">
+              <a:srgbClr val="9AAEC7">
+                <a:alpha val="35000"/>
+              </a:srgbClr>
+            </a:outerShdw>
+          </a:effectLst>
+        </p:spPr>
+      </p:sp>
+      <p:sp>
+        <p:nvSpPr>
+          <p:cNvPr id="6" name="Text 4"/>
+          <p:cNvSpPr txBox="1"/>
+          <p:nvPr/>
+        </p:nvSpPr>
+        <p:spPr>
+          <a:xfrm>
+            <a:off x="777240" y="2880360"/>
+            <a:ext cx="2926080" cy="822960"/>
+          </a:xfrm>
+          <a:prstGeom prst="rect">
+            <a:avLst/>
+          </a:prstGeom>
+          <a:noFill/>
+          <a:ln/>
+        </p:spPr>
+        <p:txBody>
+          <a:bodyPr wrap="square" lIns="0" tIns="0" rIns="0" bIns="0" rtlCol="0" anchor="ctr"/>
+          <a:lstStyle/>
+          <a:p>
+            <a:pPr indent="0" marL="0">
+              <a:buNone/>
+            </a:pPr>
+            <a:r>
+              <a:rPr lang="en-US" sz="4000" b="1" dirty="0">
+                <a:solidFill>
+                  <a:srgbClr val="F2A93B"/>
+                </a:solidFill>
+                <a:latin typeface="Cambria" pitchFamily="34" charset="0"/>
+                <a:ea typeface="Cambria" pitchFamily="34" charset="-122"/>
+                <a:cs typeface="Cambria" pitchFamily="34" charset="-120"/>
+              </a:rPr>
+              <a:t>1038 = 1038</a:t>
+            </a:r>
+            <a:endParaRPr lang="en-US" sz="4000" dirty="0"/>
+          </a:p>
+        </p:txBody>
+      </p:sp>
+      <p:sp>
+        <p:nvSpPr>
+          <p:cNvPr id="7" name="Text 5"/>
+          <p:cNvSpPr txBox="1"/>
+          <p:nvPr/>
+        </p:nvSpPr>
+        <p:spPr>
+          <a:xfrm>
+            <a:off x="777240" y="3794760"/>
+            <a:ext cx="2926080" cy="1188720"/>
+          </a:xfrm>
+          <a:prstGeom prst="rect">
+            <a:avLst/>
+          </a:prstGeom>
+          <a:noFill/>
+          <a:ln/>
+        </p:spPr>
+        <p:txBody>
+          <a:bodyPr wrap="square" lIns="0" tIns="0" rIns="0" bIns="0" rtlCol="0" anchor="ctr"/>
+          <a:lstStyle/>
+          <a:p>
+            <a:pPr indent="0" marL="0">
+              <a:lnSpc>
+                <a:spcPct val="115000"/>
+              </a:lnSpc>
+              <a:buNone/>
+            </a:pPr>
+            <a:r>
+              <a:rPr lang="en-US" sz="1300" dirty="0">
+                <a:solidFill>
+                  <a:srgbClr val="4A5B72"/>
+                </a:solidFill>
+                <a:latin typeface="Calibri" pitchFamily="34" charset="0"/>
+                <a:ea typeface="Calibri" pitchFamily="34" charset="-122"/>
+                <a:cs typeface="Calibri" pitchFamily="34" charset="-120"/>
+              </a:rPr>
+              <a:t>Native vs wasm SoFiA mask</a:t>
+            </a:r>
+            <a:endParaRPr lang="en-US" sz="1300" dirty="0"/>
+          </a:p>
+          <a:p>
+            <a:pPr indent="0" marL="0">
+              <a:lnSpc>
+                <a:spcPct val="115000"/>
+              </a:lnSpc>
+              <a:buNone/>
+            </a:pPr>
+            <a:r>
+              <a:rPr lang="en-US" sz="1300" dirty="0">
+                <a:solidFill>
+                  <a:srgbClr val="4A5B72"/>
+                </a:solidFill>
+                <a:latin typeface="Calibri" pitchFamily="34" charset="0"/>
+                <a:ea typeface="Calibri" pitchFamily="34" charset="-122"/>
+                <a:cs typeface="Calibri" pitchFamily="34" charset="-120"/>
+              </a:rPr>
+              <a:t>pixels, on Fortran’s own</a:t>
+            </a:r>
+            <a:endParaRPr lang="en-US" sz="1300" dirty="0"/>
+          </a:p>
+          <a:p>
+            <a:pPr indent="0" marL="0">
+              <a:lnSpc>
+                <a:spcPct val="115000"/>
+              </a:lnSpc>
+              <a:buNone/>
+            </a:pPr>
+            <a:r>
+              <a:rPr lang="en-US" sz="1300" dirty="0">
+                <a:solidFill>
+                  <a:srgbClr val="4A5B72"/>
+                </a:solidFill>
+                <a:latin typeface="Calibri" pitchFamily="34" charset="0"/>
+                <a:ea typeface="Calibri" pitchFamily="34" charset="-122"/>
+                <a:cs typeface="Calibri" pitchFamily="34" charset="-120"/>
+              </a:rPr>
+              <a:t>model cube — exact match</a:t>
+            </a:r>
+            <a:endParaRPr lang="en-US" sz="1300" dirty="0"/>
+          </a:p>
+        </p:txBody>
+      </p:sp>
+      <p:sp>
+        <p:nvSpPr>
+          <p:cNvPr id="8" name="Shape 6"/>
+          <p:cNvSpPr/>
+          <p:nvPr/>
+        </p:nvSpPr>
+        <p:spPr>
+          <a:xfrm>
+            <a:off x="4251960" y="2560320"/>
+            <a:ext cx="3383280" cy="2651760"/>
+          </a:xfrm>
+          <a:prstGeom prst="roundRect">
+            <a:avLst>
+              <a:gd name="adj" fmla="val 2759"/>
+            </a:avLst>
+          </a:prstGeom>
+          <a:solidFill>
+            <a:srgbClr val="EAF1FB"/>
+          </a:solidFill>
+          <a:ln/>
+          <a:effectLst>
+            <a:outerShdw sx="100000" sy="100000" kx="0" ky="0" algn="bl" rotWithShape="0" blurRad="76200" dist="25400" dir="5400000">
+              <a:srgbClr val="9AAEC7">
+                <a:alpha val="35000"/>
+              </a:srgbClr>
+            </a:outerShdw>
+          </a:effectLst>
+        </p:spPr>
+      </p:sp>
+      <p:sp>
+        <p:nvSpPr>
+          <p:cNvPr id="9" name="Text 7"/>
+          <p:cNvSpPr txBox="1"/>
+          <p:nvPr/>
+        </p:nvSpPr>
+        <p:spPr>
+          <a:xfrm>
+            <a:off x="4480560" y="2880360"/>
+            <a:ext cx="2926080" cy="822960"/>
+          </a:xfrm>
+          <a:prstGeom prst="rect">
+            <a:avLst/>
+          </a:prstGeom>
+          <a:noFill/>
+          <a:ln/>
+        </p:spPr>
+        <p:txBody>
+          <a:bodyPr wrap="square" lIns="0" tIns="0" rIns="0" bIns="0" rtlCol="0" anchor="ctr"/>
+          <a:lstStyle/>
+          <a:p>
+            <a:pPr indent="0" marL="0">
+              <a:buNone/>
+            </a:pPr>
+            <a:r>
+              <a:rPr lang="en-US" sz="4000" b="1" dirty="0">
+                <a:solidFill>
+                  <a:srgbClr val="1C9C8B"/>
+                </a:solidFill>
+                <a:latin typeface="Cambria" pitchFamily="34" charset="0"/>
+                <a:ea typeface="Cambria" pitchFamily="34" charset="-122"/>
+                <a:cs typeface="Cambria" pitchFamily="34" charset="-120"/>
+              </a:rPr>
+              <a:t>1041 = 1041</a:t>
+            </a:r>
+            <a:endParaRPr lang="en-US" sz="4000" dirty="0"/>
+          </a:p>
+        </p:txBody>
+      </p:sp>
+      <p:sp>
+        <p:nvSpPr>
+          <p:cNvPr id="10" name="Text 8"/>
+          <p:cNvSpPr txBox="1"/>
+          <p:nvPr/>
+        </p:nvSpPr>
+        <p:spPr>
+          <a:xfrm>
+            <a:off x="4480560" y="3794760"/>
+            <a:ext cx="2926080" cy="1188720"/>
+          </a:xfrm>
+          <a:prstGeom prst="rect">
+            <a:avLst/>
+          </a:prstGeom>
+          <a:noFill/>
+          <a:ln/>
+        </p:spPr>
+        <p:txBody>
+          <a:bodyPr wrap="square" lIns="0" tIns="0" rIns="0" bIns="0" rtlCol="0" anchor="ctr"/>
+          <a:lstStyle/>
+          <a:p>
+            <a:pPr indent="0" marL="0">
+              <a:lnSpc>
+                <a:spcPct val="115000"/>
+              </a:lnSpc>
+              <a:buNone/>
+            </a:pPr>
+            <a:r>
+              <a:rPr lang="en-US" sz="1300" dirty="0">
+                <a:solidFill>
+                  <a:srgbClr val="4A5B72"/>
+                </a:solidFill>
+                <a:latin typeface="Calibri" pitchFamily="34" charset="0"/>
+                <a:ea typeface="Calibri" pitchFamily="34" charset="-122"/>
+                <a:cs typeface="Calibri" pitchFamily="34" charset="-120"/>
+              </a:rPr>
+              <a:t>Native vs wasm SoFiA mask</a:t>
+            </a:r>
+            <a:endParaRPr lang="en-US" sz="1300" dirty="0"/>
+          </a:p>
+          <a:p>
+            <a:pPr indent="0" marL="0">
+              <a:lnSpc>
+                <a:spcPct val="115000"/>
+              </a:lnSpc>
+              <a:buNone/>
+            </a:pPr>
+            <a:r>
+              <a:rPr lang="en-US" sz="1300" dirty="0">
+                <a:solidFill>
+                  <a:srgbClr val="4A5B72"/>
+                </a:solidFill>
+                <a:latin typeface="Calibri" pitchFamily="34" charset="0"/>
+                <a:ea typeface="Calibri" pitchFamily="34" charset="-122"/>
+                <a:cs typeface="Calibri" pitchFamily="34" charset="-120"/>
+              </a:rPr>
+              <a:t>pixels, on JS’s own</a:t>
+            </a:r>
+            <a:endParaRPr lang="en-US" sz="1300" dirty="0"/>
+          </a:p>
+          <a:p>
+            <a:pPr indent="0" marL="0">
+              <a:lnSpc>
+                <a:spcPct val="115000"/>
+              </a:lnSpc>
+              <a:buNone/>
+            </a:pPr>
+            <a:r>
+              <a:rPr lang="en-US" sz="1300" dirty="0">
+                <a:solidFill>
+                  <a:srgbClr val="4A5B72"/>
+                </a:solidFill>
+                <a:latin typeface="Calibri" pitchFamily="34" charset="0"/>
+                <a:ea typeface="Calibri" pitchFamily="34" charset="-122"/>
+                <a:cs typeface="Calibri" pitchFamily="34" charset="-120"/>
+              </a:rPr>
+              <a:t>regenerated cube — exact match</a:t>
+            </a:r>
+            <a:endParaRPr lang="en-US" sz="1300" dirty="0"/>
+          </a:p>
+        </p:txBody>
+      </p:sp>
+      <p:sp>
+        <p:nvSpPr>
+          <p:cNvPr id="11" name="Shape 9"/>
+          <p:cNvSpPr/>
+          <p:nvPr/>
+        </p:nvSpPr>
+        <p:spPr>
+          <a:xfrm>
+            <a:off x="7955280" y="2560320"/>
+            <a:ext cx="3383280" cy="2651760"/>
+          </a:xfrm>
+          <a:prstGeom prst="roundRect">
+            <a:avLst>
+              <a:gd name="adj" fmla="val 2759"/>
+            </a:avLst>
+          </a:prstGeom>
+          <a:solidFill>
+            <a:srgbClr val="EAF1FB"/>
+          </a:solidFill>
+          <a:ln/>
+          <a:effectLst>
+            <a:outerShdw sx="100000" sy="100000" kx="0" ky="0" algn="bl" rotWithShape="0" blurRad="76200" dist="25400" dir="5400000">
+              <a:srgbClr val="9AAEC7">
+                <a:alpha val="35000"/>
+              </a:srgbClr>
+            </a:outerShdw>
+          </a:effectLst>
+        </p:spPr>
+      </p:sp>
+      <p:sp>
+        <p:nvSpPr>
+          <p:cNvPr id="12" name="Text 10"/>
+          <p:cNvSpPr txBox="1"/>
+          <p:nvPr/>
+        </p:nvSpPr>
+        <p:spPr>
+          <a:xfrm>
+            <a:off x="8183880" y="2880360"/>
+            <a:ext cx="2926080" cy="822960"/>
+          </a:xfrm>
+          <a:prstGeom prst="rect">
+            <a:avLst/>
+          </a:prstGeom>
+          <a:noFill/>
+          <a:ln/>
+        </p:spPr>
+        <p:txBody>
+          <a:bodyPr wrap="square" lIns="0" tIns="0" rIns="0" bIns="0" rtlCol="0" anchor="ctr"/>
+          <a:lstStyle/>
+          <a:p>
+            <a:pPr indent="0" marL="0">
+              <a:buNone/>
+            </a:pPr>
+            <a:r>
+              <a:rPr lang="en-US" sz="4000" b="1" dirty="0">
+                <a:solidFill>
+                  <a:srgbClr val="0B1E3F"/>
+                </a:solidFill>
+                <a:latin typeface="Cambria" pitchFamily="34" charset="0"/>
+                <a:ea typeface="Cambria" pitchFamily="34" charset="-122"/>
+                <a:cs typeface="Cambria" pitchFamily="34" charset="-120"/>
+              </a:rPr>
+              <a:t>0</a:t>
+            </a:r>
+            <a:endParaRPr lang="en-US" sz="4000" dirty="0"/>
+          </a:p>
+        </p:txBody>
+      </p:sp>
+      <p:sp>
+        <p:nvSpPr>
+          <p:cNvPr id="13" name="Text 11"/>
+          <p:cNvSpPr txBox="1"/>
+          <p:nvPr/>
+        </p:nvSpPr>
+        <p:spPr>
+          <a:xfrm>
+            <a:off x="8183880" y="3794760"/>
+            <a:ext cx="2926080" cy="1188720"/>
+          </a:xfrm>
+          <a:prstGeom prst="rect">
+            <a:avLst/>
+          </a:prstGeom>
+          <a:noFill/>
+          <a:ln/>
+        </p:spPr>
+        <p:txBody>
+          <a:bodyPr wrap="square" lIns="0" tIns="0" rIns="0" bIns="0" rtlCol="0" anchor="ctr"/>
+          <a:lstStyle/>
+          <a:p>
+            <a:pPr indent="0" marL="0">
+              <a:lnSpc>
+                <a:spcPct val="115000"/>
+              </a:lnSpc>
+              <a:buNone/>
+            </a:pPr>
+            <a:r>
+              <a:rPr lang="en-US" sz="1300" dirty="0">
+                <a:solidFill>
+                  <a:srgbClr val="4A5B72"/>
+                </a:solidFill>
+                <a:latin typeface="Calibri" pitchFamily="34" charset="0"/>
+                <a:ea typeface="Calibri" pitchFamily="34" charset="-122"/>
+                <a:cs typeface="Calibri" pitchFamily="34" charset="-120"/>
+              </a:rPr>
+              <a:t>Bugs found in SoFiA-2’s</a:t>
+            </a:r>
+            <a:endParaRPr lang="en-US" sz="1300" dirty="0"/>
+          </a:p>
+          <a:p>
+            <a:pPr indent="0" marL="0">
+              <a:lnSpc>
+                <a:spcPct val="115000"/>
+              </a:lnSpc>
+              <a:buNone/>
+            </a:pPr>
+            <a:r>
+              <a:rPr lang="en-US" sz="1300" dirty="0">
+                <a:solidFill>
+                  <a:srgbClr val="4A5B72"/>
+                </a:solidFill>
+                <a:latin typeface="Calibri" pitchFamily="34" charset="0"/>
+                <a:ea typeface="Calibri" pitchFamily="34" charset="-122"/>
+                <a:cs typeface="Calibri" pitchFamily="34" charset="-120"/>
+              </a:rPr>
+              <a:t>wasm build — ruled out</a:t>
+            </a:r>
+            <a:endParaRPr lang="en-US" sz="1300" dirty="0"/>
+          </a:p>
+          <a:p>
+            <a:pPr indent="0" marL="0">
+              <a:lnSpc>
+                <a:spcPct val="115000"/>
+              </a:lnSpc>
+              <a:buNone/>
+            </a:pPr>
+            <a:r>
+              <a:rPr lang="en-US" sz="1300" dirty="0">
+                <a:solidFill>
+                  <a:srgbClr val="4A5B72"/>
+                </a:solidFill>
+                <a:latin typeface="Calibri" pitchFamily="34" charset="0"/>
+                <a:ea typeface="Calibri" pitchFamily="34" charset="-122"/>
+                <a:cs typeface="Calibri" pitchFamily="34" charset="-120"/>
+              </a:rPr>
+              <a:t>directly, not by inference</a:t>
+            </a:r>
+            <a:endParaRPr lang="en-US" sz="1300" dirty="0"/>
+          </a:p>
+        </p:txBody>
+      </p:sp>
+      <p:sp>
+        <p:nvSpPr>
+          <p:cNvPr id="14" name="Text 12"/>
+          <p:cNvSpPr txBox="1"/>
+          <p:nvPr/>
+        </p:nvSpPr>
+        <p:spPr>
+          <a:xfrm>
+            <a:off x="11521440" y="6446520"/>
+            <a:ext cx="457200" cy="274320"/>
+          </a:xfrm>
+          <a:prstGeom prst="rect">
+            <a:avLst/>
+          </a:prstGeom>
+          <a:noFill/>
+          <a:ln/>
+        </p:spPr>
+        <p:txBody>
+          <a:bodyPr wrap="square" lIns="0" tIns="0" rIns="0" bIns="0" rtlCol="0" anchor="ctr"/>
+          <a:lstStyle/>
+          <a:p>
+            <a:pPr algn="r" indent="0" marL="0">
+              <a:buNone/>
+            </a:pPr>
+            <a:r>
+              <a:rPr lang="en-US" sz="1000" dirty="0">
+                <a:solidFill>
+                  <a:srgbClr val="4A5B72"/>
+                </a:solidFill>
+                <a:latin typeface="Calibri" pitchFamily="34" charset="0"/>
+                <a:ea typeface="Calibri" pitchFamily="34" charset="-122"/>
+                <a:cs typeface="Calibri" pitchFamily="34" charset="-120"/>
+              </a:rPr>
+              <a:t>11</a:t>
+            </a:r>
+            <a:endParaRPr lang="en-US" sz="1000" dirty="0"/>
+          </a:p>
+        </p:txBody>
+      </p:sp>
+    </p:spTree>
+  </p:cSld>
+  <p:clrMapOvr>
+    <a:masterClrMapping/>
+  </p:clrMapOvr>
+</p:sld>
+</file>
+
+<file path=ppt/slides/slide12.xml><?xml version="1.0" encoding="utf-8"?>
+<p:sld xmlns:a="http://schemas.openxmlformats.org/drawingml/2006/main" xmlns:r="http://schemas.openxmlformats.org/officeDocument/2006/relationships" xmlns:p="http://schemas.openxmlformats.org/presentationml/2006/main">
   <p:cSld name="Slide 10">
     <p:bg>
       <p:bgPr>
@@ -4080,6 +5262,10 @@
           </a:solidFill>
           <a:ln/>
         </p:spPr>
+        <p:txBody>
+          <a:bodyPr/>
+          <a:p/>
+        </p:txBody>
       </p:sp>
       <p:sp>
         <p:nvSpPr>
@@ -4142,6 +5328,10 @@
           </a:solidFill>
           <a:ln/>
         </p:spPr>
+        <p:txBody>
+          <a:bodyPr/>
+          <a:p/>
+        </p:txBody>
       </p:sp>
       <p:sp>
         <p:nvSpPr>
@@ -4204,6 +5394,10 @@
           </a:solidFill>
           <a:ln/>
         </p:spPr>
+        <p:txBody>
+          <a:bodyPr/>
+          <a:p/>
+        </p:txBody>
       </p:sp>
       <p:sp>
         <p:nvSpPr>
@@ -4280,7 +5474,7 @@
                 <a:ea typeface="Calibri" pitchFamily="34" charset="-122"/>
                 <a:cs typeface="Calibri" pitchFamily="34" charset="-120"/>
               </a:rPr>
-              <a:t>10</a:t>
+              <a:t>12</a:t>
             </a:r>
             <a:endParaRPr lang="en-US" sz="1000" dirty="0"/>
           </a:p>
@@ -4294,7 +5488,2303 @@
 </p:sld>
 </file>
 
-<file path=ppt/slides/slide11.xml><?xml version="1.0" encoding="utf-8"?>
+<file path=ppt/slides/slide13.xml><?xml version="1.0" encoding="utf-8"?>
+<p:sld xmlns:a="http://schemas.openxmlformats.org/drawingml/2006/main" xmlns:p="http://schemas.openxmlformats.org/presentationml/2006/main" xmlns:r="http://schemas.openxmlformats.org/officeDocument/2006/relationships">
+  <p:cSld>
+    <p:spTree>
+      <p:nvGrpSpPr>
+        <p:cNvPr id="1" name=""/>
+        <p:cNvGrpSpPr/>
+        <p:nvPr/>
+      </p:nvGrpSpPr>
+      <p:grpSpPr/>
+      <p:sp>
+        <p:nvSpPr>
+          <p:cNvPr id="2" name="Text 0"/>
+          <p:cNvSpPr txBox="1"/>
+          <p:nvPr/>
+        </p:nvSpPr>
+        <p:spPr>
+          <a:xfrm>
+            <a:off x="548640" y="365760"/>
+            <a:ext cx="7315200" cy="320040"/>
+          </a:xfrm>
+          <a:prstGeom prst="rect">
+            <a:avLst/>
+          </a:prstGeom>
+          <a:noFill/>
+          <a:ln/>
+        </p:spPr>
+        <p:txBody>
+          <a:bodyPr wrap="square" lIns="0" tIns="0" rIns="0" bIns="0" rtlCol="0" anchor="ctr"/>
+          <a:lstStyle/>
+          <a:p>
+            <a:pPr indent="0" marL="0">
+              <a:buNone/>
+            </a:pPr>
+            <a:r>
+              <a:rPr lang="en-US" sz="1200" b="1" spc="200" kern="0" dirty="0">
+                <a:solidFill>
+                  <a:srgbClr val="F2A93B"/>
+                </a:solidFill>
+                <a:latin typeface="Calibri" pitchFamily="34" charset="0"/>
+                <a:ea typeface="Calibri" pitchFamily="34" charset="-122"/>
+                <a:cs typeface="Calibri" pitchFamily="34" charset="-120"/>
+              </a:rPr>
+              <a:t>A HARDER CASE REOPENS THE SEARCH</a:t>
+            </a:r>
+            <a:endParaRPr lang="en-US" sz="1200" dirty="0"/>
+          </a:p>
+        </p:txBody>
+      </p:sp>
+      <p:sp>
+        <p:nvSpPr>
+          <p:cNvPr id="3" name="Text 1"/>
+          <p:cNvSpPr txBox="1"/>
+          <p:nvPr/>
+        </p:nvSpPr>
+        <p:spPr>
+          <a:xfrm>
+            <a:off x="548640" y="685800"/>
+            <a:ext cx="11064240" cy="822960"/>
+          </a:xfrm>
+          <a:prstGeom prst="rect">
+            <a:avLst/>
+          </a:prstGeom>
+          <a:noFill/>
+          <a:ln/>
+        </p:spPr>
+        <p:txBody>
+          <a:bodyPr wrap="square" lIns="0" tIns="0" rIns="0" bIns="0" rtlCol="0" anchor="ctr"/>
+          <a:lstStyle/>
+          <a:p>
+            <a:pPr indent="0" marL="0">
+              <a:buNone/>
+            </a:pPr>
+            <a:r>
+              <a:rPr lang="en-US" sz="3000" b="1" dirty="0">
+                <a:solidFill>
+                  <a:srgbClr val="0B1E3F"/>
+                </a:solidFill>
+                <a:latin typeface="Cambria" pitchFamily="34" charset="0"/>
+                <a:ea typeface="Cambria" pitchFamily="34" charset="-122"/>
+                <a:cs typeface="Cambria" pitchFamily="34" charset="-120"/>
+              </a:rPr>
+              <a:t>cloudDensity=100, bootstrap realization 10 of 11: same bisection technique, applied again</a:t>
+            </a:r>
+            <a:endParaRPr lang="en-US" sz="3000" dirty="0"/>
+          </a:p>
+        </p:txBody>
+      </p:sp>
+      <p:sp>
+        <p:nvSpPr>
+          <p:cNvPr id="4" name="Text 2"/>
+          <p:cNvSpPr txBox="1"/>
+          <p:nvPr/>
+        </p:nvSpPr>
+        <p:spPr>
+          <a:xfrm>
+            <a:off x="548640" y="1554480"/>
+            <a:ext cx="10881360" cy="960120"/>
+          </a:xfrm>
+          <a:prstGeom prst="rect">
+            <a:avLst/>
+          </a:prstGeom>
+          <a:noFill/>
+          <a:ln/>
+        </p:spPr>
+        <p:txBody>
+          <a:bodyPr wrap="square" lIns="0" tIns="0" rIns="0" bIns="0" rtlCol="0" anchor="ctr"/>
+          <a:lstStyle/>
+          <a:p>
+            <a:pPr indent="0" marL="0">
+              <a:lnSpc>
+                <a:spcPct val="120000"/>
+              </a:lnSpc>
+              <a:buNone/>
+            </a:pPr>
+            <a:r>
+              <a:rPr lang="en-US" sz="1300" dirty="0">
+                <a:solidFill>
+                  <a:srgbClr val="4A5B72"/>
+                </a:solidFill>
+                <a:latin typeface="Calibri" pitchFamily="34" charset="0"/>
+                <a:ea typeface="Calibri" pitchFamily="34" charset="-122"/>
+                <a:cs typeface="Calibri" pitchFamily="34" charset="-120"/>
+              </a:rPr>
+              <a:t>WALLABY_J100336-262923 at cloudDensity=100 was the first case since the seven-bug fix to show a real fit divergence — isolated first to a single bootstrap realization, then traced stage by stage through that realization’s own model-cube regeneration, using the same trace-hook infrastructure as before.</a:t>
+            </a:r>
+            <a:endParaRPr lang="en-US" sz="1300" dirty="0"/>
+          </a:p>
+        </p:txBody>
+      </p:sp>
+      <p:sp>
+        <p:nvSpPr>
+          <p:cNvPr id="5" name="Shape 3"/>
+          <p:cNvSpPr/>
+          <p:nvPr/>
+        </p:nvSpPr>
+        <p:spPr>
+          <a:xfrm>
+            <a:off x="640080" y="2743200"/>
+            <a:ext cx="3383280" cy="1554480"/>
+          </a:xfrm>
+          <a:prstGeom prst="roundRect">
+            <a:avLst>
+              <a:gd name="adj" fmla="val 4706"/>
+            </a:avLst>
+          </a:prstGeom>
+          <a:solidFill>
+            <a:srgbClr val="EAF1FB"/>
+          </a:solidFill>
+          <a:ln w="25400">
+            <a:solidFill>
+              <a:srgbClr val="2E8B57"/>
+            </a:solidFill>
+            <a:prstDash val="solid"/>
+          </a:ln>
+        </p:spPr>
+        <p:txBody>
+          <a:bodyPr/>
+          <a:p/>
+        </p:txBody>
+      </p:sp>
+      <p:sp>
+        <p:nvSpPr>
+          <p:cNvPr id="6" name="Text 4"/>
+          <p:cNvSpPr txBox="1"/>
+          <p:nvPr/>
+        </p:nvSpPr>
+        <p:spPr>
+          <a:xfrm>
+            <a:off x="822960" y="2926080"/>
+            <a:ext cx="3017520" cy="640080"/>
+          </a:xfrm>
+          <a:prstGeom prst="rect">
+            <a:avLst/>
+          </a:prstGeom>
+          <a:noFill/>
+          <a:ln/>
+        </p:spPr>
+        <p:txBody>
+          <a:bodyPr wrap="square" lIns="0" tIns="0" rIns="0" bIns="0" rtlCol="0" anchor="ctr"/>
+          <a:lstStyle/>
+          <a:p>
+            <a:pPr indent="0" marL="0">
+              <a:buNone/>
+            </a:pPr>
+            <a:r>
+              <a:rPr lang="en-US" sz="1300" b="1" dirty="0">
+                <a:solidFill>
+                  <a:srgbClr val="0B1E3F"/>
+                </a:solidFill>
+                <a:latin typeface="Calibri" pitchFamily="34" charset="0"/>
+                <a:ea typeface="Calibri" pitchFamily="34" charset="-122"/>
+                <a:cs typeface="Calibri" pitchFamily="34" charset="-120"/>
+              </a:rPr>
+              <a:t>Pre-convolution model</a:t>
+            </a:r>
+            <a:endParaRPr lang="en-US" sz="1300" dirty="0"/>
+          </a:p>
+          <a:p>
+            <a:pPr indent="0" marL="0">
+              <a:buNone/>
+            </a:pPr>
+            <a:r>
+              <a:rPr lang="en-US" sz="1300" b="1" dirty="0">
+                <a:solidFill>
+                  <a:srgbClr val="0B1E3F"/>
+                </a:solidFill>
+                <a:latin typeface="Calibri" pitchFamily="34" charset="0"/>
+                <a:ea typeface="Calibri" pitchFamily="34" charset="-122"/>
+                <a:cs typeface="Calibri" pitchFamily="34" charset="-120"/>
+              </a:rPr>
+              <a:t>(before FFT)</a:t>
+            </a:r>
+            <a:endParaRPr lang="en-US" sz="1300" dirty="0"/>
+          </a:p>
+        </p:txBody>
+      </p:sp>
+      <p:sp>
+        <p:nvSpPr>
+          <p:cNvPr id="7" name="Text 5"/>
+          <p:cNvSpPr txBox="1"/>
+          <p:nvPr/>
+        </p:nvSpPr>
+        <p:spPr>
+          <a:xfrm>
+            <a:off x="822960" y="3520440"/>
+            <a:ext cx="3017520" cy="502920"/>
+          </a:xfrm>
+          <a:prstGeom prst="rect">
+            <a:avLst/>
+          </a:prstGeom>
+          <a:noFill/>
+          <a:ln/>
+        </p:spPr>
+        <p:txBody>
+          <a:bodyPr wrap="square" lIns="0" tIns="0" rIns="0" bIns="0" rtlCol="0" anchor="ctr"/>
+          <a:lstStyle/>
+          <a:p>
+            <a:pPr indent="0" marL="0">
+              <a:buNone/>
+            </a:pPr>
+            <a:r>
+              <a:rPr lang="en-US" sz="3000" b="1" dirty="0">
+                <a:solidFill>
+                  <a:srgbClr val="2E8B57"/>
+                </a:solidFill>
+                <a:latin typeface="Cambria" pitchFamily="34" charset="0"/>
+                <a:ea typeface="Cambria" pitchFamily="34" charset="-122"/>
+                <a:cs typeface="Cambria" pitchFamily="34" charset="-120"/>
+              </a:rPr>
+              <a:t>100.00%</a:t>
+            </a:r>
+            <a:endParaRPr lang="en-US" sz="3000" dirty="0"/>
+          </a:p>
+        </p:txBody>
+      </p:sp>
+      <p:sp>
+        <p:nvSpPr>
+          <p:cNvPr id="8" name="Text 6"/>
+          <p:cNvSpPr txBox="1"/>
+          <p:nvPr/>
+        </p:nvSpPr>
+        <p:spPr>
+          <a:xfrm>
+            <a:off x="822960" y="3977640"/>
+            <a:ext cx="3017520" cy="274320"/>
+          </a:xfrm>
+          <a:prstGeom prst="rect">
+            <a:avLst/>
+          </a:prstGeom>
+          <a:noFill/>
+          <a:ln/>
+        </p:spPr>
+        <p:txBody>
+          <a:bodyPr wrap="square" lIns="0" tIns="0" rIns="0" bIns="0" rtlCol="0" anchor="ctr"/>
+          <a:lstStyle/>
+          <a:p>
+            <a:pPr indent="0" marL="0">
+              <a:buNone/>
+            </a:pPr>
+            <a:r>
+              <a:rPr lang="en-US" sz="1050" i="1" dirty="0">
+                <a:solidFill>
+                  <a:srgbClr val="4A5B72"/>
+                </a:solidFill>
+                <a:latin typeface="Calibri" pitchFamily="34" charset="0"/>
+                <a:ea typeface="Calibri" pitchFamily="34" charset="-122"/>
+                <a:cs typeface="Calibri" pitchFamily="34" charset="-120"/>
+              </a:rPr>
+              <a:t>102,168 / 102,168 voxels match — exact</a:t>
+            </a:r>
+            <a:endParaRPr lang="en-US" sz="1050" dirty="0"/>
+          </a:p>
+        </p:txBody>
+      </p:sp>
+      <p:sp>
+        <p:nvSpPr>
+          <p:cNvPr id="9" name="Shape 7"/>
+          <p:cNvSpPr/>
+          <p:nvPr/>
+        </p:nvSpPr>
+        <p:spPr>
+          <a:xfrm>
+            <a:off x="4005072" y="3419856"/>
+            <a:ext cx="356616" cy="201168"/>
+          </a:xfrm>
+          <a:prstGeom prst="rightArrow">
+            <a:avLst/>
+          </a:prstGeom>
+          <a:solidFill>
+            <a:srgbClr val="9AAEC7"/>
+          </a:solidFill>
+          <a:ln/>
+        </p:spPr>
+        <p:txBody>
+          <a:bodyPr/>
+          <a:p/>
+        </p:txBody>
+      </p:sp>
+      <p:sp>
+        <p:nvSpPr>
+          <p:cNvPr id="10" name="Shape 8"/>
+          <p:cNvSpPr/>
+          <p:nvPr/>
+        </p:nvSpPr>
+        <p:spPr>
+          <a:xfrm>
+            <a:off x="4343400" y="2743200"/>
+            <a:ext cx="3383280" cy="1554480"/>
+          </a:xfrm>
+          <a:prstGeom prst="roundRect">
+            <a:avLst>
+              <a:gd name="adj" fmla="val 4706"/>
+            </a:avLst>
+          </a:prstGeom>
+          <a:solidFill>
+            <a:srgbClr val="EAF1FB"/>
+          </a:solidFill>
+          <a:ln w="25400">
+            <a:solidFill>
+              <a:srgbClr val="F2A93B"/>
+            </a:solidFill>
+            <a:prstDash val="solid"/>
+          </a:ln>
+        </p:spPr>
+        <p:txBody>
+          <a:bodyPr/>
+          <a:p/>
+        </p:txBody>
+      </p:sp>
+      <p:sp>
+        <p:nvSpPr>
+          <p:cNvPr id="11" name="Text 9"/>
+          <p:cNvSpPr txBox="1"/>
+          <p:nvPr/>
+        </p:nvSpPr>
+        <p:spPr>
+          <a:xfrm>
+            <a:off x="4526280" y="2926080"/>
+            <a:ext cx="3017520" cy="640080"/>
+          </a:xfrm>
+          <a:prstGeom prst="rect">
+            <a:avLst/>
+          </a:prstGeom>
+          <a:noFill/>
+          <a:ln/>
+        </p:spPr>
+        <p:txBody>
+          <a:bodyPr wrap="square" lIns="0" tIns="0" rIns="0" bIns="0" rtlCol="0" anchor="ctr"/>
+          <a:lstStyle/>
+          <a:p>
+            <a:pPr indent="0" marL="0">
+              <a:buNone/>
+            </a:pPr>
+            <a:r>
+              <a:rPr lang="en-US" sz="1300" b="1" dirty="0">
+                <a:solidFill>
+                  <a:srgbClr val="0B1E3F"/>
+                </a:solidFill>
+                <a:latin typeface="Calibri" pitchFamily="34" charset="0"/>
+                <a:ea typeface="Calibri" pitchFamily="34" charset="-122"/>
+                <a:cs typeface="Calibri" pitchFamily="34" charset="-120"/>
+              </a:rPr>
+              <a:t>Beam kernel</a:t>
+            </a:r>
+            <a:endParaRPr lang="en-US" sz="1300" dirty="0"/>
+          </a:p>
+          <a:p>
+            <a:pPr indent="0" marL="0">
+              <a:buNone/>
+            </a:pPr>
+            <a:r>
+              <a:rPr lang="en-US" sz="1300" b="1" dirty="0">
+                <a:solidFill>
+                  <a:srgbClr val="0B1E3F"/>
+                </a:solidFill>
+                <a:latin typeface="Calibri" pitchFamily="34" charset="0"/>
+                <a:ea typeface="Calibri" pitchFamily="34" charset="-122"/>
+                <a:cs typeface="Calibri" pitchFamily="34" charset="-120"/>
+              </a:rPr>
+              <a:t>(real-space, pre-FFT)</a:t>
+            </a:r>
+            <a:endParaRPr lang="en-US" sz="1300" dirty="0"/>
+          </a:p>
+        </p:txBody>
+      </p:sp>
+      <p:sp>
+        <p:nvSpPr>
+          <p:cNvPr id="12" name="Text 10"/>
+          <p:cNvSpPr txBox="1"/>
+          <p:nvPr/>
+        </p:nvSpPr>
+        <p:spPr>
+          <a:xfrm>
+            <a:off x="4526280" y="3520440"/>
+            <a:ext cx="3017520" cy="502920"/>
+          </a:xfrm>
+          <a:prstGeom prst="rect">
+            <a:avLst/>
+          </a:prstGeom>
+          <a:noFill/>
+          <a:ln/>
+        </p:spPr>
+        <p:txBody>
+          <a:bodyPr wrap="square" lIns="0" tIns="0" rIns="0" bIns="0" rtlCol="0" anchor="ctr"/>
+          <a:lstStyle/>
+          <a:p>
+            <a:pPr indent="0" marL="0">
+              <a:buNone/>
+            </a:pPr>
+            <a:r>
+              <a:rPr lang="en-US" sz="3000" b="1" dirty="0">
+                <a:solidFill>
+                  <a:srgbClr val="F2A93B"/>
+                </a:solidFill>
+                <a:latin typeface="Cambria" pitchFamily="34" charset="0"/>
+                <a:ea typeface="Cambria" pitchFamily="34" charset="-122"/>
+                <a:cs typeface="Cambria" pitchFamily="34" charset="-120"/>
+              </a:rPr>
+              <a:t>100.00%</a:t>
+            </a:r>
+            <a:endParaRPr lang="en-US" sz="3000" dirty="0"/>
+          </a:p>
+        </p:txBody>
+      </p:sp>
+      <p:sp>
+        <p:nvSpPr>
+          <p:cNvPr id="13" name="Text 11"/>
+          <p:cNvSpPr txBox="1"/>
+          <p:nvPr/>
+        </p:nvSpPr>
+        <p:spPr>
+          <a:xfrm>
+            <a:off x="4526280" y="3977640"/>
+            <a:ext cx="3017520" cy="274320"/>
+          </a:xfrm>
+          <a:prstGeom prst="rect">
+            <a:avLst/>
+          </a:prstGeom>
+          <a:noFill/>
+          <a:ln/>
+        </p:spPr>
+        <p:txBody>
+          <a:bodyPr wrap="square" lIns="0" tIns="0" rIns="0" bIns="0" rtlCol="0" anchor="ctr"/>
+          <a:lstStyle/>
+          <a:p>
+            <a:pPr indent="0" marL="0">
+              <a:buNone/>
+            </a:pPr>
+            <a:r>
+              <a:rPr lang="en-US" sz="1050" i="1" dirty="0">
+                <a:solidFill>
+                  <a:srgbClr val="4A5B72"/>
+                </a:solidFill>
+                <a:latin typeface="Calibri" pitchFamily="34" charset="0"/>
+                <a:ea typeface="Calibri" pitchFamily="34" charset="-122"/>
+                <a:cs typeface="Calibri" pitchFamily="34" charset="-120"/>
+              </a:rPr>
+              <a:t>Every cell + the renormalization divisor — exact</a:t>
+            </a:r>
+            <a:endParaRPr lang="en-US" sz="1050" dirty="0"/>
+          </a:p>
+        </p:txBody>
+      </p:sp>
+      <p:sp>
+        <p:nvSpPr>
+          <p:cNvPr id="14" name="Shape 12"/>
+          <p:cNvSpPr/>
+          <p:nvPr/>
+        </p:nvSpPr>
+        <p:spPr>
+          <a:xfrm>
+            <a:off x="7708392" y="3419856"/>
+            <a:ext cx="356616" cy="201168"/>
+          </a:xfrm>
+          <a:prstGeom prst="rightArrow">
+            <a:avLst/>
+          </a:prstGeom>
+          <a:solidFill>
+            <a:srgbClr val="9AAEC7"/>
+          </a:solidFill>
+          <a:ln/>
+        </p:spPr>
+        <p:txBody>
+          <a:bodyPr/>
+          <a:p/>
+        </p:txBody>
+      </p:sp>
+      <p:sp>
+        <p:nvSpPr>
+          <p:cNvPr id="15" name="Shape 13"/>
+          <p:cNvSpPr/>
+          <p:nvPr/>
+        </p:nvSpPr>
+        <p:spPr>
+          <a:xfrm>
+            <a:off x="8046720" y="2743200"/>
+            <a:ext cx="3383280" cy="1554480"/>
+          </a:xfrm>
+          <a:prstGeom prst="roundRect">
+            <a:avLst>
+              <a:gd name="adj" fmla="val 4706"/>
+            </a:avLst>
+          </a:prstGeom>
+          <a:solidFill>
+            <a:srgbClr val="EAF1FB"/>
+          </a:solidFill>
+          <a:ln w="25400">
+            <a:solidFill>
+              <a:srgbClr val="C0392B"/>
+            </a:solidFill>
+            <a:prstDash val="solid"/>
+          </a:ln>
+        </p:spPr>
+        <p:txBody>
+          <a:bodyPr/>
+          <a:p/>
+        </p:txBody>
+      </p:sp>
+      <p:sp>
+        <p:nvSpPr>
+          <p:cNvPr id="16" name="Text 14"/>
+          <p:cNvSpPr txBox="1"/>
+          <p:nvPr/>
+        </p:nvSpPr>
+        <p:spPr>
+          <a:xfrm>
+            <a:off x="8229600" y="2926080"/>
+            <a:ext cx="3017520" cy="640080"/>
+          </a:xfrm>
+          <a:prstGeom prst="rect">
+            <a:avLst/>
+          </a:prstGeom>
+          <a:noFill/>
+          <a:ln/>
+        </p:spPr>
+        <p:txBody>
+          <a:bodyPr wrap="square" lIns="0" tIns="0" rIns="0" bIns="0" rtlCol="0" anchor="ctr"/>
+          <a:lstStyle/>
+          <a:p>
+            <a:pPr indent="0" marL="0">
+              <a:buNone/>
+            </a:pPr>
+            <a:r>
+              <a:rPr lang="en-US" sz="1300" b="1" dirty="0">
+                <a:solidFill>
+                  <a:srgbClr val="0B1E3F"/>
+                </a:solidFill>
+                <a:latin typeface="Calibri" pitchFamily="34" charset="0"/>
+                <a:ea typeface="Calibri" pitchFamily="34" charset="-122"/>
+                <a:cs typeface="Calibri" pitchFamily="34" charset="-120"/>
+              </a:rPr>
+              <a:t>Post-convolution model</a:t>
+            </a:r>
+            <a:endParaRPr lang="en-US" sz="1300" dirty="0"/>
+          </a:p>
+          <a:p>
+            <a:pPr indent="0" marL="0">
+              <a:buNone/>
+            </a:pPr>
+            <a:r>
+              <a:rPr lang="en-US" sz="1300" b="1" dirty="0">
+                <a:solidFill>
+                  <a:srgbClr val="0B1E3F"/>
+                </a:solidFill>
+                <a:latin typeface="Calibri" pitchFamily="34" charset="0"/>
+                <a:ea typeface="Calibri" pitchFamily="34" charset="-122"/>
+                <a:cs typeface="Calibri" pitchFamily="34" charset="-120"/>
+              </a:rPr>
+              <a:t>(after inverse FFT)</a:t>
+            </a:r>
+            <a:endParaRPr lang="en-US" sz="1300" dirty="0"/>
+          </a:p>
+        </p:txBody>
+      </p:sp>
+      <p:sp>
+        <p:nvSpPr>
+          <p:cNvPr id="17" name="Text 15"/>
+          <p:cNvSpPr txBox="1"/>
+          <p:nvPr/>
+        </p:nvSpPr>
+        <p:spPr>
+          <a:xfrm>
+            <a:off x="8229600" y="3520440"/>
+            <a:ext cx="3017520" cy="502920"/>
+          </a:xfrm>
+          <a:prstGeom prst="rect">
+            <a:avLst/>
+          </a:prstGeom>
+          <a:noFill/>
+          <a:ln/>
+        </p:spPr>
+        <p:txBody>
+          <a:bodyPr wrap="square" lIns="0" tIns="0" rIns="0" bIns="0" rtlCol="0" anchor="ctr"/>
+          <a:lstStyle/>
+          <a:p>
+            <a:pPr indent="0" marL="0">
+              <a:buNone/>
+            </a:pPr>
+            <a:r>
+              <a:rPr lang="en-US" sz="3000" b="1" dirty="0">
+                <a:solidFill>
+                  <a:srgbClr val="C0392B"/>
+                </a:solidFill>
+                <a:latin typeface="Cambria" pitchFamily="34" charset="0"/>
+                <a:ea typeface="Cambria" pitchFamily="34" charset="-122"/>
+                <a:cs typeface="Cambria" pitchFamily="34" charset="-120"/>
+              </a:rPr>
+              <a:t>58.49%</a:t>
+            </a:r>
+            <a:endParaRPr lang="en-US" sz="3000" dirty="0"/>
+          </a:p>
+        </p:txBody>
+      </p:sp>
+      <p:sp>
+        <p:nvSpPr>
+          <p:cNvPr id="18" name="Text 16"/>
+          <p:cNvSpPr txBox="1"/>
+          <p:nvPr/>
+        </p:nvSpPr>
+        <p:spPr>
+          <a:xfrm>
+            <a:off x="8229600" y="3977640"/>
+            <a:ext cx="3017520" cy="274320"/>
+          </a:xfrm>
+          <a:prstGeom prst="rect">
+            <a:avLst/>
+          </a:prstGeom>
+          <a:noFill/>
+          <a:ln/>
+        </p:spPr>
+        <p:txBody>
+          <a:bodyPr wrap="square" lIns="0" tIns="0" rIns="0" bIns="0" rtlCol="0" anchor="ctr"/>
+          <a:lstStyle/>
+          <a:p>
+            <a:pPr indent="0" marL="0">
+              <a:buNone/>
+            </a:pPr>
+            <a:r>
+              <a:rPr lang="en-US" sz="1050" i="1" dirty="0">
+                <a:solidFill>
+                  <a:srgbClr val="4A5B72"/>
+                </a:solidFill>
+                <a:latin typeface="Calibri" pitchFamily="34" charset="0"/>
+                <a:ea typeface="Calibri" pitchFamily="34" charset="-122"/>
+                <a:cs typeface="Calibri" pitchFamily="34" charset="-120"/>
+              </a:rPr>
+              <a:t>59,762 / 102,168 exact — divergence enters in the FFT convolution</a:t>
+            </a:r>
+            <a:endParaRPr lang="en-US" sz="1050" dirty="0"/>
+          </a:p>
+        </p:txBody>
+      </p:sp>
+      <p:sp>
+        <p:nvSpPr>
+          <p:cNvPr id="19" name="Shape 17"/>
+          <p:cNvSpPr/>
+          <p:nvPr/>
+        </p:nvSpPr>
+        <p:spPr>
+          <a:xfrm>
+            <a:off x="548640" y="4617720"/>
+            <a:ext cx="10881360" cy="1051560"/>
+          </a:xfrm>
+          <a:prstGeom prst="roundRect">
+            <a:avLst>
+              <a:gd name="adj" fmla="val 6957"/>
+            </a:avLst>
+          </a:prstGeom>
+          <a:solidFill>
+            <a:srgbClr val="0B1E3F"/>
+          </a:solidFill>
+          <a:ln/>
+        </p:spPr>
+        <p:txBody>
+          <a:bodyPr/>
+          <a:p/>
+        </p:txBody>
+      </p:sp>
+      <p:sp>
+        <p:nvSpPr>
+          <p:cNvPr id="20" name="Text 18"/>
+          <p:cNvSpPr txBox="1"/>
+          <p:nvPr/>
+        </p:nvSpPr>
+        <p:spPr>
+          <a:xfrm>
+            <a:off x="777240" y="4754880"/>
+            <a:ext cx="10424160" cy="365760"/>
+          </a:xfrm>
+          <a:prstGeom prst="rect">
+            <a:avLst/>
+          </a:prstGeom>
+          <a:noFill/>
+          <a:ln/>
+        </p:spPr>
+        <p:txBody>
+          <a:bodyPr wrap="square" lIns="0" tIns="0" rIns="0" bIns="0" rtlCol="0" anchor="ctr"/>
+          <a:lstStyle/>
+          <a:p>
+            <a:pPr indent="0" marL="0">
+              <a:buNone/>
+            </a:pPr>
+            <a:r>
+              <a:rPr lang="en-US" sz="1400" b="1" dirty="0">
+                <a:solidFill>
+                  <a:srgbClr val="F2A93B"/>
+                </a:solidFill>
+                <a:latin typeface="Calibri" pitchFamily="34" charset="0"/>
+                <a:ea typeface="Calibri" pitchFamily="34" charset="-122"/>
+                <a:cs typeface="Calibri" pitchFamily="34" charset="-120"/>
+              </a:rPr>
+              <a:t>CORRECTED: not compiler codegen — a genuine FFT transpose bug</a:t>
+            </a:r>
+            <a:endParaRPr lang="en-US" sz="1400" dirty="0"/>
+          </a:p>
+        </p:txBody>
+      </p:sp>
+      <p:sp>
+        <p:nvSpPr>
+          <p:cNvPr id="21" name="Text 19"/>
+          <p:cNvSpPr txBox="1"/>
+          <p:nvPr/>
+        </p:nvSpPr>
+        <p:spPr>
+          <a:xfrm>
+            <a:off x="777240" y="5074920"/>
+            <a:ext cx="10424160" cy="502920"/>
+          </a:xfrm>
+          <a:prstGeom prst="rect">
+            <a:avLst/>
+          </a:prstGeom>
+          <a:noFill/>
+          <a:ln/>
+        </p:spPr>
+        <p:txBody>
+          <a:bodyPr wrap="square" lIns="0" tIns="0" rIns="0" bIns="0" rtlCol="0" anchor="ctr"/>
+          <a:lstStyle/>
+          <a:p>
+            <a:pPr indent="0" marL="0">
+              <a:lnSpc>
+                <a:spcPct val="115000"/>
+              </a:lnSpc>
+              <a:buNone/>
+            </a:pPr>
+            <a:r>
+              <a:rPr lang="en-US" sz="1250" dirty="0">
+                <a:solidFill>
+                  <a:srgbClr val="AFC9E8"/>
+                </a:solidFill>
+                <a:latin typeface="Calibri" pitchFamily="34" charset="0"/>
+                <a:ea typeface="Calibri" pitchFamily="34" charset="-122"/>
+                <a:cs typeface="Calibri" pitchFamily="34" charset="-120"/>
+              </a:rPr>
+              <a:t>The "wasm32 vs native-arm64 codegen" theory from an earlier pass of this search was wrong, and was retracted after an isolated FFT-only repro (fixed 64x64 input, both platforms) came back 100% bit-identical -- proving the FFT itself was never the problem. Continued bisecting per instruction ("do you know for sure... keep testing until you hit the difference") instead of stopping at a plausible-sounding guess. See the next slide for what the repro actually found.</a:t>
+            </a:r>
+            <a:endParaRPr lang="en-US" sz="1250" dirty="0"/>
+          </a:p>
+        </p:txBody>
+      </p:sp>
+      <p:sp>
+        <p:nvSpPr>
+          <p:cNvPr id="22" name="Text 20"/>
+          <p:cNvSpPr txBox="1"/>
+          <p:nvPr/>
+        </p:nvSpPr>
+        <p:spPr>
+          <a:xfrm>
+            <a:off x="11521440" y="6446520"/>
+            <a:ext cx="457200" cy="274320"/>
+          </a:xfrm>
+          <a:prstGeom prst="rect">
+            <a:avLst/>
+          </a:prstGeom>
+          <a:noFill/>
+          <a:ln/>
+        </p:spPr>
+        <p:txBody>
+          <a:bodyPr wrap="square" lIns="0" tIns="0" rIns="0" bIns="0" rtlCol="0" anchor="ctr"/>
+          <a:lstStyle/>
+          <a:p>
+            <a:pPr algn="r" indent="0" marL="0">
+              <a:buNone/>
+            </a:pPr>
+            <a:r>
+              <a:rPr lang="en-US" sz="1000" dirty="0">
+                <a:solidFill>
+                  <a:srgbClr val="4A5B72"/>
+                </a:solidFill>
+                <a:latin typeface="Calibri" pitchFamily="34" charset="0"/>
+                <a:ea typeface="Calibri" pitchFamily="34" charset="-122"/>
+                <a:cs typeface="Calibri" pitchFamily="34" charset="-120"/>
+              </a:rPr>
+              <a:t>13</a:t>
+            </a:r>
+            <a:endParaRPr lang="en-US" sz="1000" dirty="0"/>
+          </a:p>
+        </p:txBody>
+      </p:sp>
+    </p:spTree>
+  </p:cSld>
+  <p:clrMapOvr>
+    <a:masterClrMapping/>
+  </p:clrMapOvr>
+</p:sld>
+</file>
+
+<file path=ppt/slides/slide14.xml><?xml version="1.0" encoding="utf-8"?>
+<p:sld xmlns:a="http://schemas.openxmlformats.org/drawingml/2006/main" xmlns:p="http://schemas.openxmlformats.org/presentationml/2006/main" xmlns:r="http://schemas.openxmlformats.org/officeDocument/2006/relationships">
+  <p:cSld>
+    <p:spTree>
+      <p:nvGrpSpPr>
+        <p:cNvPr id="1" name=""/>
+        <p:cNvGrpSpPr/>
+        <p:nvPr/>
+      </p:nvGrpSpPr>
+      <p:grpSpPr/>
+      <p:sp>
+        <p:nvSpPr>
+          <p:cNvPr id="2" name="Text 0"/>
+          <p:cNvSpPr txBox="1"/>
+          <p:nvPr/>
+        </p:nvSpPr>
+        <p:spPr>
+          <a:xfrm>
+            <a:off x="548640" y="365760"/>
+            <a:ext cx="7315200" cy="320040"/>
+          </a:xfrm>
+          <a:prstGeom prst="rect">
+            <a:avLst/>
+          </a:prstGeom>
+          <a:noFill/>
+          <a:ln/>
+        </p:spPr>
+        <p:txBody>
+          <a:bodyPr wrap="square" lIns="0" tIns="0" rIns="0" bIns="0" rtlCol="0" anchor="ctr"/>
+          <a:lstStyle/>
+          <a:p>
+            <a:pPr indent="0" marL="0">
+              <a:buNone/>
+            </a:pPr>
+            <a:r>
+              <a:rPr lang="en-US" sz="1200" b="1" spc="200" kern="0" dirty="0">
+                <a:solidFill>
+                  <a:srgbClr val="F2A93B"/>
+                </a:solidFill>
+                <a:latin typeface="Calibri" pitchFamily="34" charset="0"/>
+                <a:ea typeface="Calibri" pitchFamily="34" charset="-122"/>
+                <a:cs typeface="Calibri" pitchFamily="34" charset="-120"/>
+              </a:rPr>
+              <a:t>THE ACTUAL ROOT CAUSE — FOUND WITH A REPRO</a:t>
+            </a:r>
+            <a:endParaRPr lang="en-US" sz="1200" dirty="0"/>
+          </a:p>
+        </p:txBody>
+      </p:sp>
+      <p:sp>
+        <p:nvSpPr>
+          <p:cNvPr id="3" name="Text 1"/>
+          <p:cNvSpPr txBox="1"/>
+          <p:nvPr/>
+        </p:nvSpPr>
+        <p:spPr>
+          <a:xfrm>
+            <a:off x="548640" y="685800"/>
+            <a:ext cx="11064240" cy="822960"/>
+          </a:xfrm>
+          <a:prstGeom prst="rect">
+            <a:avLst/>
+          </a:prstGeom>
+          <a:noFill/>
+          <a:ln/>
+        </p:spPr>
+        <p:txBody>
+          <a:bodyPr wrap="square" lIns="0" tIns="0" rIns="0" bIns="0" rtlCol="0" anchor="ctr"/>
+          <a:lstStyle/>
+          <a:p>
+            <a:pPr indent="0" marL="0">
+              <a:buNone/>
+            </a:pPr>
+            <a:r>
+              <a:rPr lang="en-US" sz="3000" b="1" dirty="0">
+                <a:solidFill>
+                  <a:srgbClr val="0B1E3F"/>
+                </a:solidFill>
+                <a:latin typeface="Cambria" pitchFamily="34" charset="0"/>
+                <a:ea typeface="Cambria" pitchFamily="34" charset="-122"/>
+                <a:cs typeface="Cambria" pitchFamily="34" charset="-120"/>
+              </a:rPr>
+              <a:t>Fortran computes FFT(A^T), not FFT(A) — and it is fixable</a:t>
+            </a:r>
+            <a:endParaRPr lang="en-US" sz="3000" dirty="0"/>
+          </a:p>
+        </p:txBody>
+      </p:sp>
+      <p:sp>
+        <p:nvSpPr>
+          <p:cNvPr id="4" name="Text 2"/>
+          <p:cNvSpPr txBox="1"/>
+          <p:nvPr/>
+        </p:nvSpPr>
+        <p:spPr>
+          <a:xfrm>
+            <a:off x="548640" y="1600200"/>
+            <a:ext cx="11064240" cy="640080"/>
+          </a:xfrm>
+          <a:prstGeom prst="rect">
+            <a:avLst/>
+          </a:prstGeom>
+          <a:noFill/>
+          <a:ln/>
+        </p:spPr>
+        <p:txBody>
+          <a:bodyPr wrap="square" lIns="0" tIns="0" rIns="0" bIns="0" rtlCol="0" anchor="ctr"/>
+          <a:lstStyle/>
+          <a:p>
+            <a:pPr indent="0" marL="0">
+              <a:buNone/>
+            </a:pPr>
+            <a:r>
+              <a:rPr lang="en-US" sz="1400" dirty="0">
+                <a:solidFill>
+                  <a:srgbClr val="4A5B72"/>
+                </a:solidFill>
+                <a:latin typeface="Calibri" pitchFamily="34" charset="0"/>
+                <a:ea typeface="Calibri" pitchFamily="34" charset="-122"/>
+                <a:cs typeface="Calibri" pitchFamily="34" charset="-120"/>
+              </a:rPr>
+              <a:t>Fortran’s PaddedArray is column-major; TwoDConvolution.f passes it untransposed into FFTW’s row-major C API, so the compiled codelets process the byte-transpose of the logical array. DFT2D(A^T)(u,v)=DFT2D(A)(v,u) is an exact MATH identity but not a floating-point one -- confirmed by feeding a plain C program Fortran’s own column-major memory layout and reproducing Fortran’s real compiled output exactly.</a:t>
+            </a:r>
+            <a:endParaRPr lang="en-US" sz="1400" dirty="0"/>
+          </a:p>
+        </p:txBody>
+      </p:sp>
+      <p:sp>
+        <p:nvSpPr>
+          <p:cNvPr id="5" name="Shape 3"/>
+          <p:cNvSpPr/>
+          <p:nvPr/>
+        </p:nvSpPr>
+        <p:spPr>
+          <a:xfrm>
+            <a:off x="548640" y="2560320"/>
+            <a:ext cx="3383280" cy="2651760"/>
+          </a:xfrm>
+          <a:prstGeom prst="roundRect">
+            <a:avLst>
+              <a:gd name="adj" fmla="val 2759"/>
+            </a:avLst>
+          </a:prstGeom>
+          <a:solidFill>
+            <a:srgbClr val="EAF1FB"/>
+          </a:solidFill>
+          <a:ln/>
+          <a:effectLst>
+            <a:outerShdw sx="100000" sy="100000" kx="0" ky="0" algn="bl" rotWithShape="0" blurRad="76200" dist="25400" dir="5400000">
+              <a:srgbClr val="9AAEC7">
+                <a:alpha val="35000"/>
+              </a:srgbClr>
+            </a:outerShdw>
+          </a:effectLst>
+        </p:spPr>
+      </p:sp>
+      <p:sp>
+        <p:nvSpPr>
+          <p:cNvPr id="6" name="Text 4"/>
+          <p:cNvSpPr txBox="1"/>
+          <p:nvPr/>
+        </p:nvSpPr>
+        <p:spPr>
+          <a:xfrm>
+            <a:off x="777240" y="2880360"/>
+            <a:ext cx="2926080" cy="822960"/>
+          </a:xfrm>
+          <a:prstGeom prst="rect">
+            <a:avLst/>
+          </a:prstGeom>
+          <a:noFill/>
+          <a:ln/>
+        </p:spPr>
+        <p:txBody>
+          <a:bodyPr wrap="square" lIns="0" tIns="0" rIns="0" bIns="0" rtlCol="0" anchor="ctr"/>
+          <a:lstStyle/>
+          <a:p>
+            <a:pPr indent="0" marL="0">
+              <a:buNone/>
+            </a:pPr>
+            <a:r>
+              <a:rPr lang="en-US" sz="4000" b="1" dirty="0">
+                <a:solidFill>
+                  <a:srgbClr val="F2A93B"/>
+                </a:solidFill>
+                <a:latin typeface="Cambria" pitchFamily="34" charset="0"/>
+                <a:ea typeface="Cambria" pitchFamily="34" charset="-122"/>
+                <a:cs typeface="Cambria" pitchFamily="34" charset="-120"/>
+              </a:rPr>
+              <a:t>2,112 / 2,112</a:t>
+            </a:r>
+            <a:endParaRPr lang="en-US" sz="4000" dirty="0"/>
+          </a:p>
+        </p:txBody>
+      </p:sp>
+      <p:sp>
+        <p:nvSpPr>
+          <p:cNvPr id="7" name="Text 5"/>
+          <p:cNvSpPr txBox="1"/>
+          <p:nvPr/>
+        </p:nvSpPr>
+        <p:spPr>
+          <a:xfrm>
+            <a:off x="777240" y="3794760"/>
+            <a:ext cx="2926080" cy="1188720"/>
+          </a:xfrm>
+          <a:prstGeom prst="rect">
+            <a:avLst/>
+          </a:prstGeom>
+          <a:noFill/>
+          <a:ln/>
+        </p:spPr>
+        <p:txBody>
+          <a:bodyPr wrap="square" lIns="0" tIns="0" rIns="0" bIns="0" rtlCol="0" anchor="ctr"/>
+          <a:lstStyle/>
+          <a:p>
+            <a:pPr indent="0" marL="0">
+              <a:lnSpc>
+                <a:spcPct val="115000"/>
+              </a:lnSpc>
+              <a:buNone/>
+            </a:pPr>
+            <a:r>
+              <a:rPr lang="en-US" sz="1300" dirty="0">
+                <a:solidFill>
+                  <a:srgbClr val="4A5B72"/>
+                </a:solidFill>
+                <a:latin typeface="Calibri" pitchFamily="34" charset="0"/>
+                <a:ea typeface="Calibri" pitchFamily="34" charset="-122"/>
+                <a:cs typeface="Calibri" pitchFamily="34" charset="-120"/>
+              </a:rPr>
+              <a:t>Raw FFT bins reproduced</a:t>
+            </a:r>
+            <a:endParaRPr lang="en-US" sz="1300" dirty="0"/>
+          </a:p>
+          <a:p>
+            <a:pPr indent="0" marL="0">
+              <a:lnSpc>
+                <a:spcPct val="115000"/>
+              </a:lnSpc>
+              <a:buNone/>
+            </a:pPr>
+            <a:r>
+              <a:rPr lang="en-US" sz="1300" dirty="0">
+                <a:solidFill>
+                  <a:srgbClr val="4A5B72"/>
+                </a:solidFill>
+                <a:latin typeface="Calibri" pitchFamily="34" charset="0"/>
+                <a:ea typeface="Calibri" pitchFamily="34" charset="-122"/>
+                <a:cs typeface="Calibri" pitchFamily="34" charset="-120"/>
+              </a:rPr>
+              <a:t>bit-for-bit by feeding C</a:t>
+            </a:r>
+            <a:endParaRPr lang="en-US" sz="1300" dirty="0"/>
+          </a:p>
+          <a:p>
+            <a:pPr indent="0" marL="0">
+              <a:lnSpc>
+                <a:spcPct val="115000"/>
+              </a:lnSpc>
+              <a:buNone/>
+            </a:pPr>
+            <a:r>
+              <a:rPr lang="en-US" sz="1300" dirty="0">
+                <a:solidFill>
+                  <a:srgbClr val="4A5B72"/>
+                </a:solidFill>
+                <a:latin typeface="Calibri" pitchFamily="34" charset="0"/>
+                <a:ea typeface="Calibri" pitchFamily="34" charset="-122"/>
+                <a:cs typeface="Calibri" pitchFamily="34" charset="-120"/>
+              </a:rPr>
+              <a:t>Fortran’s own memory layout</a:t>
+            </a:r>
+            <a:endParaRPr lang="en-US" sz="1300" dirty="0"/>
+          </a:p>
+        </p:txBody>
+      </p:sp>
+      <p:sp>
+        <p:nvSpPr>
+          <p:cNvPr id="8" name="Shape 6"/>
+          <p:cNvSpPr/>
+          <p:nvPr/>
+        </p:nvSpPr>
+        <p:spPr>
+          <a:xfrm>
+            <a:off x="4251960" y="2560320"/>
+            <a:ext cx="3383280" cy="2651760"/>
+          </a:xfrm>
+          <a:prstGeom prst="roundRect">
+            <a:avLst>
+              <a:gd name="adj" fmla="val 2759"/>
+            </a:avLst>
+          </a:prstGeom>
+          <a:solidFill>
+            <a:srgbClr val="EAF1FB"/>
+          </a:solidFill>
+          <a:ln/>
+          <a:effectLst>
+            <a:outerShdw sx="100000" sy="100000" kx="0" ky="0" algn="bl" rotWithShape="0" blurRad="76200" dist="25400" dir="5400000">
+              <a:srgbClr val="9AAEC7">
+                <a:alpha val="35000"/>
+              </a:srgbClr>
+            </a:outerShdw>
+          </a:effectLst>
+        </p:spPr>
+      </p:sp>
+      <p:sp>
+        <p:nvSpPr>
+          <p:cNvPr id="9" name="Text 7"/>
+          <p:cNvSpPr txBox="1"/>
+          <p:nvPr/>
+        </p:nvSpPr>
+        <p:spPr>
+          <a:xfrm>
+            <a:off x="4480560" y="2880360"/>
+            <a:ext cx="2926080" cy="822960"/>
+          </a:xfrm>
+          <a:prstGeom prst="rect">
+            <a:avLst/>
+          </a:prstGeom>
+          <a:noFill/>
+          <a:ln/>
+        </p:spPr>
+        <p:txBody>
+          <a:bodyPr wrap="square" lIns="0" tIns="0" rIns="0" bIns="0" rtlCol="0" anchor="ctr"/>
+          <a:lstStyle/>
+          <a:p>
+            <a:pPr indent="0" marL="0">
+              <a:buNone/>
+            </a:pPr>
+            <a:r>
+              <a:rPr lang="en-US" sz="4000" b="1" dirty="0">
+                <a:solidFill>
+                  <a:srgbClr val="1C9C8B"/>
+                </a:solidFill>
+                <a:latin typeface="Cambria" pitchFamily="34" charset="0"/>
+                <a:ea typeface="Cambria" pitchFamily="34" charset="-122"/>
+                <a:cs typeface="Cambria" pitchFamily="34" charset="-120"/>
+              </a:rPr>
+              <a:t>64 / 64</a:t>
+            </a:r>
+            <a:endParaRPr lang="en-US" sz="4000" dirty="0"/>
+          </a:p>
+        </p:txBody>
+      </p:sp>
+      <p:sp>
+        <p:nvSpPr>
+          <p:cNvPr id="10" name="Text 8"/>
+          <p:cNvSpPr txBox="1"/>
+          <p:nvPr/>
+        </p:nvSpPr>
+        <p:spPr>
+          <a:xfrm>
+            <a:off x="4480560" y="3794760"/>
+            <a:ext cx="2926080" cy="1188720"/>
+          </a:xfrm>
+          <a:prstGeom prst="rect">
+            <a:avLst/>
+          </a:prstGeom>
+          <a:noFill/>
+          <a:ln/>
+        </p:spPr>
+        <p:txBody>
+          <a:bodyPr wrap="square" lIns="0" tIns="0" rIns="0" bIns="0" rtlCol="0" anchor="ctr"/>
+          <a:lstStyle/>
+          <a:p>
+            <a:pPr indent="0" marL="0">
+              <a:lnSpc>
+                <a:spcPct val="115000"/>
+              </a:lnSpc>
+              <a:buNone/>
+            </a:pPr>
+            <a:r>
+              <a:rPr lang="en-US" sz="1300" dirty="0">
+                <a:solidFill>
+                  <a:srgbClr val="4A5B72"/>
+                </a:solidFill>
+                <a:latin typeface="Calibri" pitchFamily="34" charset="0"/>
+                <a:ea typeface="Calibri" pitchFamily="34" charset="-122"/>
+                <a:cs typeface="Calibri" pitchFamily="34" charset="-120"/>
+              </a:rPr>
+              <a:t>Full round-trip pixels</a:t>
+            </a:r>
+            <a:endParaRPr lang="en-US" sz="1300" dirty="0"/>
+          </a:p>
+          <a:p>
+            <a:pPr indent="0" marL="0">
+              <a:lnSpc>
+                <a:spcPct val="115000"/>
+              </a:lnSpc>
+              <a:buNone/>
+            </a:pPr>
+            <a:r>
+              <a:rPr lang="en-US" sz="1300" dirty="0">
+                <a:solidFill>
+                  <a:srgbClr val="4A5B72"/>
+                </a:solidFill>
+                <a:latin typeface="Calibri" pitchFamily="34" charset="0"/>
+                <a:ea typeface="Calibri" pitchFamily="34" charset="-122"/>
+                <a:cs typeface="Calibri" pitchFamily="34" charset="-120"/>
+              </a:rPr>
+              <a:t>(FFT+multiply+inverse+cast)</a:t>
+            </a:r>
+            <a:endParaRPr lang="en-US" sz="1300" dirty="0"/>
+          </a:p>
+          <a:p>
+            <a:pPr indent="0" marL="0">
+              <a:lnSpc>
+                <a:spcPct val="115000"/>
+              </a:lnSpc>
+              <a:buNone/>
+            </a:pPr>
+            <a:r>
+              <a:rPr lang="en-US" sz="1300" dirty="0">
+                <a:solidFill>
+                  <a:srgbClr val="4A5B72"/>
+                </a:solidFill>
+                <a:latin typeface="Calibri" pitchFamily="34" charset="0"/>
+                <a:ea typeface="Calibri" pitchFamily="34" charset="-122"/>
+                <a:cs typeface="Calibri" pitchFamily="34" charset="-120"/>
+              </a:rPr>
+              <a:t>now bit-exact vs Fortran</a:t>
+            </a:r>
+            <a:endParaRPr lang="en-US" sz="1300" dirty="0"/>
+          </a:p>
+        </p:txBody>
+      </p:sp>
+      <p:sp>
+        <p:nvSpPr>
+          <p:cNvPr id="11" name="Shape 9"/>
+          <p:cNvSpPr/>
+          <p:nvPr/>
+        </p:nvSpPr>
+        <p:spPr>
+          <a:xfrm>
+            <a:off x="7955280" y="2560320"/>
+            <a:ext cx="3383280" cy="2651760"/>
+          </a:xfrm>
+          <a:prstGeom prst="roundRect">
+            <a:avLst>
+              <a:gd name="adj" fmla="val 2759"/>
+            </a:avLst>
+          </a:prstGeom>
+          <a:solidFill>
+            <a:srgbClr val="EAF1FB"/>
+          </a:solidFill>
+          <a:ln/>
+          <a:effectLst>
+            <a:outerShdw sx="100000" sy="100000" kx="0" ky="0" algn="bl" rotWithShape="0" blurRad="76200" dist="25400" dir="5400000">
+              <a:srgbClr val="9AAEC7">
+                <a:alpha val="35000"/>
+              </a:srgbClr>
+            </a:outerShdw>
+          </a:effectLst>
+        </p:spPr>
+      </p:sp>
+      <p:sp>
+        <p:nvSpPr>
+          <p:cNvPr id="12" name="Text 10"/>
+          <p:cNvSpPr txBox="1"/>
+          <p:nvPr/>
+        </p:nvSpPr>
+        <p:spPr>
+          <a:xfrm>
+            <a:off x="8183880" y="2880360"/>
+            <a:ext cx="2926080" cy="822960"/>
+          </a:xfrm>
+          <a:prstGeom prst="rect">
+            <a:avLst/>
+          </a:prstGeom>
+          <a:noFill/>
+          <a:ln/>
+        </p:spPr>
+        <p:txBody>
+          <a:bodyPr wrap="square" lIns="0" tIns="0" rIns="0" bIns="0" rtlCol="0" anchor="ctr"/>
+          <a:lstStyle/>
+          <a:p>
+            <a:pPr indent="0" marL="0">
+              <a:buNone/>
+            </a:pPr>
+            <a:r>
+              <a:rPr lang="en-US" sz="4000" b="1" dirty="0">
+                <a:solidFill>
+                  <a:srgbClr val="0B1E3F"/>
+                </a:solidFill>
+                <a:latin typeface="Cambria" pitchFamily="34" charset="0"/>
+                <a:ea typeface="Cambria" pitchFamily="34" charset="-122"/>
+                <a:cs typeface="Cambria" pitchFamily="34" charset="-120"/>
+              </a:rPr>
+              <a:t>2</a:t>
+            </a:r>
+            <a:endParaRPr lang="en-US" sz="4000" dirty="0"/>
+          </a:p>
+        </p:txBody>
+      </p:sp>
+      <p:sp>
+        <p:nvSpPr>
+          <p:cNvPr id="13" name="Text 11"/>
+          <p:cNvSpPr txBox="1"/>
+          <p:nvPr/>
+        </p:nvSpPr>
+        <p:spPr>
+          <a:xfrm>
+            <a:off x="8183880" y="3794760"/>
+            <a:ext cx="2926080" cy="1188720"/>
+          </a:xfrm>
+          <a:prstGeom prst="rect">
+            <a:avLst/>
+          </a:prstGeom>
+          <a:noFill/>
+          <a:ln/>
+        </p:spPr>
+        <p:txBody>
+          <a:bodyPr wrap="square" lIns="0" tIns="0" rIns="0" bIns="0" rtlCol="0" anchor="ctr"/>
+          <a:lstStyle/>
+          <a:p>
+            <a:pPr indent="0" marL="0">
+              <a:lnSpc>
+                <a:spcPct val="115000"/>
+              </a:lnSpc>
+              <a:buNone/>
+            </a:pPr>
+            <a:r>
+              <a:rPr lang="en-US" sz="1300" dirty="0">
+                <a:solidFill>
+                  <a:srgbClr val="4A5B72"/>
+                </a:solidFill>
+                <a:latin typeface="Calibri" pitchFamily="34" charset="0"/>
+                <a:ea typeface="Calibri" pitchFamily="34" charset="-122"/>
+                <a:cs typeface="Calibri" pitchFamily="34" charset="-120"/>
+              </a:rPr>
+              <a:t>Real bugs found and fixed</a:t>
+            </a:r>
+            <a:endParaRPr lang="en-US" sz="1300" dirty="0"/>
+          </a:p>
+          <a:p>
+            <a:pPr indent="0" marL="0">
+              <a:lnSpc>
+                <a:spcPct val="115000"/>
+              </a:lnSpc>
+              <a:buNone/>
+            </a:pPr>
+            <a:r>
+              <a:rPr lang="en-US" sz="1300" dirty="0">
+                <a:solidFill>
+                  <a:srgbClr val="4A5B72"/>
+                </a:solidFill>
+                <a:latin typeface="Calibri" pitchFamily="34" charset="0"/>
+                <a:ea typeface="Calibri" pitchFamily="34" charset="-122"/>
+                <a:cs typeface="Calibri" pitchFamily="34" charset="-120"/>
+              </a:rPr>
+              <a:t>this pass: FFT transpose +</a:t>
+            </a:r>
+            <a:endParaRPr lang="en-US" sz="1300" dirty="0"/>
+          </a:p>
+          <a:p>
+            <a:pPr indent="0" marL="0">
+              <a:lnSpc>
+                <a:spcPct val="115000"/>
+              </a:lnSpc>
+              <a:buNone/>
+            </a:pPr>
+            <a:r>
+              <a:rPr lang="en-US" sz="1300" dirty="0">
+                <a:solidFill>
+                  <a:srgbClr val="4A5B72"/>
+                </a:solidFill>
+                <a:latin typeface="Calibri" pitchFamily="34" charset="0"/>
+                <a:ea typeface="Calibri" pitchFamily="34" charset="-122"/>
+                <a:cs typeface="Calibri" pitchFamily="34" charset="-120"/>
+              </a:rPr>
+              <a:t>a padded-size mismatch</a:t>
+            </a:r>
+            <a:endParaRPr lang="en-US" sz="1300" dirty="0"/>
+          </a:p>
+        </p:txBody>
+      </p:sp>
+      <p:sp>
+        <p:nvSpPr>
+          <p:cNvPr id="14" name="Text 12"/>
+          <p:cNvSpPr txBox="1"/>
+          <p:nvPr/>
+        </p:nvSpPr>
+        <p:spPr>
+          <a:xfrm>
+            <a:off x="11521440" y="6446520"/>
+            <a:ext cx="457200" cy="274320"/>
+          </a:xfrm>
+          <a:prstGeom prst="rect">
+            <a:avLst/>
+          </a:prstGeom>
+          <a:noFill/>
+          <a:ln/>
+        </p:spPr>
+        <p:txBody>
+          <a:bodyPr wrap="square" lIns="0" tIns="0" rIns="0" bIns="0" rtlCol="0" anchor="ctr"/>
+          <a:lstStyle/>
+          <a:p>
+            <a:pPr algn="r" indent="0" marL="0">
+              <a:buNone/>
+            </a:pPr>
+            <a:r>
+              <a:rPr lang="en-US" sz="1000" dirty="0">
+                <a:solidFill>
+                  <a:srgbClr val="4A5B72"/>
+                </a:solidFill>
+                <a:latin typeface="Calibri" pitchFamily="34" charset="0"/>
+                <a:ea typeface="Calibri" pitchFamily="34" charset="-122"/>
+                <a:cs typeface="Calibri" pitchFamily="34" charset="-120"/>
+              </a:rPr>
+              <a:t>14</a:t>
+            </a:r>
+            <a:endParaRPr lang="en-US" sz="1000" dirty="0"/>
+          </a:p>
+        </p:txBody>
+      </p:sp>
+    </p:spTree>
+  </p:cSld>
+  <p:clrMapOvr>
+    <a:masterClrMapping/>
+  </p:clrMapOvr>
+</p:sld>
+</file>
+
+<file path=ppt/slides/slide15.xml><?xml version="1.0" encoding="utf-8"?>
+<p:sld xmlns:a="http://schemas.openxmlformats.org/drawingml/2006/main" xmlns:p="http://schemas.openxmlformats.org/presentationml/2006/main" xmlns:r="http://schemas.openxmlformats.org/officeDocument/2006/relationships">
+  <p:cSld>
+    <p:spTree>
+      <p:nvGrpSpPr>
+        <p:cNvPr id="1" name=""/>
+        <p:cNvGrpSpPr/>
+        <p:nvPr/>
+      </p:nvGrpSpPr>
+      <p:grpSpPr/>
+      <p:sp>
+        <p:nvSpPr>
+          <p:cNvPr id="2" name="Text 0"/>
+          <p:cNvSpPr txBox="1"/>
+          <p:nvPr/>
+        </p:nvSpPr>
+        <p:spPr>
+          <a:xfrm>
+            <a:off x="548640" y="365760"/>
+            <a:ext cx="7315200" cy="320040"/>
+          </a:xfrm>
+          <a:prstGeom prst="rect">
+            <a:avLst/>
+          </a:prstGeom>
+          <a:noFill/>
+          <a:ln/>
+        </p:spPr>
+        <p:txBody>
+          <a:bodyPr wrap="square" lIns="0" tIns="0" rIns="0" bIns="0" rtlCol="0" anchor="ctr"/>
+          <a:lstStyle/>
+          <a:p>
+            <a:pPr indent="0" marL="0">
+              <a:buNone/>
+            </a:pPr>
+            <a:r>
+              <a:rPr lang="en-US" sz="1200" b="1" spc="200" kern="0" dirty="0">
+                <a:solidFill>
+                  <a:srgbClr val="F2A93B"/>
+                </a:solidFill>
+                <a:latin typeface="Calibri" pitchFamily="34" charset="0"/>
+                <a:ea typeface="Calibri" pitchFamily="34" charset="-122"/>
+                <a:cs typeface="Calibri" pitchFamily="34" charset="-120"/>
+              </a:rPr>
+              <a:t>THE FIX</a:t>
+            </a:r>
+            <a:endParaRPr lang="en-US" sz="1200" dirty="0"/>
+          </a:p>
+        </p:txBody>
+      </p:sp>
+      <p:sp>
+        <p:nvSpPr>
+          <p:cNvPr id="3" name="Text 1"/>
+          <p:cNvSpPr txBox="1"/>
+          <p:nvPr/>
+        </p:nvSpPr>
+        <p:spPr>
+          <a:xfrm>
+            <a:off x="548640" y="685800"/>
+            <a:ext cx="11064240" cy="640080"/>
+          </a:xfrm>
+          <a:prstGeom prst="rect">
+            <a:avLst/>
+          </a:prstGeom>
+          <a:noFill/>
+          <a:ln/>
+        </p:spPr>
+        <p:txBody>
+          <a:bodyPr wrap="square" lIns="0" tIns="0" rIns="0" bIns="0" rtlCol="0" anchor="ctr"/>
+          <a:lstStyle/>
+          <a:p>
+            <a:pPr indent="0" marL="0">
+              <a:buNone/>
+            </a:pPr>
+            <a:r>
+              <a:rPr lang="en-US" sz="2800" b="1" dirty="0">
+                <a:solidFill>
+                  <a:srgbClr val="FFFFFF"/>
+                </a:solidFill>
+                <a:latin typeface="Cambria" pitchFamily="34" charset="0"/>
+                <a:ea typeface="Cambria" pitchFamily="34" charset="-122"/>
+                <a:cs typeface="Cambria" pitchFamily="34" charset="-120"/>
+              </a:rPr>
+              <a:t>Both bugs fixed on the JS side, matching Fortran’s actual (not intended) behavior</a:t>
+            </a:r>
+            <a:endParaRPr lang="en-US" sz="2800" dirty="0"/>
+          </a:p>
+        </p:txBody>
+      </p:sp>
+      <p:sp>
+        <p:nvSpPr>
+          <p:cNvPr id="4" name="Shape 2"/>
+          <p:cNvSpPr/>
+          <p:nvPr/>
+        </p:nvSpPr>
+        <p:spPr>
+          <a:xfrm>
+            <a:off x="548640" y="1645920"/>
+            <a:ext cx="384048" cy="384048"/>
+          </a:xfrm>
+          <a:prstGeom prst="roundRect">
+            <a:avLst>
+              <a:gd name="adj" fmla="val 50000"/>
+            </a:avLst>
+          </a:prstGeom>
+          <a:solidFill>
+            <a:srgbClr val="F2A93B"/>
+          </a:solidFill>
+          <a:ln/>
+        </p:spPr>
+      </p:sp>
+      <p:sp>
+        <p:nvSpPr>
+          <p:cNvPr id="5" name="Text 3"/>
+          <p:cNvSpPr txBox="1"/>
+          <p:nvPr/>
+        </p:nvSpPr>
+        <p:spPr>
+          <a:xfrm>
+            <a:off x="548640" y="1645920"/>
+            <a:ext cx="384048" cy="384048"/>
+          </a:xfrm>
+          <a:prstGeom prst="rect">
+            <a:avLst/>
+          </a:prstGeom>
+          <a:noFill/>
+          <a:ln/>
+        </p:spPr>
+        <p:txBody>
+          <a:bodyPr wrap="square" lIns="0" tIns="0" rIns="0" bIns="0" rtlCol="0" anchor="ctr"/>
+          <a:lstStyle/>
+          <a:p>
+            <a:pPr algn="ctr" indent="0" marL="0">
+              <a:buNone/>
+            </a:pPr>
+            <a:r>
+              <a:rPr lang="en-US" sz="1500" b="1" dirty="0">
+                <a:solidFill>
+                  <a:srgbClr val="071427"/>
+                </a:solidFill>
+                <a:latin typeface="Calibri" pitchFamily="34" charset="0"/>
+                <a:ea typeface="Calibri" pitchFamily="34" charset="-122"/>
+                <a:cs typeface="Calibri" pitchFamily="34" charset="-120"/>
+              </a:rPr>
+              <a:t>1</a:t>
+            </a:r>
+            <a:endParaRPr lang="en-US" sz="1500" dirty="0"/>
+          </a:p>
+        </p:txBody>
+      </p:sp>
+      <p:sp>
+        <p:nvSpPr>
+          <p:cNvPr id="6" name="Text 4"/>
+          <p:cNvSpPr txBox="1"/>
+          <p:nvPr/>
+        </p:nvSpPr>
+        <p:spPr>
+          <a:xfrm>
+            <a:off x="1143000" y="1600200"/>
+            <a:ext cx="10241280" cy="365760"/>
+          </a:xfrm>
+          <a:prstGeom prst="rect">
+            <a:avLst/>
+          </a:prstGeom>
+          <a:noFill/>
+          <a:ln/>
+        </p:spPr>
+        <p:txBody>
+          <a:bodyPr wrap="square" lIns="0" tIns="0" rIns="0" bIns="0" rtlCol="0" anchor="ctr"/>
+          <a:lstStyle/>
+          <a:p>
+            <a:pPr indent="0" marL="0">
+              <a:buNone/>
+            </a:pPr>
+            <a:r>
+              <a:rPr lang="en-US" sz="1500" b="1" dirty="0">
+                <a:solidFill>
+                  <a:srgbClr val="FFFFFF"/>
+                </a:solidFill>
+                <a:latin typeface="Calibri" pitchFamily="34" charset="0"/>
+                <a:ea typeface="Calibri" pitchFamily="34" charset="-122"/>
+                <a:cs typeface="Calibri" pitchFamily="34" charset="-120"/>
+              </a:rPr>
+              <a:t>Transpose fix: rdft2R2cSyncFortranMatched / rdft2C2rSyncFortranMatched</a:t>
+            </a:r>
+            <a:endParaRPr lang="en-US" sz="1500" dirty="0"/>
+          </a:p>
+        </p:txBody>
+      </p:sp>
+      <p:sp>
+        <p:nvSpPr>
+          <p:cNvPr id="7" name="Text 5"/>
+          <p:cNvSpPr txBox="1"/>
+          <p:nvPr/>
+        </p:nvSpPr>
+        <p:spPr>
+          <a:xfrm>
+            <a:off x="1143000" y="1947672"/>
+            <a:ext cx="10241280" cy="502920"/>
+          </a:xfrm>
+          <a:prstGeom prst="rect">
+            <a:avLst/>
+          </a:prstGeom>
+          <a:noFill/>
+          <a:ln/>
+        </p:spPr>
+        <p:txBody>
+          <a:bodyPr wrap="square" lIns="0" tIns="0" rIns="0" bIns="0" rtlCol="0" anchor="ctr"/>
+          <a:lstStyle/>
+          <a:p>
+            <a:pPr indent="0" marL="0">
+              <a:lnSpc>
+                <a:spcPct val="110000"/>
+              </a:lnSpc>
+              <a:buNone/>
+            </a:pPr>
+            <a:r>
+              <a:rPr lang="en-US" sz="1200" dirty="0">
+                <a:solidFill>
+                  <a:srgbClr val="AFC9E8"/>
+                </a:solidFill>
+                <a:latin typeface="Calibri" pitchFamily="34" charset="0"/>
+                <a:ea typeface="Calibri" pitchFamily="34" charset="-122"/>
+                <a:cs typeface="Calibri" pitchFamily="34" charset="-120"/>
+              </a:rPr>
+              <a:t>Transpose the input before the forward FFT, transpose the real output after the inverse FFT. The complex-multiply step needs no change once both spectra are consistently transposed.</a:t>
+            </a:r>
+            <a:endParaRPr lang="en-US" sz="1200" dirty="0"/>
+          </a:p>
+        </p:txBody>
+      </p:sp>
+      <p:sp>
+        <p:nvSpPr>
+          <p:cNvPr id="8" name="Shape 6"/>
+          <p:cNvSpPr/>
+          <p:nvPr/>
+        </p:nvSpPr>
+        <p:spPr>
+          <a:xfrm>
+            <a:off x="548640" y="2578608"/>
+            <a:ext cx="384048" cy="384048"/>
+          </a:xfrm>
+          <a:prstGeom prst="roundRect">
+            <a:avLst>
+              <a:gd name="adj" fmla="val 50000"/>
+            </a:avLst>
+          </a:prstGeom>
+          <a:solidFill>
+            <a:srgbClr val="F2A93B"/>
+          </a:solidFill>
+          <a:ln/>
+        </p:spPr>
+      </p:sp>
+      <p:sp>
+        <p:nvSpPr>
+          <p:cNvPr id="9" name="Text 7"/>
+          <p:cNvSpPr txBox="1"/>
+          <p:nvPr/>
+        </p:nvSpPr>
+        <p:spPr>
+          <a:xfrm>
+            <a:off x="548640" y="2578608"/>
+            <a:ext cx="384048" cy="384048"/>
+          </a:xfrm>
+          <a:prstGeom prst="rect">
+            <a:avLst/>
+          </a:prstGeom>
+          <a:noFill/>
+          <a:ln/>
+        </p:spPr>
+        <p:txBody>
+          <a:bodyPr wrap="square" lIns="0" tIns="0" rIns="0" bIns="0" rtlCol="0" anchor="ctr"/>
+          <a:lstStyle/>
+          <a:p>
+            <a:pPr algn="ctr" indent="0" marL="0">
+              <a:buNone/>
+            </a:pPr>
+            <a:r>
+              <a:rPr lang="en-US" sz="1500" b="1" dirty="0">
+                <a:solidFill>
+                  <a:srgbClr val="071427"/>
+                </a:solidFill>
+                <a:latin typeface="Calibri" pitchFamily="34" charset="0"/>
+                <a:ea typeface="Calibri" pitchFamily="34" charset="-122"/>
+                <a:cs typeface="Calibri" pitchFamily="34" charset="-120"/>
+              </a:rPr>
+              <a:t>2</a:t>
+            </a:r>
+            <a:endParaRPr lang="en-US" sz="1500" dirty="0"/>
+          </a:p>
+        </p:txBody>
+      </p:sp>
+      <p:sp>
+        <p:nvSpPr>
+          <p:cNvPr id="10" name="Text 8"/>
+          <p:cNvSpPr txBox="1"/>
+          <p:nvPr/>
+        </p:nvSpPr>
+        <p:spPr>
+          <a:xfrm>
+            <a:off x="1143000" y="2532888"/>
+            <a:ext cx="10241280" cy="365760"/>
+          </a:xfrm>
+          <a:prstGeom prst="rect">
+            <a:avLst/>
+          </a:prstGeom>
+          <a:noFill/>
+          <a:ln/>
+        </p:spPr>
+        <p:txBody>
+          <a:bodyPr wrap="square" lIns="0" tIns="0" rIns="0" bIns="0" rtlCol="0" anchor="ctr"/>
+          <a:lstStyle/>
+          <a:p>
+            <a:pPr indent="0" marL="0">
+              <a:buNone/>
+            </a:pPr>
+            <a:r>
+              <a:rPr lang="en-US" sz="1500" b="1" dirty="0">
+                <a:solidFill>
+                  <a:srgbClr val="FFFFFF"/>
+                </a:solidFill>
+                <a:latin typeface="Calibri" pitchFamily="34" charset="0"/>
+                <a:ea typeface="Calibri" pitchFamily="34" charset="-122"/>
+                <a:cs typeface="Calibri" pitchFamily="34" charset="-120"/>
+              </a:rPr>
+              <a:t>Padded-size fix: hardcode PaddedSize=64x64 on the JS side</a:t>
+            </a:r>
+            <a:endParaRPr lang="en-US" sz="1500" dirty="0"/>
+          </a:p>
+        </p:txBody>
+      </p:sp>
+      <p:sp>
+        <p:nvSpPr>
+          <p:cNvPr id="11" name="Text 9"/>
+          <p:cNvSpPr txBox="1"/>
+          <p:nvPr/>
+        </p:nvSpPr>
+        <p:spPr>
+          <a:xfrm>
+            <a:off x="1143000" y="2880360"/>
+            <a:ext cx="10241280" cy="502920"/>
+          </a:xfrm>
+          <a:prstGeom prst="rect">
+            <a:avLst/>
+          </a:prstGeom>
+          <a:noFill/>
+          <a:ln/>
+        </p:spPr>
+        <p:txBody>
+          <a:bodyPr wrap="square" lIns="0" tIns="0" rIns="0" bIns="0" rtlCol="0" anchor="ctr"/>
+          <a:lstStyle/>
+          <a:p>
+            <a:pPr indent="0" marL="0">
+              <a:lnSpc>
+                <a:spcPct val="110000"/>
+              </a:lnSpc>
+              <a:buNone/>
+            </a:pPr>
+            <a:r>
+              <a:rPr lang="en-US" sz="1200" dirty="0">
+                <a:solidFill>
+                  <a:srgbClr val="AFC9E8"/>
+                </a:solidFill>
+                <a:latin typeface="Calibri" pitchFamily="34" charset="0"/>
+                <a:ea typeface="Calibri" pitchFamily="34" charset="-122"/>
+                <a:cs typeface="Calibri" pitchFamily="34" charset="-120"/>
+              </a:rPr>
+              <a:t>Fortran’s Allocate_Beam2D hardcodes 64x64 unconditionally (a leftover test flag, confirmed still live in the currently-compiled native binaries) -- JS was computing it dynamically (56x57 for the real test case), a genuinely different FFT size, not a rounding issue.</a:t>
+            </a:r>
+            <a:endParaRPr lang="en-US" sz="1200" dirty="0"/>
+          </a:p>
+        </p:txBody>
+      </p:sp>
+      <p:sp>
+        <p:nvSpPr>
+          <p:cNvPr id="12" name="Shape 10"/>
+          <p:cNvSpPr/>
+          <p:nvPr/>
+        </p:nvSpPr>
+        <p:spPr>
+          <a:xfrm>
+            <a:off x="548640" y="3511296"/>
+            <a:ext cx="384048" cy="384048"/>
+          </a:xfrm>
+          <a:prstGeom prst="roundRect">
+            <a:avLst>
+              <a:gd name="adj" fmla="val 50000"/>
+            </a:avLst>
+          </a:prstGeom>
+          <a:solidFill>
+            <a:srgbClr val="F2A93B"/>
+          </a:solidFill>
+          <a:ln/>
+        </p:spPr>
+      </p:sp>
+      <p:sp>
+        <p:nvSpPr>
+          <p:cNvPr id="13" name="Text 11"/>
+          <p:cNvSpPr txBox="1"/>
+          <p:nvPr/>
+        </p:nvSpPr>
+        <p:spPr>
+          <a:xfrm>
+            <a:off x="548640" y="3511296"/>
+            <a:ext cx="384048" cy="384048"/>
+          </a:xfrm>
+          <a:prstGeom prst="rect">
+            <a:avLst/>
+          </a:prstGeom>
+          <a:noFill/>
+          <a:ln/>
+        </p:spPr>
+        <p:txBody>
+          <a:bodyPr wrap="square" lIns="0" tIns="0" rIns="0" bIns="0" rtlCol="0" anchor="ctr"/>
+          <a:lstStyle/>
+          <a:p>
+            <a:pPr algn="ctr" indent="0" marL="0">
+              <a:buNone/>
+            </a:pPr>
+            <a:r>
+              <a:rPr lang="en-US" sz="1500" b="1" dirty="0">
+                <a:solidFill>
+                  <a:srgbClr val="071427"/>
+                </a:solidFill>
+                <a:latin typeface="Calibri" pitchFamily="34" charset="0"/>
+                <a:ea typeface="Calibri" pitchFamily="34" charset="-122"/>
+                <a:cs typeface="Calibri" pitchFamily="34" charset="-120"/>
+              </a:rPr>
+              <a:t>3</a:t>
+            </a:r>
+            <a:endParaRPr lang="en-US" sz="1500" dirty="0"/>
+          </a:p>
+        </p:txBody>
+      </p:sp>
+      <p:sp>
+        <p:nvSpPr>
+          <p:cNvPr id="14" name="Text 12"/>
+          <p:cNvSpPr txBox="1"/>
+          <p:nvPr/>
+        </p:nvSpPr>
+        <p:spPr>
+          <a:xfrm>
+            <a:off x="1143000" y="3465576"/>
+            <a:ext cx="10241280" cy="365760"/>
+          </a:xfrm>
+          <a:prstGeom prst="rect">
+            <a:avLst/>
+          </a:prstGeom>
+          <a:noFill/>
+          <a:ln/>
+        </p:spPr>
+        <p:txBody>
+          <a:bodyPr wrap="square" lIns="0" tIns="0" rIns="0" bIns="0" rtlCol="0" anchor="ctr"/>
+          <a:lstStyle/>
+          <a:p>
+            <a:pPr indent="0" marL="0">
+              <a:buNone/>
+            </a:pPr>
+            <a:r>
+              <a:rPr lang="en-US" sz="1500" b="1" dirty="0">
+                <a:solidFill>
+                  <a:srgbClr val="FFFFFF"/>
+                </a:solidFill>
+                <a:latin typeface="Calibri" pitchFamily="34" charset="0"/>
+                <a:ea typeface="Calibri" pitchFamily="34" charset="-122"/>
+                <a:cs typeface="Calibri" pitchFamily="34" charset="-120"/>
+              </a:rPr>
+              <a:t>Non-square safety net</a:t>
+            </a:r>
+            <a:endParaRPr lang="en-US" sz="1500" dirty="0"/>
+          </a:p>
+        </p:txBody>
+      </p:sp>
+      <p:sp>
+        <p:nvSpPr>
+          <p:cNvPr id="15" name="Text 13"/>
+          <p:cNvSpPr txBox="1"/>
+          <p:nvPr/>
+        </p:nvSpPr>
+        <p:spPr>
+          <a:xfrm>
+            <a:off x="1143000" y="3813048"/>
+            <a:ext cx="10241280" cy="502920"/>
+          </a:xfrm>
+          <a:prstGeom prst="rect">
+            <a:avLst/>
+          </a:prstGeom>
+          <a:noFill/>
+          <a:ln/>
+        </p:spPr>
+        <p:txBody>
+          <a:bodyPr wrap="square" lIns="0" tIns="0" rIns="0" bIns="0" rtlCol="0" anchor="ctr"/>
+          <a:lstStyle/>
+          <a:p>
+            <a:pPr indent="0" marL="0">
+              <a:lnSpc>
+                <a:spcPct val="110000"/>
+              </a:lnSpc>
+              <a:buNone/>
+            </a:pPr>
+            <a:r>
+              <a:rPr lang="en-US" sz="1200" dirty="0">
+                <a:solidFill>
+                  <a:srgbClr val="AFC9E8"/>
+                </a:solidFill>
+                <a:latin typeface="Calibri" pitchFamily="34" charset="0"/>
+                <a:ea typeface="Calibri" pitchFamily="34" charset="-122"/>
+                <a:cs typeface="Calibri" pitchFamily="34" charset="-120"/>
+              </a:rPr>
+              <a:t>The transpose fix only applies to square transforms; a non-square call now falls back to the prior behavior with a one-time warning instead of throwing -- verified directly, no crash.</a:t>
+            </a:r>
+            <a:endParaRPr lang="en-US" sz="1200" dirty="0"/>
+          </a:p>
+        </p:txBody>
+      </p:sp>
+      <p:sp>
+        <p:nvSpPr>
+          <p:cNvPr id="16" name="Shape 14"/>
+          <p:cNvSpPr/>
+          <p:nvPr/>
+        </p:nvSpPr>
+        <p:spPr>
+          <a:xfrm>
+            <a:off x="548640" y="4443984"/>
+            <a:ext cx="384048" cy="384048"/>
+          </a:xfrm>
+          <a:prstGeom prst="roundRect">
+            <a:avLst>
+              <a:gd name="adj" fmla="val 50000"/>
+            </a:avLst>
+          </a:prstGeom>
+          <a:solidFill>
+            <a:srgbClr val="F2A93B"/>
+          </a:solidFill>
+          <a:ln/>
+        </p:spPr>
+      </p:sp>
+      <p:sp>
+        <p:nvSpPr>
+          <p:cNvPr id="17" name="Text 15"/>
+          <p:cNvSpPr txBox="1"/>
+          <p:nvPr/>
+        </p:nvSpPr>
+        <p:spPr>
+          <a:xfrm>
+            <a:off x="548640" y="4443984"/>
+            <a:ext cx="384048" cy="384048"/>
+          </a:xfrm>
+          <a:prstGeom prst="rect">
+            <a:avLst/>
+          </a:prstGeom>
+          <a:noFill/>
+          <a:ln/>
+        </p:spPr>
+        <p:txBody>
+          <a:bodyPr wrap="square" lIns="0" tIns="0" rIns="0" bIns="0" rtlCol="0" anchor="ctr"/>
+          <a:lstStyle/>
+          <a:p>
+            <a:pPr algn="ctr" indent="0" marL="0">
+              <a:buNone/>
+            </a:pPr>
+            <a:r>
+              <a:rPr lang="en-US" sz="1500" b="1" dirty="0">
+                <a:solidFill>
+                  <a:srgbClr val="071427"/>
+                </a:solidFill>
+                <a:latin typeface="Calibri" pitchFamily="34" charset="0"/>
+                <a:ea typeface="Calibri" pitchFamily="34" charset="-122"/>
+                <a:cs typeface="Calibri" pitchFamily="34" charset="-120"/>
+              </a:rPr>
+              <a:t>4</a:t>
+            </a:r>
+            <a:endParaRPr lang="en-US" sz="1500" dirty="0"/>
+          </a:p>
+        </p:txBody>
+      </p:sp>
+      <p:sp>
+        <p:nvSpPr>
+          <p:cNvPr id="18" name="Text 16"/>
+          <p:cNvSpPr txBox="1"/>
+          <p:nvPr/>
+        </p:nvSpPr>
+        <p:spPr>
+          <a:xfrm>
+            <a:off x="1143000" y="4398264"/>
+            <a:ext cx="10241280" cy="365760"/>
+          </a:xfrm>
+          <a:prstGeom prst="rect">
+            <a:avLst/>
+          </a:prstGeom>
+          <a:noFill/>
+          <a:ln/>
+        </p:spPr>
+        <p:txBody>
+          <a:bodyPr wrap="square" lIns="0" tIns="0" rIns="0" bIns="0" rtlCol="0" anchor="ctr"/>
+          <a:lstStyle/>
+          <a:p>
+            <a:pPr indent="0" marL="0">
+              <a:buNone/>
+            </a:pPr>
+            <a:r>
+              <a:rPr lang="en-US" sz="1500" b="1" dirty="0">
+                <a:solidFill>
+                  <a:srgbClr val="FFFFFF"/>
+                </a:solidFill>
+                <a:latin typeface="Calibri" pitchFamily="34" charset="0"/>
+                <a:ea typeface="Calibri" pitchFamily="34" charset="-122"/>
+                <a:cs typeface="Calibri" pitchFamily="34" charset="-120"/>
+              </a:rPr>
+              <a:t>No regressions</a:t>
+            </a:r>
+            <a:endParaRPr lang="en-US" sz="1500" dirty="0"/>
+          </a:p>
+        </p:txBody>
+      </p:sp>
+      <p:sp>
+        <p:nvSpPr>
+          <p:cNvPr id="19" name="Text 17"/>
+          <p:cNvSpPr txBox="1"/>
+          <p:nvPr/>
+        </p:nvSpPr>
+        <p:spPr>
+          <a:xfrm>
+            <a:off x="1143000" y="4745736"/>
+            <a:ext cx="10241280" cy="502920"/>
+          </a:xfrm>
+          <a:prstGeom prst="rect">
+            <a:avLst/>
+          </a:prstGeom>
+          <a:noFill/>
+          <a:ln/>
+        </p:spPr>
+        <p:txBody>
+          <a:bodyPr wrap="square" lIns="0" tIns="0" rIns="0" bIns="0" rtlCol="0" anchor="ctr"/>
+          <a:lstStyle/>
+          <a:p>
+            <a:pPr indent="0" marL="0">
+              <a:lnSpc>
+                <a:spcPct val="110000"/>
+              </a:lnSpc>
+              <a:buNone/>
+            </a:pPr>
+            <a:r>
+              <a:rPr lang="en-US" sz="1200" dirty="0">
+                <a:solidFill>
+                  <a:srgbClr val="AFC9E8"/>
+                </a:solidFill>
+                <a:latin typeface="Calibri" pitchFamily="34" charset="0"/>
+                <a:ea typeface="Calibri" pitchFamily="34" charset="-122"/>
+                <a:cs typeface="Calibri" pitchFamily="34" charset="-120"/>
+              </a:rPr>
+              <a:t>Beam.js, CalculateBeamKernel.js, and CubeKernelConvolution.js self-tests all still pass after both fixes.</a:t>
+            </a:r>
+            <a:endParaRPr lang="en-US" sz="1200" dirty="0"/>
+          </a:p>
+        </p:txBody>
+      </p:sp>
+      <p:sp>
+        <p:nvSpPr>
+          <p:cNvPr id="20" name="Shape 18"/>
+          <p:cNvSpPr/>
+          <p:nvPr/>
+        </p:nvSpPr>
+        <p:spPr>
+          <a:xfrm>
+            <a:off x="548640" y="6309360"/>
+            <a:ext cx="384048" cy="384048"/>
+          </a:xfrm>
+          <a:prstGeom prst="roundRect">
+            <a:avLst>
+              <a:gd name="adj" fmla="val 50000"/>
+            </a:avLst>
+          </a:prstGeom>
+          <a:solidFill>
+            <a:srgbClr val="F2A93B"/>
+          </a:solidFill>
+          <a:ln/>
+        </p:spPr>
+      </p:sp>
+      <p:sp>
+        <p:nvSpPr>
+          <p:cNvPr id="21" name="Text 19"/>
+          <p:cNvSpPr txBox="1"/>
+          <p:nvPr/>
+        </p:nvSpPr>
+        <p:spPr>
+          <a:xfrm>
+            <a:off x="548640" y="6309360"/>
+            <a:ext cx="384048" cy="384048"/>
+          </a:xfrm>
+          <a:prstGeom prst="rect">
+            <a:avLst/>
+          </a:prstGeom>
+          <a:noFill/>
+          <a:ln/>
+        </p:spPr>
+        <p:txBody>
+          <a:bodyPr wrap="square" lIns="0" tIns="0" rIns="0" bIns="0" rtlCol="0" anchor="ctr"/>
+          <a:lstStyle/>
+          <a:p>
+            <a:pPr algn="ctr" indent="0" marL="0">
+              <a:buNone/>
+            </a:pPr>
+            <a:r>
+              <a:rPr lang="en-US" sz="1500" b="1" dirty="0">
+                <a:solidFill>
+                  <a:srgbClr val="071427"/>
+                </a:solidFill>
+                <a:latin typeface="Calibri" pitchFamily="34" charset="0"/>
+                <a:ea typeface="Calibri" pitchFamily="34" charset="-122"/>
+                <a:cs typeface="Calibri" pitchFamily="34" charset="-120"/>
+              </a:rPr>
+              <a:t>5</a:t>
+            </a:r>
+            <a:endParaRPr lang="en-US" sz="1500" dirty="0"/>
+          </a:p>
+        </p:txBody>
+      </p:sp>
+      <p:sp>
+        <p:nvSpPr>
+          <p:cNvPr id="22" name="Text 20"/>
+          <p:cNvSpPr txBox="1"/>
+          <p:nvPr/>
+        </p:nvSpPr>
+        <p:spPr>
+          <a:xfrm>
+            <a:off x="1143000" y="6263640"/>
+            <a:ext cx="10241280" cy="365760"/>
+          </a:xfrm>
+          <a:prstGeom prst="rect">
+            <a:avLst/>
+          </a:prstGeom>
+          <a:noFill/>
+          <a:ln/>
+        </p:spPr>
+        <p:txBody>
+          <a:bodyPr wrap="square" lIns="0" tIns="0" rIns="0" bIns="0" rtlCol="0" anchor="ctr"/>
+          <a:lstStyle/>
+          <a:p>
+            <a:pPr indent="0" marL="0">
+              <a:buNone/>
+            </a:pPr>
+            <a:r>
+              <a:rPr lang="en-US" sz="1500" b="1" dirty="0">
+                <a:solidFill>
+                  <a:srgbClr val="FFFFFF"/>
+                </a:solidFill>
+                <a:latin typeface="Calibri" pitchFamily="34" charset="0"/>
+                <a:ea typeface="Calibri" pitchFamily="34" charset="-122"/>
+                <a:cs typeface="Calibri" pitchFamily="34" charset="-120"/>
+              </a:rPr>
+              <a:t>Real pipeline now runs to completion</a:t>
+            </a:r>
+            <a:endParaRPr lang="en-US" sz="1500" dirty="0"/>
+          </a:p>
+        </p:txBody>
+      </p:sp>
+      <p:sp>
+        <p:nvSpPr>
+          <p:cNvPr id="23" name="Text 21"/>
+          <p:cNvSpPr txBox="1"/>
+          <p:nvPr/>
+        </p:nvSpPr>
+        <p:spPr>
+          <a:xfrm>
+            <a:off x="1143000" y="6611112"/>
+            <a:ext cx="10241280" cy="502920"/>
+          </a:xfrm>
+          <a:prstGeom prst="rect">
+            <a:avLst/>
+          </a:prstGeom>
+          <a:noFill/>
+          <a:ln/>
+        </p:spPr>
+        <p:txBody>
+          <a:bodyPr wrap="square" lIns="0" tIns="0" rIns="0" bIns="0" rtlCol="0" anchor="ctr"/>
+          <a:lstStyle/>
+          <a:p>
+            <a:pPr indent="0" marL="0">
+              <a:lnSpc>
+                <a:spcPct val="110000"/>
+              </a:lnSpc>
+              <a:buNone/>
+            </a:pPr>
+            <a:r>
+              <a:rPr lang="en-US" sz="1200" dirty="0">
+                <a:solidFill>
+                  <a:srgbClr val="AFC9E8"/>
+                </a:solidFill>
+                <a:latin typeface="Calibri" pitchFamily="34" charset="0"/>
+                <a:ea typeface="Calibri" pitchFamily="34" charset="-122"/>
+                <a:cs typeface="Calibri" pitchFamily="34" charset="-120"/>
+              </a:rPr>
+              <a:t>The real cloudDensity=100 realization-10 trace previously stalled silently before finishing a fit at all. With both fixes in place it now completes the full optimizer fit (66 convolve calls, 75 evaluations).</a:t>
+            </a:r>
+            <a:endParaRPr lang="en-US" sz="1200" dirty="0"/>
+          </a:p>
+        </p:txBody>
+      </p:sp>
+      <p:sp>
+        <p:nvSpPr>
+          <p:cNvPr id="24" name="Text 22"/>
+          <p:cNvSpPr txBox="1"/>
+          <p:nvPr/>
+        </p:nvSpPr>
+        <p:spPr>
+          <a:xfrm>
+            <a:off x="11521440" y="6446520"/>
+            <a:ext cx="457200" cy="274320"/>
+          </a:xfrm>
+          <a:prstGeom prst="rect">
+            <a:avLst/>
+          </a:prstGeom>
+          <a:noFill/>
+          <a:ln/>
+        </p:spPr>
+        <p:txBody>
+          <a:bodyPr wrap="square" lIns="0" tIns="0" rIns="0" bIns="0" rtlCol="0" anchor="ctr"/>
+          <a:lstStyle/>
+          <a:p>
+            <a:pPr algn="r" indent="0" marL="0">
+              <a:buNone/>
+            </a:pPr>
+            <a:r>
+              <a:rPr lang="en-US" sz="1000" dirty="0">
+                <a:solidFill>
+                  <a:srgbClr val="4A5B72"/>
+                </a:solidFill>
+                <a:latin typeface="Calibri" pitchFamily="34" charset="0"/>
+                <a:ea typeface="Calibri" pitchFamily="34" charset="-122"/>
+                <a:cs typeface="Calibri" pitchFamily="34" charset="-120"/>
+              </a:rPr>
+              <a:t>15</a:t>
+            </a:r>
+            <a:endParaRPr lang="en-US" sz="1000" dirty="0"/>
+          </a:p>
+        </p:txBody>
+      </p:sp>
+    </p:spTree>
+  </p:cSld>
+  <p:clrMapOvr>
+    <a:masterClrMapping/>
+  </p:clrMapOvr>
+</p:sld>
+</file>
+
+<file path=ppt/slides/slide16.xml><?xml version="1.0" encoding="utf-8"?>
 <p:sld xmlns:a="http://schemas.openxmlformats.org/drawingml/2006/main" xmlns:r="http://schemas.openxmlformats.org/officeDocument/2006/relationships" xmlns:p="http://schemas.openxmlformats.org/presentationml/2006/main">
   <p:cSld name="Slide 11">
     <p:bg>
@@ -4493,6 +7983,10 @@
           </a:solidFill>
           <a:ln/>
         </p:spPr>
+        <p:txBody>
+          <a:bodyPr/>
+          <a:p/>
+        </p:txBody>
       </p:sp>
       <p:sp>
         <p:nvSpPr>
@@ -4636,6 +8130,10 @@
           </a:solidFill>
           <a:ln/>
         </p:spPr>
+        <p:txBody>
+          <a:bodyPr/>
+          <a:p/>
+        </p:txBody>
       </p:sp>
       <p:sp>
         <p:nvSpPr>
@@ -4779,6 +8277,10 @@
           </a:solidFill>
           <a:ln/>
         </p:spPr>
+        <p:txBody>
+          <a:bodyPr/>
+          <a:p/>
+        </p:txBody>
       </p:sp>
       <p:sp>
         <p:nvSpPr>
@@ -4934,7 +8436,7 @@
                 <a:ea typeface="Calibri" pitchFamily="34" charset="-122"/>
                 <a:cs typeface="Calibri" pitchFamily="34" charset="-120"/>
               </a:rPr>
-              <a:t>11</a:t>
+              <a:t>17</a:t>
             </a:r>
             <a:endParaRPr lang="en-US" sz="1000" dirty="0"/>
           </a:p>
@@ -4948,7 +8450,7 @@
 </p:sld>
 </file>
 
-<file path=ppt/slides/slide12.xml><?xml version="1.0" encoding="utf-8"?>
+<file path=ppt/slides/slide17.xml><?xml version="1.0" encoding="utf-8"?>
 <p:sld xmlns:a="http://schemas.openxmlformats.org/drawingml/2006/main" xmlns:r="http://schemas.openxmlformats.org/officeDocument/2006/relationships" xmlns:p="http://schemas.openxmlformats.org/presentationml/2006/main">
   <p:cSld name="Slide 12">
     <p:bg>
@@ -5085,6 +8587,10 @@
           </a:solidFill>
           <a:ln/>
         </p:spPr>
+        <p:txBody>
+          <a:bodyPr/>
+          <a:p/>
+        </p:txBody>
       </p:sp>
       <p:sp>
         <p:nvSpPr>
@@ -5144,6 +8650,10 @@
           </a:solidFill>
           <a:ln/>
         </p:spPr>
+        <p:txBody>
+          <a:bodyPr/>
+          <a:p/>
+        </p:txBody>
       </p:sp>
       <p:sp>
         <p:nvSpPr>
@@ -5203,6 +8713,10 @@
           </a:solidFill>
           <a:ln/>
         </p:spPr>
+        <p:txBody>
+          <a:bodyPr/>
+          <a:p/>
+        </p:txBody>
       </p:sp>
       <p:sp>
         <p:nvSpPr>
@@ -5315,7 +8829,7 @@
                 <a:ea typeface="Calibri" pitchFamily="34" charset="-122"/>
                 <a:cs typeface="Calibri" pitchFamily="34" charset="-120"/>
               </a:rPr>
-              <a:t>12</a:t>
+              <a:t>18</a:t>
             </a:r>
             <a:endParaRPr lang="en-US" sz="1000" dirty="0"/>
           </a:p>
@@ -5329,7 +8843,7 @@
 </p:sld>
 </file>
 
-<file path=ppt/slides/slide13.xml><?xml version="1.0" encoding="utf-8"?>
+<file path=ppt/slides/slide18.xml><?xml version="1.0" encoding="utf-8"?>
 <p:sld xmlns:a="http://schemas.openxmlformats.org/drawingml/2006/main" xmlns:r="http://schemas.openxmlformats.org/officeDocument/2006/relationships" xmlns:p="http://schemas.openxmlformats.org/presentationml/2006/main">
   <p:cSld name="Slide 13">
     <p:bg>
@@ -5558,7 +9072,7 @@
                 <a:ea typeface="Calibri" pitchFamily="34" charset="-122"/>
                 <a:cs typeface="Calibri" pitchFamily="34" charset="-120"/>
               </a:rPr>
-              <a:t>13</a:t>
+              <a:t>19</a:t>
             </a:r>
             <a:endParaRPr lang="en-US" sz="1000" dirty="0"/>
           </a:p>
@@ -5572,7 +9086,7 @@
 </p:sld>
 </file>
 
-<file path=ppt/slides/slide14.xml><?xml version="1.0" encoding="utf-8"?>
+<file path=ppt/slides/slide19.xml><?xml version="1.0" encoding="utf-8"?>
 <p:sld xmlns:a="http://schemas.openxmlformats.org/drawingml/2006/main" xmlns:r="http://schemas.openxmlformats.org/officeDocument/2006/relationships" xmlns:p="http://schemas.openxmlformats.org/presentationml/2006/main">
   <p:cSld name="Slide 14">
     <p:bg>
@@ -5735,6 +9249,10 @@
           </a:solidFill>
           <a:ln/>
         </p:spPr>
+        <p:txBody>
+          <a:bodyPr/>
+          <a:p/>
+        </p:txBody>
       </p:sp>
       <p:sp>
         <p:nvSpPr>
@@ -5831,6 +9349,10 @@
             <a:prstDash val="solid"/>
           </a:ln>
         </p:spPr>
+        <p:txBody>
+          <a:bodyPr/>
+          <a:p/>
+        </p:txBody>
       </p:sp>
       <p:sp>
         <p:nvSpPr>
@@ -5854,6 +9376,10 @@
             <a:prstDash val="solid"/>
           </a:ln>
         </p:spPr>
+        <p:txBody>
+          <a:bodyPr/>
+          <a:p/>
+        </p:txBody>
       </p:sp>
       <p:sp>
         <p:nvSpPr>
@@ -5881,6 +9407,10 @@
             <a:prstDash val="solid"/>
           </a:ln>
         </p:spPr>
+        <p:txBody>
+          <a:bodyPr/>
+          <a:p/>
+        </p:txBody>
       </p:sp>
       <p:sp>
         <p:nvSpPr>
@@ -5947,6 +9477,10 @@
             <a:prstDash val="solid"/>
           </a:ln>
         </p:spPr>
+        <p:txBody>
+          <a:bodyPr/>
+          <a:p/>
+        </p:txBody>
       </p:sp>
       <p:sp>
         <p:nvSpPr>
@@ -6059,1017 +9593,9 @@
                 <a:ea typeface="Calibri" pitchFamily="34" charset="-122"/>
                 <a:cs typeface="Calibri" pitchFamily="34" charset="-120"/>
               </a:rPr>
-              <a:t>14</a:t>
+              <a:t>20</a:t>
             </a:r>
             <a:endParaRPr lang="en-US" sz="1000" dirty="0"/>
-          </a:p>
-        </p:txBody>
-      </p:sp>
-    </p:spTree>
-  </p:cSld>
-  <p:clrMapOvr>
-    <a:masterClrMapping/>
-  </p:clrMapOvr>
-</p:sld>
-</file>
-
-<file path=ppt/slides/slide15.xml><?xml version="1.0" encoding="utf-8"?>
-<p:sld xmlns:a="http://schemas.openxmlformats.org/drawingml/2006/main" xmlns:r="http://schemas.openxmlformats.org/officeDocument/2006/relationships" xmlns:p="http://schemas.openxmlformats.org/presentationml/2006/main">
-  <p:cSld name="Slide 15">
-    <p:bg>
-      <p:bgPr>
-        <a:solidFill>
-          <a:srgbClr val="0B1E3F"/>
-        </a:solidFill>
-      </p:bgPr>
-    </p:bg>
-    <p:spTree>
-      <p:nvGrpSpPr>
-        <p:cNvPr id="1" name=""/>
-        <p:cNvGrpSpPr/>
-        <p:nvPr/>
-      </p:nvGrpSpPr>
-      <p:grpSpPr>
-        <a:xfrm>
-          <a:off x="0" y="0"/>
-          <a:ext cx="0" cy="0"/>
-          <a:chOff x="0" y="0"/>
-          <a:chExt cx="0" cy="0"/>
-        </a:xfrm>
-      </p:grpSpPr>
-      <p:sp>
-        <p:nvSpPr>
-          <p:cNvPr id="2" name="Text 0"/>
-          <p:cNvSpPr txBox="1"/>
-          <p:nvPr/>
-        </p:nvSpPr>
-        <p:spPr>
-          <a:xfrm>
-            <a:off x="548640" y="365760"/>
-            <a:ext cx="7315200" cy="320040"/>
-          </a:xfrm>
-          <a:prstGeom prst="rect">
-            <a:avLst/>
-          </a:prstGeom>
-          <a:noFill/>
-          <a:ln/>
-        </p:spPr>
-        <p:txBody>
-          <a:bodyPr wrap="square" lIns="0" tIns="0" rIns="0" bIns="0" rtlCol="0" anchor="ctr"/>
-          <a:lstStyle/>
-          <a:p>
-            <a:pPr indent="0" marL="0">
-              <a:buNone/>
-            </a:pPr>
-            <a:r>
-              <a:rPr lang="en-US" sz="1200" b="1" spc="200" kern="0" dirty="0">
-                <a:solidFill>
-                  <a:srgbClr val="F2A93B"/>
-                </a:solidFill>
-                <a:latin typeface="Calibri" pitchFamily="34" charset="0"/>
-                <a:ea typeface="Calibri" pitchFamily="34" charset="-122"/>
-                <a:cs typeface="Calibri" pitchFamily="34" charset="-120"/>
-              </a:rPr>
-              <a:t>KEY TAKEAWAYS</a:t>
-            </a:r>
-            <a:endParaRPr lang="en-US" sz="1200" dirty="0"/>
-          </a:p>
-        </p:txBody>
-      </p:sp>
-      <p:sp>
-        <p:nvSpPr>
-          <p:cNvPr id="3" name="Text 1"/>
-          <p:cNvSpPr txBox="1"/>
-          <p:nvPr/>
-        </p:nvSpPr>
-        <p:spPr>
-          <a:xfrm>
-            <a:off x="548640" y="685800"/>
-            <a:ext cx="11064240" cy="640080"/>
-          </a:xfrm>
-          <a:prstGeom prst="rect">
-            <a:avLst/>
-          </a:prstGeom>
-          <a:noFill/>
-          <a:ln/>
-        </p:spPr>
-        <p:txBody>
-          <a:bodyPr wrap="square" lIns="0" tIns="0" rIns="0" bIns="0" rtlCol="0" anchor="ctr"/>
-          <a:lstStyle/>
-          <a:p>
-            <a:pPr indent="0" marL="0">
-              <a:buNone/>
-            </a:pPr>
-            <a:r>
-              <a:rPr lang="en-US" sz="2800" b="1" dirty="0">
-                <a:solidFill>
-                  <a:srgbClr val="FFFFFF"/>
-                </a:solidFill>
-                <a:latin typeface="Cambria" pitchFamily="34" charset="0"/>
-                <a:ea typeface="Cambria" pitchFamily="34" charset="-122"/>
-                <a:cs typeface="Cambria" pitchFamily="34" charset="-120"/>
-              </a:rPr>
-              <a:t>What this proves, and what to measure going forward</a:t>
-            </a:r>
-            <a:endParaRPr lang="en-US" sz="2800" dirty="0"/>
-          </a:p>
-        </p:txBody>
-      </p:sp>
-      <p:sp>
-        <p:nvSpPr>
-          <p:cNvPr id="4" name="Shape 2"/>
-          <p:cNvSpPr/>
-          <p:nvPr/>
-        </p:nvSpPr>
-        <p:spPr>
-          <a:xfrm>
-            <a:off x="548640" y="1645920"/>
-            <a:ext cx="384048" cy="384048"/>
-          </a:xfrm>
-          <a:prstGeom prst="roundRect">
-            <a:avLst>
-              <a:gd name="adj" fmla="val 50000"/>
-            </a:avLst>
-          </a:prstGeom>
-          <a:solidFill>
-            <a:srgbClr val="F2A93B"/>
-          </a:solidFill>
-          <a:ln/>
-        </p:spPr>
-      </p:sp>
-      <p:sp>
-        <p:nvSpPr>
-          <p:cNvPr id="5" name="Text 3"/>
-          <p:cNvSpPr txBox="1"/>
-          <p:nvPr/>
-        </p:nvSpPr>
-        <p:spPr>
-          <a:xfrm>
-            <a:off x="548640" y="1645920"/>
-            <a:ext cx="384048" cy="384048"/>
-          </a:xfrm>
-          <a:prstGeom prst="rect">
-            <a:avLst/>
-          </a:prstGeom>
-          <a:noFill/>
-          <a:ln/>
-        </p:spPr>
-        <p:txBody>
-          <a:bodyPr wrap="square" lIns="0" tIns="0" rIns="0" bIns="0" rtlCol="0" anchor="ctr"/>
-          <a:lstStyle/>
-          <a:p>
-            <a:pPr algn="ctr" indent="0" marL="0">
-              <a:buNone/>
-            </a:pPr>
-            <a:r>
-              <a:rPr lang="en-US" sz="1500" b="1" dirty="0">
-                <a:solidFill>
-                  <a:srgbClr val="071427"/>
-                </a:solidFill>
-                <a:latin typeface="Calibri" pitchFamily="34" charset="0"/>
-                <a:ea typeface="Calibri" pitchFamily="34" charset="-122"/>
-                <a:cs typeface="Calibri" pitchFamily="34" charset="-120"/>
-              </a:rPr>
-              <a:t>1</a:t>
-            </a:r>
-            <a:endParaRPr lang="en-US" sz="1500" dirty="0"/>
-          </a:p>
-        </p:txBody>
-      </p:sp>
-      <p:sp>
-        <p:nvSpPr>
-          <p:cNvPr id="6" name="Text 4"/>
-          <p:cNvSpPr txBox="1"/>
-          <p:nvPr/>
-        </p:nvSpPr>
-        <p:spPr>
-          <a:xfrm>
-            <a:off x="1143000" y="1600200"/>
-            <a:ext cx="10241280" cy="365760"/>
-          </a:xfrm>
-          <a:prstGeom prst="rect">
-            <a:avLst/>
-          </a:prstGeom>
-          <a:noFill/>
-          <a:ln/>
-        </p:spPr>
-        <p:txBody>
-          <a:bodyPr wrap="square" lIns="0" tIns="0" rIns="0" bIns="0" rtlCol="0" anchor="ctr"/>
-          <a:lstStyle/>
-          <a:p>
-            <a:pPr indent="0" marL="0">
-              <a:buNone/>
-            </a:pPr>
-            <a:r>
-              <a:rPr lang="en-US" sz="1500" b="1" dirty="0">
-                <a:solidFill>
-                  <a:srgbClr val="FFFFFF"/>
-                </a:solidFill>
-                <a:latin typeface="Calibri" pitchFamily="34" charset="0"/>
-                <a:ea typeface="Calibri" pitchFamily="34" charset="-122"/>
-                <a:cs typeface="Calibri" pitchFamily="34" charset="-120"/>
-              </a:rPr>
-              <a:t>Root cause is fully identified</a:t>
-            </a:r>
-            <a:endParaRPr lang="en-US" sz="1500" dirty="0"/>
-          </a:p>
-        </p:txBody>
-      </p:sp>
-      <p:sp>
-        <p:nvSpPr>
-          <p:cNvPr id="7" name="Text 5"/>
-          <p:cNvSpPr txBox="1"/>
-          <p:nvPr/>
-        </p:nvSpPr>
-        <p:spPr>
-          <a:xfrm>
-            <a:off x="1143000" y="1947672"/>
-            <a:ext cx="10241280" cy="502920"/>
-          </a:xfrm>
-          <a:prstGeom prst="rect">
-            <a:avLst/>
-          </a:prstGeom>
-          <a:noFill/>
-          <a:ln/>
-        </p:spPr>
-        <p:txBody>
-          <a:bodyPr wrap="square" lIns="0" tIns="0" rIns="0" bIns="0" rtlCol="0" anchor="ctr"/>
-          <a:lstStyle/>
-          <a:p>
-            <a:pPr indent="0" marL="0">
-              <a:lnSpc>
-                <a:spcPct val="110000"/>
-              </a:lnSpc>
-              <a:buNone/>
-            </a:pPr>
-            <a:r>
-              <a:rPr lang="en-US" sz="1200" dirty="0">
-                <a:solidFill>
-                  <a:srgbClr val="AFC9E8"/>
-                </a:solidFill>
-                <a:latin typeface="Calibri" pitchFamily="34" charset="0"/>
-                <a:ea typeface="Calibri" pitchFamily="34" charset="-122"/>
-                <a:cs typeface="Calibri" pitchFamily="34" charset="-120"/>
-              </a:rPr>
-              <a:t>Seven real, distinct bugs — not an irreducible floor — were the entire origin of every observed difference. All seven are fixed.</a:t>
-            </a:r>
-            <a:endParaRPr lang="en-US" sz="1200" dirty="0"/>
-          </a:p>
-        </p:txBody>
-      </p:sp>
-      <p:sp>
-        <p:nvSpPr>
-          <p:cNvPr id="8" name="Shape 6"/>
-          <p:cNvSpPr/>
-          <p:nvPr/>
-        </p:nvSpPr>
-        <p:spPr>
-          <a:xfrm>
-            <a:off x="548640" y="2578608"/>
-            <a:ext cx="384048" cy="384048"/>
-          </a:xfrm>
-          <a:prstGeom prst="roundRect">
-            <a:avLst>
-              <a:gd name="adj" fmla="val 50000"/>
-            </a:avLst>
-          </a:prstGeom>
-          <a:solidFill>
-            <a:srgbClr val="F2A93B"/>
-          </a:solidFill>
-          <a:ln/>
-        </p:spPr>
-      </p:sp>
-      <p:sp>
-        <p:nvSpPr>
-          <p:cNvPr id="9" name="Text 7"/>
-          <p:cNvSpPr txBox="1"/>
-          <p:nvPr/>
-        </p:nvSpPr>
-        <p:spPr>
-          <a:xfrm>
-            <a:off x="548640" y="2578608"/>
-            <a:ext cx="384048" cy="384048"/>
-          </a:xfrm>
-          <a:prstGeom prst="rect">
-            <a:avLst/>
-          </a:prstGeom>
-          <a:noFill/>
-          <a:ln/>
-        </p:spPr>
-        <p:txBody>
-          <a:bodyPr wrap="square" lIns="0" tIns="0" rIns="0" bIns="0" rtlCol="0" anchor="ctr"/>
-          <a:lstStyle/>
-          <a:p>
-            <a:pPr algn="ctr" indent="0" marL="0">
-              <a:buNone/>
-            </a:pPr>
-            <a:r>
-              <a:rPr lang="en-US" sz="1500" b="1" dirty="0">
-                <a:solidFill>
-                  <a:srgbClr val="071427"/>
-                </a:solidFill>
-                <a:latin typeface="Calibri" pitchFamily="34" charset="0"/>
-                <a:ea typeface="Calibri" pitchFamily="34" charset="-122"/>
-                <a:cs typeface="Calibri" pitchFamily="34" charset="-120"/>
-              </a:rPr>
-              <a:t>2</a:t>
-            </a:r>
-            <a:endParaRPr lang="en-US" sz="1500" dirty="0"/>
-          </a:p>
-        </p:txBody>
-      </p:sp>
-      <p:sp>
-        <p:nvSpPr>
-          <p:cNvPr id="10" name="Text 8"/>
-          <p:cNvSpPr txBox="1"/>
-          <p:nvPr/>
-        </p:nvSpPr>
-        <p:spPr>
-          <a:xfrm>
-            <a:off x="1143000" y="2532888"/>
-            <a:ext cx="10241280" cy="365760"/>
-          </a:xfrm>
-          <a:prstGeom prst="rect">
-            <a:avLst/>
-          </a:prstGeom>
-          <a:noFill/>
-          <a:ln/>
-        </p:spPr>
-        <p:txBody>
-          <a:bodyPr wrap="square" lIns="0" tIns="0" rIns="0" bIns="0" rtlCol="0" anchor="ctr"/>
-          <a:lstStyle/>
-          <a:p>
-            <a:pPr indent="0" marL="0">
-              <a:buNone/>
-            </a:pPr>
-            <a:r>
-              <a:rPr lang="en-US" sz="1500" b="1" dirty="0">
-                <a:solidFill>
-                  <a:srgbClr val="FFFFFF"/>
-                </a:solidFill>
-                <a:latin typeface="Calibri" pitchFamily="34" charset="0"/>
-                <a:ea typeface="Calibri" pitchFamily="34" charset="-122"/>
-                <a:cs typeface="Calibri" pitchFamily="34" charset="-120"/>
-              </a:rPr>
-              <a:t>Per-evaluation math has zero remaining bugs</a:t>
-            </a:r>
-            <a:endParaRPr lang="en-US" sz="1500" dirty="0"/>
-          </a:p>
-        </p:txBody>
-      </p:sp>
-      <p:sp>
-        <p:nvSpPr>
-          <p:cNvPr id="11" name="Text 9"/>
-          <p:cNvSpPr txBox="1"/>
-          <p:nvPr/>
-        </p:nvSpPr>
-        <p:spPr>
-          <a:xfrm>
-            <a:off x="1143000" y="2880360"/>
-            <a:ext cx="10241280" cy="502920"/>
-          </a:xfrm>
-          <a:prstGeom prst="rect">
-            <a:avLst/>
-          </a:prstGeom>
-          <a:noFill/>
-          <a:ln/>
-        </p:spPr>
-        <p:txBody>
-          <a:bodyPr wrap="square" lIns="0" tIns="0" rIns="0" bIns="0" rtlCol="0" anchor="ctr"/>
-          <a:lstStyle/>
-          <a:p>
-            <a:pPr indent="0" marL="0">
-              <a:lnSpc>
-                <a:spcPct val="110000"/>
-              </a:lnSpc>
-              <a:buNone/>
-            </a:pPr>
-            <a:r>
-              <a:rPr lang="en-US" sz="1200" dirty="0">
-                <a:solidFill>
-                  <a:srgbClr val="AFC9E8"/>
-                </a:solidFill>
-                <a:latin typeface="Calibri" pitchFamily="34" charset="0"/>
-                <a:ea typeface="Calibri" pitchFamily="34" charset="-122"/>
-                <a:cs typeface="Calibri" pitchFamily="34" charset="-120"/>
-              </a:rPr>
-              <a:t>Proven directly: every Pass-1 and Pass-2 optimizer iteration bit-identical, fully unforced, to ITMAX (1,715/1,715), on real production data.</a:t>
-            </a:r>
-            <a:endParaRPr lang="en-US" sz="1200" dirty="0"/>
-          </a:p>
-        </p:txBody>
-      </p:sp>
-      <p:sp>
-        <p:nvSpPr>
-          <p:cNvPr id="12" name="Shape 10"/>
-          <p:cNvSpPr/>
-          <p:nvPr/>
-        </p:nvSpPr>
-        <p:spPr>
-          <a:xfrm>
-            <a:off x="548640" y="3511296"/>
-            <a:ext cx="384048" cy="384048"/>
-          </a:xfrm>
-          <a:prstGeom prst="roundRect">
-            <a:avLst>
-              <a:gd name="adj" fmla="val 50000"/>
-            </a:avLst>
-          </a:prstGeom>
-          <a:solidFill>
-            <a:srgbClr val="F2A93B"/>
-          </a:solidFill>
-          <a:ln/>
-        </p:spPr>
-      </p:sp>
-      <p:sp>
-        <p:nvSpPr>
-          <p:cNvPr id="13" name="Text 11"/>
-          <p:cNvSpPr txBox="1"/>
-          <p:nvPr/>
-        </p:nvSpPr>
-        <p:spPr>
-          <a:xfrm>
-            <a:off x="548640" y="3511296"/>
-            <a:ext cx="384048" cy="384048"/>
-          </a:xfrm>
-          <a:prstGeom prst="rect">
-            <a:avLst/>
-          </a:prstGeom>
-          <a:noFill/>
-          <a:ln/>
-        </p:spPr>
-        <p:txBody>
-          <a:bodyPr wrap="square" lIns="0" tIns="0" rIns="0" bIns="0" rtlCol="0" anchor="ctr"/>
-          <a:lstStyle/>
-          <a:p>
-            <a:pPr algn="ctr" indent="0" marL="0">
-              <a:buNone/>
-            </a:pPr>
-            <a:r>
-              <a:rPr lang="en-US" sz="1500" b="1" dirty="0">
-                <a:solidFill>
-                  <a:srgbClr val="071427"/>
-                </a:solidFill>
-                <a:latin typeface="Calibri" pitchFamily="34" charset="0"/>
-                <a:ea typeface="Calibri" pitchFamily="34" charset="-122"/>
-                <a:cs typeface="Calibri" pitchFamily="34" charset="-120"/>
-              </a:rPr>
-              <a:t>3</a:t>
-            </a:r>
-            <a:endParaRPr lang="en-US" sz="1500" dirty="0"/>
-          </a:p>
-        </p:txBody>
-      </p:sp>
-      <p:sp>
-        <p:nvSpPr>
-          <p:cNvPr id="14" name="Text 12"/>
-          <p:cNvSpPr txBox="1"/>
-          <p:nvPr/>
-        </p:nvSpPr>
-        <p:spPr>
-          <a:xfrm>
-            <a:off x="1143000" y="3465576"/>
-            <a:ext cx="10241280" cy="365760"/>
-          </a:xfrm>
-          <a:prstGeom prst="rect">
-            <a:avLst/>
-          </a:prstGeom>
-          <a:noFill/>
-          <a:ln/>
-        </p:spPr>
-        <p:txBody>
-          <a:bodyPr wrap="square" lIns="0" tIns="0" rIns="0" bIns="0" rtlCol="0" anchor="ctr"/>
-          <a:lstStyle/>
-          <a:p>
-            <a:pPr indent="0" marL="0">
-              <a:buNone/>
-            </a:pPr>
-            <a:r>
-              <a:rPr lang="en-US" sz="1500" b="1" dirty="0">
-                <a:solidFill>
-                  <a:srgbClr val="FFFFFF"/>
-                </a:solidFill>
-                <a:latin typeface="Calibri" pitchFamily="34" charset="0"/>
-                <a:ea typeface="Calibri" pitchFamily="34" charset="-122"/>
-                <a:cs typeface="Calibri" pitchFamily="34" charset="-120"/>
-              </a:rPr>
-              <a:t>Remaining spread is optimizer chaos, not a platform bug</a:t>
-            </a:r>
-            <a:endParaRPr lang="en-US" sz="1500" dirty="0"/>
-          </a:p>
-        </p:txBody>
-      </p:sp>
-      <p:sp>
-        <p:nvSpPr>
-          <p:cNvPr id="15" name="Text 13"/>
-          <p:cNvSpPr txBox="1"/>
-          <p:nvPr/>
-        </p:nvSpPr>
-        <p:spPr>
-          <a:xfrm>
-            <a:off x="1143000" y="3813048"/>
-            <a:ext cx="10241280" cy="502920"/>
-          </a:xfrm>
-          <a:prstGeom prst="rect">
-            <a:avLst/>
-          </a:prstGeom>
-          <a:noFill/>
-          <a:ln/>
-        </p:spPr>
-        <p:txBody>
-          <a:bodyPr wrap="square" lIns="0" tIns="0" rIns="0" bIns="0" rtlCol="0" anchor="ctr"/>
-          <a:lstStyle/>
-          <a:p>
-            <a:pPr indent="0" marL="0">
-              <a:lnSpc>
-                <a:spcPct val="110000"/>
-              </a:lnSpc>
-              <a:buNone/>
-            </a:pPr>
-            <a:r>
-              <a:rPr lang="en-US" sz="1200" dirty="0">
-                <a:solidFill>
-                  <a:srgbClr val="AFC9E8"/>
-                </a:solidFill>
-                <a:latin typeface="Calibri" pitchFamily="34" charset="0"/>
-                <a:ea typeface="Calibri" pitchFamily="34" charset="-122"/>
-                <a:cs typeface="Calibri" pitchFamily="34" charset="-120"/>
-              </a:rPr>
-              <a:t>The pre-fix batch’s realization #11 basin-flip predates these fixes — pending re-validation to see whether it still occurs with the real bugs removed.</a:t>
-            </a:r>
-            <a:endParaRPr lang="en-US" sz="1200" dirty="0"/>
-          </a:p>
-        </p:txBody>
-      </p:sp>
-      <p:sp>
-        <p:nvSpPr>
-          <p:cNvPr id="16" name="Shape 14"/>
-          <p:cNvSpPr/>
-          <p:nvPr/>
-        </p:nvSpPr>
-        <p:spPr>
-          <a:xfrm>
-            <a:off x="548640" y="4443984"/>
-            <a:ext cx="384048" cy="384048"/>
-          </a:xfrm>
-          <a:prstGeom prst="roundRect">
-            <a:avLst>
-              <a:gd name="adj" fmla="val 50000"/>
-            </a:avLst>
-          </a:prstGeom>
-          <a:solidFill>
-            <a:srgbClr val="F2A93B"/>
-          </a:solidFill>
-          <a:ln/>
-        </p:spPr>
-      </p:sp>
-      <p:sp>
-        <p:nvSpPr>
-          <p:cNvPr id="17" name="Text 15"/>
-          <p:cNvSpPr txBox="1"/>
-          <p:nvPr/>
-        </p:nvSpPr>
-        <p:spPr>
-          <a:xfrm>
-            <a:off x="548640" y="4443984"/>
-            <a:ext cx="384048" cy="384048"/>
-          </a:xfrm>
-          <a:prstGeom prst="rect">
-            <a:avLst/>
-          </a:prstGeom>
-          <a:noFill/>
-          <a:ln/>
-        </p:spPr>
-        <p:txBody>
-          <a:bodyPr wrap="square" lIns="0" tIns="0" rIns="0" bIns="0" rtlCol="0" anchor="ctr"/>
-          <a:lstStyle/>
-          <a:p>
-            <a:pPr algn="ctr" indent="0" marL="0">
-              <a:buNone/>
-            </a:pPr>
-            <a:r>
-              <a:rPr lang="en-US" sz="1500" b="1" dirty="0">
-                <a:solidFill>
-                  <a:srgbClr val="071427"/>
-                </a:solidFill>
-                <a:latin typeface="Calibri" pitchFamily="34" charset="0"/>
-                <a:ea typeface="Calibri" pitchFamily="34" charset="-122"/>
-                <a:cs typeface="Calibri" pitchFamily="34" charset="-120"/>
-              </a:rPr>
-              <a:t>4</a:t>
-            </a:r>
-            <a:endParaRPr lang="en-US" sz="1500" dirty="0"/>
-          </a:p>
-        </p:txBody>
-      </p:sp>
-      <p:sp>
-        <p:nvSpPr>
-          <p:cNvPr id="18" name="Text 16"/>
-          <p:cNvSpPr txBox="1"/>
-          <p:nvPr/>
-        </p:nvSpPr>
-        <p:spPr>
-          <a:xfrm>
-            <a:off x="1143000" y="4398264"/>
-            <a:ext cx="10241280" cy="365760"/>
-          </a:xfrm>
-          <a:prstGeom prst="rect">
-            <a:avLst/>
-          </a:prstGeom>
-          <a:noFill/>
-          <a:ln/>
-        </p:spPr>
-        <p:txBody>
-          <a:bodyPr wrap="square" lIns="0" tIns="0" rIns="0" bIns="0" rtlCol="0" anchor="ctr"/>
-          <a:lstStyle/>
-          <a:p>
-            <a:pPr indent="0" marL="0">
-              <a:buNone/>
-            </a:pPr>
-            <a:r>
-              <a:rPr lang="en-US" sz="1500" b="1" dirty="0">
-                <a:solidFill>
-                  <a:srgbClr val="FFFFFF"/>
-                </a:solidFill>
-                <a:latin typeface="Calibri" pitchFamily="34" charset="0"/>
-                <a:ea typeface="Calibri" pitchFamily="34" charset="-122"/>
-                <a:cs typeface="Calibri" pitchFamily="34" charset="-120"/>
-              </a:rPr>
-              <a:t>Judge parity by bootstrap statistics, not single-realization exact match</a:t>
-            </a:r>
-            <a:endParaRPr lang="en-US" sz="1500" dirty="0"/>
-          </a:p>
-        </p:txBody>
-      </p:sp>
-      <p:sp>
-        <p:nvSpPr>
-          <p:cNvPr id="19" name="Text 17"/>
-          <p:cNvSpPr txBox="1"/>
-          <p:nvPr/>
-        </p:nvSpPr>
-        <p:spPr>
-          <a:xfrm>
-            <a:off x="1143000" y="4745736"/>
-            <a:ext cx="10241280" cy="502920"/>
-          </a:xfrm>
-          <a:prstGeom prst="rect">
-            <a:avLst/>
-          </a:prstGeom>
-          <a:noFill/>
-          <a:ln/>
-        </p:spPr>
-        <p:txBody>
-          <a:bodyPr wrap="square" lIns="0" tIns="0" rIns="0" bIns="0" rtlCol="0" anchor="ctr"/>
-          <a:lstStyle/>
-          <a:p>
-            <a:pPr indent="0" marL="0">
-              <a:lnSpc>
-                <a:spcPct val="110000"/>
-              </a:lnSpc>
-              <a:buNone/>
-            </a:pPr>
-            <a:r>
-              <a:rPr lang="en-US" sz="1200" dirty="0">
-                <a:solidFill>
-                  <a:srgbClr val="AFC9E8"/>
-                </a:solidFill>
-                <a:latin typeface="Calibri" pitchFamily="34" charset="0"/>
-                <a:ea typeface="Calibri" pitchFamily="34" charset="-122"/>
-                <a:cs typeface="Calibri" pitchFamily="34" charset="-120"/>
-              </a:rPr>
-              <a:t>The pre-fix 15/20 batch result is now a historical baseline, not a current claim — a fresh batch run is the natural next validation step.</a:t>
-            </a:r>
-            <a:endParaRPr lang="en-US" sz="1200" dirty="0"/>
-          </a:p>
-        </p:txBody>
-      </p:sp>
-      <p:sp>
-        <p:nvSpPr>
-          <p:cNvPr id="20" name="Shape 18"/>
-          <p:cNvSpPr/>
-          <p:nvPr/>
-        </p:nvSpPr>
-        <p:spPr>
-          <a:xfrm>
-            <a:off x="548640" y="5376672"/>
-            <a:ext cx="384048" cy="384048"/>
-          </a:xfrm>
-          <a:prstGeom prst="roundRect">
-            <a:avLst>
-              <a:gd name="adj" fmla="val 50000"/>
-            </a:avLst>
-          </a:prstGeom>
-          <a:solidFill>
-            <a:srgbClr val="F2A93B"/>
-          </a:solidFill>
-          <a:ln/>
-        </p:spPr>
-      </p:sp>
-      <p:sp>
-        <p:nvSpPr>
-          <p:cNvPr id="21" name="Text 19"/>
-          <p:cNvSpPr txBox="1"/>
-          <p:nvPr/>
-        </p:nvSpPr>
-        <p:spPr>
-          <a:xfrm>
-            <a:off x="548640" y="5376672"/>
-            <a:ext cx="384048" cy="384048"/>
-          </a:xfrm>
-          <a:prstGeom prst="rect">
-            <a:avLst/>
-          </a:prstGeom>
-          <a:noFill/>
-          <a:ln/>
-        </p:spPr>
-        <p:txBody>
-          <a:bodyPr wrap="square" lIns="0" tIns="0" rIns="0" bIns="0" rtlCol="0" anchor="ctr"/>
-          <a:lstStyle/>
-          <a:p>
-            <a:pPr algn="ctr" indent="0" marL="0">
-              <a:buNone/>
-            </a:pPr>
-            <a:r>
-              <a:rPr lang="en-US" sz="1500" b="1" dirty="0">
-                <a:solidFill>
-                  <a:srgbClr val="071427"/>
-                </a:solidFill>
-                <a:latin typeface="Calibri" pitchFamily="34" charset="0"/>
-                <a:ea typeface="Calibri" pitchFamily="34" charset="-122"/>
-                <a:cs typeface="Calibri" pitchFamily="34" charset="-120"/>
-              </a:rPr>
-              <a:t>5</a:t>
-            </a:r>
-            <a:endParaRPr lang="en-US" sz="1500" dirty="0"/>
-          </a:p>
-        </p:txBody>
-      </p:sp>
-      <p:sp>
-        <p:nvSpPr>
-          <p:cNvPr id="22" name="Text 20"/>
-          <p:cNvSpPr txBox="1"/>
-          <p:nvPr/>
-        </p:nvSpPr>
-        <p:spPr>
-          <a:xfrm>
-            <a:off x="1143000" y="5330952"/>
-            <a:ext cx="10241280" cy="365760"/>
-          </a:xfrm>
-          <a:prstGeom prst="rect">
-            <a:avLst/>
-          </a:prstGeom>
-          <a:noFill/>
-          <a:ln/>
-        </p:spPr>
-        <p:txBody>
-          <a:bodyPr wrap="square" lIns="0" tIns="0" rIns="0" bIns="0" rtlCol="0" anchor="ctr"/>
-          <a:lstStyle/>
-          <a:p>
-            <a:pPr indent="0" marL="0">
-              <a:buNone/>
-            </a:pPr>
-            <a:r>
-              <a:rPr lang="en-US" sz="1500" b="1" dirty="0">
-                <a:solidFill>
-                  <a:srgbClr val="FFFFFF"/>
-                </a:solidFill>
-                <a:latin typeface="Calibri" pitchFamily="34" charset="0"/>
-                <a:ea typeface="Calibri" pitchFamily="34" charset="-122"/>
-                <a:cs typeface="Calibri" pitchFamily="34" charset="-120"/>
-              </a:rPr>
-              <a:t>JS carries a real, separate ~1.7× timing overhead</a:t>
-            </a:r>
-            <a:endParaRPr lang="en-US" sz="1500" dirty="0"/>
-          </a:p>
-        </p:txBody>
-      </p:sp>
-      <p:sp>
-        <p:nvSpPr>
-          <p:cNvPr id="23" name="Text 21"/>
-          <p:cNvSpPr txBox="1"/>
-          <p:nvPr/>
-        </p:nvSpPr>
-        <p:spPr>
-          <a:xfrm>
-            <a:off x="1143000" y="5678424"/>
-            <a:ext cx="10241280" cy="502920"/>
-          </a:xfrm>
-          <a:prstGeom prst="rect">
-            <a:avLst/>
-          </a:prstGeom>
-          <a:noFill/>
-          <a:ln/>
-        </p:spPr>
-        <p:txBody>
-          <a:bodyPr wrap="square" lIns="0" tIns="0" rIns="0" bIns="0" rtlCol="0" anchor="ctr"/>
-          <a:lstStyle/>
-          <a:p>
-            <a:pPr indent="0" marL="0">
-              <a:lnSpc>
-                <a:spcPct val="110000"/>
-              </a:lnSpc>
-              <a:buNone/>
-            </a:pPr>
-            <a:r>
-              <a:rPr lang="en-US" sz="1200" dirty="0">
-                <a:solidFill>
-                  <a:srgbClr val="AFC9E8"/>
-                </a:solidFill>
-                <a:latin typeface="Calibri" pitchFamily="34" charset="0"/>
-                <a:ea typeface="Calibri" pitchFamily="34" charset="-122"/>
-                <a:cs typeface="Calibri" pitchFamily="34" charset="-120"/>
-              </a:rPr>
-              <a:t>Present on accurate realizations too — an interpretation/dispatch cost, independent of the accuracy question.</a:t>
-            </a:r>
-            <a:endParaRPr lang="en-US" sz="1200" dirty="0"/>
-          </a:p>
-        </p:txBody>
-      </p:sp>
-      <p:sp>
-        <p:nvSpPr>
-          <p:cNvPr id="24" name="Text 22"/>
-          <p:cNvSpPr txBox="1"/>
-          <p:nvPr/>
-        </p:nvSpPr>
-        <p:spPr>
-          <a:xfrm>
-            <a:off x="11521440" y="6446520"/>
-            <a:ext cx="457200" cy="274320"/>
-          </a:xfrm>
-          <a:prstGeom prst="rect">
-            <a:avLst/>
-          </a:prstGeom>
-          <a:noFill/>
-          <a:ln/>
-        </p:spPr>
-        <p:txBody>
-          <a:bodyPr wrap="square" lIns="0" tIns="0" rIns="0" bIns="0" rtlCol="0" anchor="ctr"/>
-          <a:lstStyle/>
-          <a:p>
-            <a:pPr algn="r" indent="0" marL="0">
-              <a:buNone/>
-            </a:pPr>
-            <a:r>
-              <a:rPr lang="en-US" sz="1000" dirty="0">
-                <a:solidFill>
-                  <a:srgbClr val="4A5B72"/>
-                </a:solidFill>
-                <a:latin typeface="Calibri" pitchFamily="34" charset="0"/>
-                <a:ea typeface="Calibri" pitchFamily="34" charset="-122"/>
-                <a:cs typeface="Calibri" pitchFamily="34" charset="-120"/>
-              </a:rPr>
-              <a:t>15</a:t>
-            </a:r>
-            <a:endParaRPr lang="en-US" sz="1000" dirty="0"/>
-          </a:p>
-        </p:txBody>
-      </p:sp>
-    </p:spTree>
-  </p:cSld>
-  <p:clrMapOvr>
-    <a:masterClrMapping/>
-  </p:clrMapOvr>
-</p:sld>
-</file>
-
-<file path=ppt/slides/slide16.xml><?xml version="1.0" encoding="utf-8"?>
-<p:sld xmlns:a="http://schemas.openxmlformats.org/drawingml/2006/main" xmlns:r="http://schemas.openxmlformats.org/officeDocument/2006/relationships" xmlns:p="http://schemas.openxmlformats.org/presentationml/2006/main">
-  <p:cSld name="Slide 16">
-    <p:bg>
-      <p:bgPr>
-        <a:solidFill>
-          <a:srgbClr val="0B1E3F"/>
-        </a:solidFill>
-      </p:bgPr>
-    </p:bg>
-    <p:spTree>
-      <p:nvGrpSpPr>
-        <p:cNvPr id="1" name=""/>
-        <p:cNvGrpSpPr/>
-        <p:nvPr/>
-      </p:nvGrpSpPr>
-      <p:grpSpPr>
-        <a:xfrm>
-          <a:off x="0" y="0"/>
-          <a:ext cx="0" cy="0"/>
-          <a:chOff x="0" y="0"/>
-          <a:chExt cx="0" cy="0"/>
-        </a:xfrm>
-      </p:grpSpPr>
-      <p:sp>
-        <p:nvSpPr>
-          <p:cNvPr id="2" name="Text 0"/>
-          <p:cNvSpPr txBox="1"/>
-          <p:nvPr/>
-        </p:nvSpPr>
-        <p:spPr>
-          <a:xfrm>
-            <a:off x="822960" y="2468880"/>
-            <a:ext cx="10515600" cy="914400"/>
-          </a:xfrm>
-          <a:prstGeom prst="rect">
-            <a:avLst/>
-          </a:prstGeom>
-          <a:noFill/>
-          <a:ln/>
-        </p:spPr>
-        <p:txBody>
-          <a:bodyPr wrap="square" lIns="0" tIns="0" rIns="0" bIns="0" rtlCol="0" anchor="ctr"/>
-          <a:lstStyle/>
-          <a:p>
-            <a:pPr indent="0" marL="0">
-              <a:buNone/>
-            </a:pPr>
-            <a:r>
-              <a:rPr lang="en-US" sz="4000" b="1" dirty="0">
-                <a:solidFill>
-                  <a:srgbClr val="FFFFFF"/>
-                </a:solidFill>
-                <a:latin typeface="Cambria" pitchFamily="34" charset="0"/>
-                <a:ea typeface="Cambria" pitchFamily="34" charset="-122"/>
-                <a:cs typeface="Cambria" pitchFamily="34" charset="-120"/>
-              </a:rPr>
-              <a:t>The gap was 1 ULP wide.</a:t>
-            </a:r>
-            <a:endParaRPr lang="en-US" sz="4000" dirty="0"/>
-          </a:p>
-        </p:txBody>
-      </p:sp>
-      <p:sp>
-        <p:nvSpPr>
-          <p:cNvPr id="3" name="Text 1"/>
-          <p:cNvSpPr txBox="1"/>
-          <p:nvPr/>
-        </p:nvSpPr>
-        <p:spPr>
-          <a:xfrm>
-            <a:off x="822960" y="3246120"/>
-            <a:ext cx="10515600" cy="548640"/>
-          </a:xfrm>
-          <a:prstGeom prst="rect">
-            <a:avLst/>
-          </a:prstGeom>
-          <a:noFill/>
-          <a:ln/>
-        </p:spPr>
-        <p:txBody>
-          <a:bodyPr wrap="square" lIns="0" tIns="0" rIns="0" bIns="0" rtlCol="0" anchor="ctr"/>
-          <a:lstStyle/>
-          <a:p>
-            <a:pPr indent="0" marL="0">
-              <a:buNone/>
-            </a:pPr>
-            <a:r>
-              <a:rPr lang="en-US" sz="1800" dirty="0">
-                <a:solidFill>
-                  <a:srgbClr val="F2A93B"/>
-                </a:solidFill>
-                <a:latin typeface="Calibri" pitchFamily="34" charset="0"/>
-                <a:ea typeface="Calibri" pitchFamily="34" charset="-122"/>
-                <a:cs typeface="Calibri" pitchFamily="34" charset="-120"/>
-              </a:rPr>
-              <a:t>Now it’s zero.</a:t>
-            </a:r>
-            <a:endParaRPr lang="en-US" sz="1800" dirty="0"/>
-          </a:p>
-        </p:txBody>
-      </p:sp>
-      <p:sp>
-        <p:nvSpPr>
-          <p:cNvPr id="4" name="Text 2"/>
-          <p:cNvSpPr txBox="1"/>
-          <p:nvPr/>
-        </p:nvSpPr>
-        <p:spPr>
-          <a:xfrm>
-            <a:off x="822960" y="6126480"/>
-            <a:ext cx="10515600" cy="365760"/>
-          </a:xfrm>
-          <a:prstGeom prst="rect">
-            <a:avLst/>
-          </a:prstGeom>
-          <a:noFill/>
-          <a:ln/>
-        </p:spPr>
-        <p:txBody>
-          <a:bodyPr wrap="square" lIns="0" tIns="0" rIns="0" bIns="0" rtlCol="0" anchor="ctr"/>
-          <a:lstStyle/>
-          <a:p>
-            <a:pPr indent="0" marL="0">
-              <a:buNone/>
-            </a:pPr>
-            <a:r>
-              <a:rPr lang="en-US" sz="1200" dirty="0">
-                <a:solidFill>
-                  <a:srgbClr val="AFC9E8"/>
-                </a:solidFill>
-                <a:latin typeface="Calibri" pitchFamily="34" charset="0"/>
-                <a:ea typeface="Calibri" pitchFamily="34" charset="-122"/>
-                <a:cs typeface="Calibri" pitchFamily="34" charset="-120"/>
-              </a:rPr>
-              <a:t>3KIDNAS · JS/Fortran bit-exactness investigation · 2026-09-28</a:t>
-            </a:r>
-            <a:endParaRPr lang="en-US" sz="1200" dirty="0"/>
           </a:p>
         </p:txBody>
       </p:sp>
@@ -7719,6 +10245,1658 @@
 </p:sld>
 </file>
 
+<file path=ppt/slides/slide20.xml><?xml version="1.0" encoding="utf-8"?>
+<p:sld xmlns:a="http://schemas.openxmlformats.org/drawingml/2006/main" xmlns:r="http://schemas.openxmlformats.org/officeDocument/2006/relationships" xmlns:p="http://schemas.openxmlformats.org/presentationml/2006/main">
+  <p:cSld name="Slide 15">
+    <p:bg>
+      <p:bgPr>
+        <a:solidFill>
+          <a:srgbClr val="0B1E3F"/>
+        </a:solidFill>
+      </p:bgPr>
+    </p:bg>
+    <p:spTree>
+      <p:nvGrpSpPr>
+        <p:cNvPr id="1" name=""/>
+        <p:cNvGrpSpPr/>
+        <p:nvPr/>
+      </p:nvGrpSpPr>
+      <p:grpSpPr>
+        <a:xfrm>
+          <a:off x="0" y="0"/>
+          <a:ext cx="0" cy="0"/>
+          <a:chOff x="0" y="0"/>
+          <a:chExt cx="0" cy="0"/>
+        </a:xfrm>
+      </p:grpSpPr>
+      <p:sp>
+        <p:nvSpPr>
+          <p:cNvPr id="2" name="Text 0"/>
+          <p:cNvSpPr txBox="1"/>
+          <p:nvPr/>
+        </p:nvSpPr>
+        <p:spPr>
+          <a:xfrm>
+            <a:off x="548640" y="365760"/>
+            <a:ext cx="7315200" cy="320040"/>
+          </a:xfrm>
+          <a:prstGeom prst="rect">
+            <a:avLst/>
+          </a:prstGeom>
+          <a:noFill/>
+          <a:ln/>
+        </p:spPr>
+        <p:txBody>
+          <a:bodyPr wrap="square" lIns="0" tIns="0" rIns="0" bIns="0" rtlCol="0" anchor="ctr"/>
+          <a:lstStyle/>
+          <a:p>
+            <a:pPr indent="0" marL="0">
+              <a:buNone/>
+            </a:pPr>
+            <a:r>
+              <a:rPr lang="en-US" sz="1200" b="1" spc="200" kern="0" dirty="0">
+                <a:solidFill>
+                  <a:srgbClr val="F2A93B"/>
+                </a:solidFill>
+                <a:latin typeface="Calibri" pitchFamily="34" charset="0"/>
+                <a:ea typeface="Calibri" pitchFamily="34" charset="-122"/>
+                <a:cs typeface="Calibri" pitchFamily="34" charset="-120"/>
+              </a:rPr>
+              <a:t>KEY TAKEAWAYS</a:t>
+            </a:r>
+            <a:endParaRPr lang="en-US" sz="1200" dirty="0"/>
+          </a:p>
+        </p:txBody>
+      </p:sp>
+      <p:sp>
+        <p:nvSpPr>
+          <p:cNvPr id="3" name="Text 1"/>
+          <p:cNvSpPr txBox="1"/>
+          <p:nvPr/>
+        </p:nvSpPr>
+        <p:spPr>
+          <a:xfrm>
+            <a:off x="548640" y="685800"/>
+            <a:ext cx="11064240" cy="640080"/>
+          </a:xfrm>
+          <a:prstGeom prst="rect">
+            <a:avLst/>
+          </a:prstGeom>
+          <a:noFill/>
+          <a:ln/>
+        </p:spPr>
+        <p:txBody>
+          <a:bodyPr wrap="square" lIns="0" tIns="0" rIns="0" bIns="0" rtlCol="0" anchor="ctr"/>
+          <a:lstStyle/>
+          <a:p>
+            <a:pPr indent="0" marL="0">
+              <a:buNone/>
+            </a:pPr>
+            <a:r>
+              <a:rPr lang="en-US" sz="2800" b="1" dirty="0">
+                <a:solidFill>
+                  <a:srgbClr val="FFFFFF"/>
+                </a:solidFill>
+                <a:latin typeface="Cambria" pitchFamily="34" charset="0"/>
+                <a:ea typeface="Cambria" pitchFamily="34" charset="-122"/>
+                <a:cs typeface="Cambria" pitchFamily="34" charset="-120"/>
+              </a:rPr>
+              <a:t>What this proves, and what to measure going forward</a:t>
+            </a:r>
+            <a:endParaRPr lang="en-US" sz="2800" dirty="0"/>
+          </a:p>
+        </p:txBody>
+      </p:sp>
+      <p:sp>
+        <p:nvSpPr>
+          <p:cNvPr id="4" name="Shape 2"/>
+          <p:cNvSpPr/>
+          <p:nvPr/>
+        </p:nvSpPr>
+        <p:spPr>
+          <a:xfrm>
+            <a:off x="548640" y="1645920"/>
+            <a:ext cx="384048" cy="384048"/>
+          </a:xfrm>
+          <a:prstGeom prst="roundRect">
+            <a:avLst>
+              <a:gd name="adj" fmla="val 50000"/>
+            </a:avLst>
+          </a:prstGeom>
+          <a:solidFill>
+            <a:srgbClr val="F2A93B"/>
+          </a:solidFill>
+          <a:ln/>
+        </p:spPr>
+        <p:txBody>
+          <a:bodyPr/>
+          <a:p/>
+        </p:txBody>
+      </p:sp>
+      <p:sp>
+        <p:nvSpPr>
+          <p:cNvPr id="5" name="Text 3"/>
+          <p:cNvSpPr txBox="1"/>
+          <p:nvPr/>
+        </p:nvSpPr>
+        <p:spPr>
+          <a:xfrm>
+            <a:off x="548640" y="1645920"/>
+            <a:ext cx="384048" cy="384048"/>
+          </a:xfrm>
+          <a:prstGeom prst="rect">
+            <a:avLst/>
+          </a:prstGeom>
+          <a:noFill/>
+          <a:ln/>
+        </p:spPr>
+        <p:txBody>
+          <a:bodyPr wrap="square" lIns="0" tIns="0" rIns="0" bIns="0" rtlCol="0" anchor="ctr"/>
+          <a:lstStyle/>
+          <a:p>
+            <a:pPr algn="ctr" indent="0" marL="0">
+              <a:buNone/>
+            </a:pPr>
+            <a:r>
+              <a:rPr lang="en-US" sz="1500" b="1" dirty="0">
+                <a:solidFill>
+                  <a:srgbClr val="071427"/>
+                </a:solidFill>
+                <a:latin typeface="Calibri" pitchFamily="34" charset="0"/>
+                <a:ea typeface="Calibri" pitchFamily="34" charset="-122"/>
+                <a:cs typeface="Calibri" pitchFamily="34" charset="-120"/>
+              </a:rPr>
+              <a:t>1</a:t>
+            </a:r>
+            <a:endParaRPr lang="en-US" sz="1500" dirty="0"/>
+          </a:p>
+        </p:txBody>
+      </p:sp>
+      <p:sp>
+        <p:nvSpPr>
+          <p:cNvPr id="6" name="Text 4"/>
+          <p:cNvSpPr txBox="1"/>
+          <p:nvPr/>
+        </p:nvSpPr>
+        <p:spPr>
+          <a:xfrm>
+            <a:off x="1143000" y="1600200"/>
+            <a:ext cx="10241280" cy="365760"/>
+          </a:xfrm>
+          <a:prstGeom prst="rect">
+            <a:avLst/>
+          </a:prstGeom>
+          <a:noFill/>
+          <a:ln/>
+        </p:spPr>
+        <p:txBody>
+          <a:bodyPr wrap="square" lIns="0" tIns="0" rIns="0" bIns="0" rtlCol="0" anchor="ctr"/>
+          <a:lstStyle/>
+          <a:p>
+            <a:pPr indent="0" marL="0">
+              <a:buNone/>
+            </a:pPr>
+            <a:r>
+              <a:rPr lang="en-US" sz="1500" b="1" dirty="0">
+                <a:solidFill>
+                  <a:srgbClr val="FFFFFF"/>
+                </a:solidFill>
+                <a:latin typeface="Calibri" pitchFamily="34" charset="0"/>
+                <a:ea typeface="Calibri" pitchFamily="34" charset="-122"/>
+                <a:cs typeface="Calibri" pitchFamily="34" charset="-120"/>
+              </a:rPr>
+              <a:t>Root cause is fully identified</a:t>
+            </a:r>
+            <a:endParaRPr lang="en-US" sz="1500" dirty="0"/>
+          </a:p>
+        </p:txBody>
+      </p:sp>
+      <p:sp>
+        <p:nvSpPr>
+          <p:cNvPr id="7" name="Text 5"/>
+          <p:cNvSpPr txBox="1"/>
+          <p:nvPr/>
+        </p:nvSpPr>
+        <p:spPr>
+          <a:xfrm>
+            <a:off x="1143000" y="1947672"/>
+            <a:ext cx="10241280" cy="502920"/>
+          </a:xfrm>
+          <a:prstGeom prst="rect">
+            <a:avLst/>
+          </a:prstGeom>
+          <a:noFill/>
+          <a:ln/>
+        </p:spPr>
+        <p:txBody>
+          <a:bodyPr wrap="square" lIns="0" tIns="0" rIns="0" bIns="0" rtlCol="0" anchor="ctr"/>
+          <a:lstStyle/>
+          <a:p>
+            <a:pPr indent="0" marL="0">
+              <a:lnSpc>
+                <a:spcPct val="110000"/>
+              </a:lnSpc>
+              <a:buNone/>
+            </a:pPr>
+            <a:r>
+              <a:rPr lang="en-US" sz="1200" dirty="0">
+                <a:solidFill>
+                  <a:srgbClr val="AFC9E8"/>
+                </a:solidFill>
+                <a:latin typeface="Calibri" pitchFamily="34" charset="0"/>
+                <a:ea typeface="Calibri" pitchFamily="34" charset="-122"/>
+                <a:cs typeface="Calibri" pitchFamily="34" charset="-120"/>
+              </a:rPr>
+              <a:t>Seven real, distinct bugs — not an irreducible floor — were the entire origin of every observed difference. All seven are fixed.</a:t>
+            </a:r>
+            <a:endParaRPr lang="en-US" sz="1200" dirty="0"/>
+          </a:p>
+        </p:txBody>
+      </p:sp>
+      <p:sp>
+        <p:nvSpPr>
+          <p:cNvPr id="8" name="Shape 6"/>
+          <p:cNvSpPr/>
+          <p:nvPr/>
+        </p:nvSpPr>
+        <p:spPr>
+          <a:xfrm>
+            <a:off x="548640" y="2578608"/>
+            <a:ext cx="384048" cy="384048"/>
+          </a:xfrm>
+          <a:prstGeom prst="roundRect">
+            <a:avLst>
+              <a:gd name="adj" fmla="val 50000"/>
+            </a:avLst>
+          </a:prstGeom>
+          <a:solidFill>
+            <a:srgbClr val="F2A93B"/>
+          </a:solidFill>
+          <a:ln/>
+        </p:spPr>
+        <p:txBody>
+          <a:bodyPr/>
+          <a:p/>
+        </p:txBody>
+      </p:sp>
+      <p:sp>
+        <p:nvSpPr>
+          <p:cNvPr id="9" name="Text 7"/>
+          <p:cNvSpPr txBox="1"/>
+          <p:nvPr/>
+        </p:nvSpPr>
+        <p:spPr>
+          <a:xfrm>
+            <a:off x="548640" y="2578608"/>
+            <a:ext cx="384048" cy="384048"/>
+          </a:xfrm>
+          <a:prstGeom prst="rect">
+            <a:avLst/>
+          </a:prstGeom>
+          <a:noFill/>
+          <a:ln/>
+        </p:spPr>
+        <p:txBody>
+          <a:bodyPr wrap="square" lIns="0" tIns="0" rIns="0" bIns="0" rtlCol="0" anchor="ctr"/>
+          <a:lstStyle/>
+          <a:p>
+            <a:pPr algn="ctr" indent="0" marL="0">
+              <a:buNone/>
+            </a:pPr>
+            <a:r>
+              <a:rPr lang="en-US" sz="1500" b="1" dirty="0">
+                <a:solidFill>
+                  <a:srgbClr val="071427"/>
+                </a:solidFill>
+                <a:latin typeface="Calibri" pitchFamily="34" charset="0"/>
+                <a:ea typeface="Calibri" pitchFamily="34" charset="-122"/>
+                <a:cs typeface="Calibri" pitchFamily="34" charset="-120"/>
+              </a:rPr>
+              <a:t>2</a:t>
+            </a:r>
+            <a:endParaRPr lang="en-US" sz="1500" dirty="0"/>
+          </a:p>
+        </p:txBody>
+      </p:sp>
+      <p:sp>
+        <p:nvSpPr>
+          <p:cNvPr id="10" name="Text 8"/>
+          <p:cNvSpPr txBox="1"/>
+          <p:nvPr/>
+        </p:nvSpPr>
+        <p:spPr>
+          <a:xfrm>
+            <a:off x="1143000" y="2532888"/>
+            <a:ext cx="10241280" cy="365760"/>
+          </a:xfrm>
+          <a:prstGeom prst="rect">
+            <a:avLst/>
+          </a:prstGeom>
+          <a:noFill/>
+          <a:ln/>
+        </p:spPr>
+        <p:txBody>
+          <a:bodyPr wrap="square" lIns="0" tIns="0" rIns="0" bIns="0" rtlCol="0" anchor="ctr"/>
+          <a:lstStyle/>
+          <a:p>
+            <a:pPr indent="0" marL="0">
+              <a:buNone/>
+            </a:pPr>
+            <a:r>
+              <a:rPr lang="en-US" sz="1500" b="1" dirty="0">
+                <a:solidFill>
+                  <a:srgbClr val="FFFFFF"/>
+                </a:solidFill>
+                <a:latin typeface="Calibri" pitchFamily="34" charset="0"/>
+                <a:ea typeface="Calibri" pitchFamily="34" charset="-122"/>
+                <a:cs typeface="Calibri" pitchFamily="34" charset="-120"/>
+              </a:rPr>
+              <a:t>Per-evaluation math has zero remaining bugs</a:t>
+            </a:r>
+            <a:endParaRPr lang="en-US" sz="1500" dirty="0"/>
+          </a:p>
+        </p:txBody>
+      </p:sp>
+      <p:sp>
+        <p:nvSpPr>
+          <p:cNvPr id="11" name="Text 9"/>
+          <p:cNvSpPr txBox="1"/>
+          <p:nvPr/>
+        </p:nvSpPr>
+        <p:spPr>
+          <a:xfrm>
+            <a:off x="1143000" y="2880360"/>
+            <a:ext cx="10241280" cy="502920"/>
+          </a:xfrm>
+          <a:prstGeom prst="rect">
+            <a:avLst/>
+          </a:prstGeom>
+          <a:noFill/>
+          <a:ln/>
+        </p:spPr>
+        <p:txBody>
+          <a:bodyPr wrap="square" lIns="0" tIns="0" rIns="0" bIns="0" rtlCol="0" anchor="ctr"/>
+          <a:lstStyle/>
+          <a:p>
+            <a:pPr indent="0" marL="0">
+              <a:lnSpc>
+                <a:spcPct val="110000"/>
+              </a:lnSpc>
+              <a:buNone/>
+            </a:pPr>
+            <a:r>
+              <a:rPr lang="en-US" sz="1200" dirty="0">
+                <a:solidFill>
+                  <a:srgbClr val="AFC9E8"/>
+                </a:solidFill>
+                <a:latin typeface="Calibri" pitchFamily="34" charset="0"/>
+                <a:ea typeface="Calibri" pitchFamily="34" charset="-122"/>
+                <a:cs typeface="Calibri" pitchFamily="34" charset="-120"/>
+              </a:rPr>
+              <a:t>Proven directly: every Pass-1 and Pass-2 optimizer iteration bit-identical, fully unforced, to ITMAX (1,715/1,715), on real production data.</a:t>
+            </a:r>
+            <a:endParaRPr lang="en-US" sz="1200" dirty="0"/>
+          </a:p>
+        </p:txBody>
+      </p:sp>
+      <p:sp>
+        <p:nvSpPr>
+          <p:cNvPr id="12" name="Shape 10"/>
+          <p:cNvSpPr/>
+          <p:nvPr/>
+        </p:nvSpPr>
+        <p:spPr>
+          <a:xfrm>
+            <a:off x="548640" y="3511296"/>
+            <a:ext cx="384048" cy="384048"/>
+          </a:xfrm>
+          <a:prstGeom prst="roundRect">
+            <a:avLst>
+              <a:gd name="adj" fmla="val 50000"/>
+            </a:avLst>
+          </a:prstGeom>
+          <a:solidFill>
+            <a:srgbClr val="F2A93B"/>
+          </a:solidFill>
+          <a:ln/>
+        </p:spPr>
+        <p:txBody>
+          <a:bodyPr/>
+          <a:p/>
+        </p:txBody>
+      </p:sp>
+      <p:sp>
+        <p:nvSpPr>
+          <p:cNvPr id="13" name="Text 11"/>
+          <p:cNvSpPr txBox="1"/>
+          <p:nvPr/>
+        </p:nvSpPr>
+        <p:spPr>
+          <a:xfrm>
+            <a:off x="548640" y="3511296"/>
+            <a:ext cx="384048" cy="384048"/>
+          </a:xfrm>
+          <a:prstGeom prst="rect">
+            <a:avLst/>
+          </a:prstGeom>
+          <a:noFill/>
+          <a:ln/>
+        </p:spPr>
+        <p:txBody>
+          <a:bodyPr wrap="square" lIns="0" tIns="0" rIns="0" bIns="0" rtlCol="0" anchor="ctr"/>
+          <a:lstStyle/>
+          <a:p>
+            <a:pPr algn="ctr" indent="0" marL="0">
+              <a:buNone/>
+            </a:pPr>
+            <a:r>
+              <a:rPr lang="en-US" sz="1500" b="1" dirty="0">
+                <a:solidFill>
+                  <a:srgbClr val="071427"/>
+                </a:solidFill>
+                <a:latin typeface="Calibri" pitchFamily="34" charset="0"/>
+                <a:ea typeface="Calibri" pitchFamily="34" charset="-122"/>
+                <a:cs typeface="Calibri" pitchFamily="34" charset="-120"/>
+              </a:rPr>
+              <a:t>3</a:t>
+            </a:r>
+            <a:endParaRPr lang="en-US" sz="1500" dirty="0"/>
+          </a:p>
+        </p:txBody>
+      </p:sp>
+      <p:sp>
+        <p:nvSpPr>
+          <p:cNvPr id="14" name="Text 12"/>
+          <p:cNvSpPr txBox="1"/>
+          <p:nvPr/>
+        </p:nvSpPr>
+        <p:spPr>
+          <a:xfrm>
+            <a:off x="1143000" y="3465576"/>
+            <a:ext cx="10241280" cy="365760"/>
+          </a:xfrm>
+          <a:prstGeom prst="rect">
+            <a:avLst/>
+          </a:prstGeom>
+          <a:noFill/>
+          <a:ln/>
+        </p:spPr>
+        <p:txBody>
+          <a:bodyPr wrap="square" lIns="0" tIns="0" rIns="0" bIns="0" rtlCol="0" anchor="ctr"/>
+          <a:lstStyle/>
+          <a:p>
+            <a:pPr indent="0" marL="0">
+              <a:buNone/>
+            </a:pPr>
+            <a:r>
+              <a:rPr lang="en-US" sz="1500" b="1" dirty="0">
+                <a:solidFill>
+                  <a:srgbClr val="FFFFFF"/>
+                </a:solidFill>
+                <a:latin typeface="Calibri" pitchFamily="34" charset="0"/>
+                <a:ea typeface="Calibri" pitchFamily="34" charset="-122"/>
+                <a:cs typeface="Calibri" pitchFamily="34" charset="-120"/>
+              </a:rPr>
+              <a:t>Remaining spread is optimizer chaos, not a platform bug</a:t>
+            </a:r>
+            <a:endParaRPr lang="en-US" sz="1500" dirty="0"/>
+          </a:p>
+        </p:txBody>
+      </p:sp>
+      <p:sp>
+        <p:nvSpPr>
+          <p:cNvPr id="15" name="Text 13"/>
+          <p:cNvSpPr txBox="1"/>
+          <p:nvPr/>
+        </p:nvSpPr>
+        <p:spPr>
+          <a:xfrm>
+            <a:off x="1143000" y="3813048"/>
+            <a:ext cx="10241280" cy="502920"/>
+          </a:xfrm>
+          <a:prstGeom prst="rect">
+            <a:avLst/>
+          </a:prstGeom>
+          <a:noFill/>
+          <a:ln/>
+        </p:spPr>
+        <p:txBody>
+          <a:bodyPr wrap="square" lIns="0" tIns="0" rIns="0" bIns="0" rtlCol="0" anchor="ctr"/>
+          <a:lstStyle/>
+          <a:p>
+            <a:pPr indent="0" marL="0">
+              <a:lnSpc>
+                <a:spcPct val="110000"/>
+              </a:lnSpc>
+              <a:buNone/>
+            </a:pPr>
+            <a:r>
+              <a:rPr lang="en-US" sz="1200" dirty="0">
+                <a:solidFill>
+                  <a:srgbClr val="AFC9E8"/>
+                </a:solidFill>
+                <a:latin typeface="Calibri" pitchFamily="34" charset="0"/>
+                <a:ea typeface="Calibri" pitchFamily="34" charset="-122"/>
+                <a:cs typeface="Calibri" pitchFamily="34" charset="-120"/>
+              </a:rPr>
+              <a:t>The pre-fix batch’s realization #11 basin-flip predates these fixes — pending re-validation to see whether it still occurs with the real bugs removed.</a:t>
+            </a:r>
+            <a:endParaRPr lang="en-US" sz="1200" dirty="0"/>
+          </a:p>
+        </p:txBody>
+      </p:sp>
+      <p:sp>
+        <p:nvSpPr>
+          <p:cNvPr id="16" name="Shape 14"/>
+          <p:cNvSpPr/>
+          <p:nvPr/>
+        </p:nvSpPr>
+        <p:spPr>
+          <a:xfrm>
+            <a:off x="548640" y="4443984"/>
+            <a:ext cx="384048" cy="384048"/>
+          </a:xfrm>
+          <a:prstGeom prst="roundRect">
+            <a:avLst>
+              <a:gd name="adj" fmla="val 50000"/>
+            </a:avLst>
+          </a:prstGeom>
+          <a:solidFill>
+            <a:srgbClr val="F2A93B"/>
+          </a:solidFill>
+          <a:ln/>
+        </p:spPr>
+        <p:txBody>
+          <a:bodyPr/>
+          <a:p/>
+        </p:txBody>
+      </p:sp>
+      <p:sp>
+        <p:nvSpPr>
+          <p:cNvPr id="17" name="Text 15"/>
+          <p:cNvSpPr txBox="1"/>
+          <p:nvPr/>
+        </p:nvSpPr>
+        <p:spPr>
+          <a:xfrm>
+            <a:off x="548640" y="4443984"/>
+            <a:ext cx="384048" cy="384048"/>
+          </a:xfrm>
+          <a:prstGeom prst="rect">
+            <a:avLst/>
+          </a:prstGeom>
+          <a:noFill/>
+          <a:ln/>
+        </p:spPr>
+        <p:txBody>
+          <a:bodyPr wrap="square" lIns="0" tIns="0" rIns="0" bIns="0" rtlCol="0" anchor="ctr"/>
+          <a:lstStyle/>
+          <a:p>
+            <a:pPr algn="ctr" indent="0" marL="0">
+              <a:buNone/>
+            </a:pPr>
+            <a:r>
+              <a:rPr lang="en-US" sz="1500" b="1" dirty="0">
+                <a:solidFill>
+                  <a:srgbClr val="071427"/>
+                </a:solidFill>
+                <a:latin typeface="Calibri" pitchFamily="34" charset="0"/>
+                <a:ea typeface="Calibri" pitchFamily="34" charset="-122"/>
+                <a:cs typeface="Calibri" pitchFamily="34" charset="-120"/>
+              </a:rPr>
+              <a:t>4</a:t>
+            </a:r>
+            <a:endParaRPr lang="en-US" sz="1500" dirty="0"/>
+          </a:p>
+        </p:txBody>
+      </p:sp>
+      <p:sp>
+        <p:nvSpPr>
+          <p:cNvPr id="18" name="Text 16"/>
+          <p:cNvSpPr txBox="1"/>
+          <p:nvPr/>
+        </p:nvSpPr>
+        <p:spPr>
+          <a:xfrm>
+            <a:off x="1143000" y="4398264"/>
+            <a:ext cx="10241280" cy="365760"/>
+          </a:xfrm>
+          <a:prstGeom prst="rect">
+            <a:avLst/>
+          </a:prstGeom>
+          <a:noFill/>
+          <a:ln/>
+        </p:spPr>
+        <p:txBody>
+          <a:bodyPr wrap="square" lIns="0" tIns="0" rIns="0" bIns="0" rtlCol="0" anchor="ctr"/>
+          <a:lstStyle/>
+          <a:p>
+            <a:pPr indent="0" marL="0">
+              <a:buNone/>
+            </a:pPr>
+            <a:r>
+              <a:rPr lang="en-US" sz="1500" b="1" dirty="0">
+                <a:solidFill>
+                  <a:srgbClr val="FFFFFF"/>
+                </a:solidFill>
+                <a:latin typeface="Calibri" pitchFamily="34" charset="0"/>
+                <a:ea typeface="Calibri" pitchFamily="34" charset="-122"/>
+                <a:cs typeface="Calibri" pitchFamily="34" charset="-120"/>
+              </a:rPr>
+              <a:t>Judge parity by bootstrap statistics, not single-realization exact match</a:t>
+            </a:r>
+            <a:endParaRPr lang="en-US" sz="1500" dirty="0"/>
+          </a:p>
+        </p:txBody>
+      </p:sp>
+      <p:sp>
+        <p:nvSpPr>
+          <p:cNvPr id="19" name="Text 17"/>
+          <p:cNvSpPr txBox="1"/>
+          <p:nvPr/>
+        </p:nvSpPr>
+        <p:spPr>
+          <a:xfrm>
+            <a:off x="1143000" y="4745736"/>
+            <a:ext cx="10241280" cy="502920"/>
+          </a:xfrm>
+          <a:prstGeom prst="rect">
+            <a:avLst/>
+          </a:prstGeom>
+          <a:noFill/>
+          <a:ln/>
+        </p:spPr>
+        <p:txBody>
+          <a:bodyPr wrap="square" lIns="0" tIns="0" rIns="0" bIns="0" rtlCol="0" anchor="ctr"/>
+          <a:lstStyle/>
+          <a:p>
+            <a:pPr indent="0" marL="0">
+              <a:lnSpc>
+                <a:spcPct val="110000"/>
+              </a:lnSpc>
+              <a:buNone/>
+            </a:pPr>
+            <a:r>
+              <a:rPr lang="en-US" sz="1200" dirty="0">
+                <a:solidFill>
+                  <a:srgbClr val="AFC9E8"/>
+                </a:solidFill>
+                <a:latin typeface="Calibri" pitchFamily="34" charset="0"/>
+                <a:ea typeface="Calibri" pitchFamily="34" charset="-122"/>
+                <a:cs typeface="Calibri" pitchFamily="34" charset="-120"/>
+              </a:rPr>
+              <a:t>The pre-fix 15/20 batch result is now a historical baseline, not a current claim — a fresh batch run is the natural next validation step.</a:t>
+            </a:r>
+            <a:endParaRPr lang="en-US" sz="1200" dirty="0"/>
+          </a:p>
+        </p:txBody>
+      </p:sp>
+      <p:sp>
+        <p:nvSpPr>
+          <p:cNvPr id="20" name="Shape 18"/>
+          <p:cNvSpPr/>
+          <p:nvPr/>
+        </p:nvSpPr>
+        <p:spPr>
+          <a:xfrm>
+            <a:off x="548640" y="5376672"/>
+            <a:ext cx="384048" cy="384048"/>
+          </a:xfrm>
+          <a:prstGeom prst="roundRect">
+            <a:avLst>
+              <a:gd name="adj" fmla="val 50000"/>
+            </a:avLst>
+          </a:prstGeom>
+          <a:solidFill>
+            <a:srgbClr val="F2A93B"/>
+          </a:solidFill>
+          <a:ln/>
+        </p:spPr>
+        <p:txBody>
+          <a:bodyPr/>
+          <a:p/>
+        </p:txBody>
+      </p:sp>
+      <p:sp>
+        <p:nvSpPr>
+          <p:cNvPr id="21" name="Text 19"/>
+          <p:cNvSpPr txBox="1"/>
+          <p:nvPr/>
+        </p:nvSpPr>
+        <p:spPr>
+          <a:xfrm>
+            <a:off x="548640" y="5376672"/>
+            <a:ext cx="384048" cy="384048"/>
+          </a:xfrm>
+          <a:prstGeom prst="rect">
+            <a:avLst/>
+          </a:prstGeom>
+          <a:noFill/>
+          <a:ln/>
+        </p:spPr>
+        <p:txBody>
+          <a:bodyPr wrap="square" lIns="0" tIns="0" rIns="0" bIns="0" rtlCol="0" anchor="ctr"/>
+          <a:lstStyle/>
+          <a:p>
+            <a:pPr algn="ctr" indent="0" marL="0">
+              <a:buNone/>
+            </a:pPr>
+            <a:r>
+              <a:rPr lang="en-US" sz="1500" b="1" dirty="0">
+                <a:solidFill>
+                  <a:srgbClr val="071427"/>
+                </a:solidFill>
+                <a:latin typeface="Calibri" pitchFamily="34" charset="0"/>
+                <a:ea typeface="Calibri" pitchFamily="34" charset="-122"/>
+                <a:cs typeface="Calibri" pitchFamily="34" charset="-120"/>
+              </a:rPr>
+              <a:t>5</a:t>
+            </a:r>
+            <a:endParaRPr lang="en-US" sz="1500" dirty="0"/>
+          </a:p>
+        </p:txBody>
+      </p:sp>
+      <p:sp>
+        <p:nvSpPr>
+          <p:cNvPr id="22" name="Text 20"/>
+          <p:cNvSpPr txBox="1"/>
+          <p:nvPr/>
+        </p:nvSpPr>
+        <p:spPr>
+          <a:xfrm>
+            <a:off x="1143000" y="5330952"/>
+            <a:ext cx="10241280" cy="365760"/>
+          </a:xfrm>
+          <a:prstGeom prst="rect">
+            <a:avLst/>
+          </a:prstGeom>
+          <a:noFill/>
+          <a:ln/>
+        </p:spPr>
+        <p:txBody>
+          <a:bodyPr wrap="square" lIns="0" tIns="0" rIns="0" bIns="0" rtlCol="0" anchor="ctr"/>
+          <a:lstStyle/>
+          <a:p>
+            <a:pPr indent="0" marL="0">
+              <a:buNone/>
+            </a:pPr>
+            <a:r>
+              <a:rPr lang="en-US" sz="1500" b="1" dirty="0">
+                <a:solidFill>
+                  <a:srgbClr val="FFFFFF"/>
+                </a:solidFill>
+                <a:latin typeface="Calibri" pitchFamily="34" charset="0"/>
+                <a:ea typeface="Calibri" pitchFamily="34" charset="-122"/>
+                <a:cs typeface="Calibri" pitchFamily="34" charset="-120"/>
+              </a:rPr>
+              <a:t>JS carries a real, separate ~1.7× timing overhead</a:t>
+            </a:r>
+            <a:endParaRPr lang="en-US" sz="1500" dirty="0"/>
+          </a:p>
+        </p:txBody>
+      </p:sp>
+      <p:sp>
+        <p:nvSpPr>
+          <p:cNvPr id="23" name="Text 21"/>
+          <p:cNvSpPr txBox="1"/>
+          <p:nvPr/>
+        </p:nvSpPr>
+        <p:spPr>
+          <a:xfrm>
+            <a:off x="1143000" y="5678424"/>
+            <a:ext cx="10241280" cy="502920"/>
+          </a:xfrm>
+          <a:prstGeom prst="rect">
+            <a:avLst/>
+          </a:prstGeom>
+          <a:noFill/>
+          <a:ln/>
+        </p:spPr>
+        <p:txBody>
+          <a:bodyPr wrap="square" lIns="0" tIns="0" rIns="0" bIns="0" rtlCol="0" anchor="ctr"/>
+          <a:lstStyle/>
+          <a:p>
+            <a:pPr indent="0" marL="0">
+              <a:lnSpc>
+                <a:spcPct val="110000"/>
+              </a:lnSpc>
+              <a:buNone/>
+            </a:pPr>
+            <a:r>
+              <a:rPr lang="en-US" sz="1200" dirty="0">
+                <a:solidFill>
+                  <a:srgbClr val="AFC9E8"/>
+                </a:solidFill>
+                <a:latin typeface="Calibri" pitchFamily="34" charset="0"/>
+                <a:ea typeface="Calibri" pitchFamily="34" charset="-122"/>
+                <a:cs typeface="Calibri" pitchFamily="34" charset="-120"/>
+              </a:rPr>
+              <a:t>Present on accurate realizations too — an interpretation/dispatch cost, independent of the accuracy question.</a:t>
+            </a:r>
+            <a:endParaRPr lang="en-US" sz="1200" dirty="0"/>
+          </a:p>
+        </p:txBody>
+      </p:sp>
+      <p:sp>
+        <p:nvSpPr>
+          <p:cNvPr id="24" name="Text 22"/>
+          <p:cNvSpPr txBox="1"/>
+          <p:nvPr/>
+        </p:nvSpPr>
+        <p:spPr>
+          <a:xfrm>
+            <a:off x="11521440" y="6446520"/>
+            <a:ext cx="457200" cy="274320"/>
+          </a:xfrm>
+          <a:prstGeom prst="rect">
+            <a:avLst/>
+          </a:prstGeom>
+          <a:noFill/>
+          <a:ln/>
+        </p:spPr>
+        <p:txBody>
+          <a:bodyPr wrap="square" lIns="0" tIns="0" rIns="0" bIns="0" rtlCol="0" anchor="ctr"/>
+          <a:lstStyle/>
+          <a:p>
+            <a:pPr algn="r" indent="0" marL="0">
+              <a:buNone/>
+            </a:pPr>
+            <a:r>
+              <a:rPr lang="en-US" sz="1000" dirty="0">
+                <a:solidFill>
+                  <a:srgbClr val="4A5B72"/>
+                </a:solidFill>
+                <a:latin typeface="Calibri" pitchFamily="34" charset="0"/>
+                <a:ea typeface="Calibri" pitchFamily="34" charset="-122"/>
+                <a:cs typeface="Calibri" pitchFamily="34" charset="-120"/>
+              </a:rPr>
+              <a:t>21</a:t>
+            </a:r>
+            <a:endParaRPr lang="en-US" sz="1000" dirty="0"/>
+          </a:p>
+        </p:txBody>
+      </p:sp>
+    </p:spTree>
+  </p:cSld>
+  <p:clrMapOvr>
+    <a:masterClrMapping/>
+  </p:clrMapOvr>
+</p:sld>
+</file>
+
+<file path=ppt/slides/slide21.xml><?xml version="1.0" encoding="utf-8"?>
+<p:sld xmlns:a="http://schemas.openxmlformats.org/drawingml/2006/main" xmlns:r="http://schemas.openxmlformats.org/officeDocument/2006/relationships" xmlns:p="http://schemas.openxmlformats.org/presentationml/2006/main">
+  <p:cSld name="Slide 16">
+    <p:bg>
+      <p:bgPr>
+        <a:solidFill>
+          <a:srgbClr val="0B1E3F"/>
+        </a:solidFill>
+      </p:bgPr>
+    </p:bg>
+    <p:spTree>
+      <p:nvGrpSpPr>
+        <p:cNvPr id="1" name=""/>
+        <p:cNvGrpSpPr/>
+        <p:nvPr/>
+      </p:nvGrpSpPr>
+      <p:grpSpPr>
+        <a:xfrm>
+          <a:off x="0" y="0"/>
+          <a:ext cx="0" cy="0"/>
+          <a:chOff x="0" y="0"/>
+          <a:chExt cx="0" cy="0"/>
+        </a:xfrm>
+      </p:grpSpPr>
+      <p:sp>
+        <p:nvSpPr>
+          <p:cNvPr id="2" name="Text 0"/>
+          <p:cNvSpPr txBox="1"/>
+          <p:nvPr/>
+        </p:nvSpPr>
+        <p:spPr>
+          <a:xfrm>
+            <a:off x="822960" y="2468880"/>
+            <a:ext cx="10515600" cy="914400"/>
+          </a:xfrm>
+          <a:prstGeom prst="rect">
+            <a:avLst/>
+          </a:prstGeom>
+          <a:noFill/>
+          <a:ln/>
+        </p:spPr>
+        <p:txBody>
+          <a:bodyPr wrap="square" lIns="0" tIns="0" rIns="0" bIns="0" rtlCol="0" anchor="ctr"/>
+          <a:lstStyle/>
+          <a:p>
+            <a:pPr indent="0" marL="0">
+              <a:buNone/>
+            </a:pPr>
+            <a:r>
+              <a:rPr lang="en-US" sz="4000" b="1" dirty="0">
+                <a:solidFill>
+                  <a:srgbClr val="FFFFFF"/>
+                </a:solidFill>
+                <a:latin typeface="Cambria" pitchFamily="34" charset="0"/>
+                <a:ea typeface="Cambria" pitchFamily="34" charset="-122"/>
+                <a:cs typeface="Cambria" pitchFamily="34" charset="-120"/>
+              </a:rPr>
+              <a:t>The gap reopened. This time it was two real, fixable bugs.</a:t>
+            </a:r>
+            <a:endParaRPr lang="en-US" sz="4000" dirty="0"/>
+          </a:p>
+        </p:txBody>
+      </p:sp>
+      <p:sp>
+        <p:nvSpPr>
+          <p:cNvPr id="3" name="Text 1"/>
+          <p:cNvSpPr txBox="1"/>
+          <p:nvPr/>
+        </p:nvSpPr>
+        <p:spPr>
+          <a:xfrm>
+            <a:off x="822960" y="3246120"/>
+            <a:ext cx="10515600" cy="548640"/>
+          </a:xfrm>
+          <a:prstGeom prst="rect">
+            <a:avLst/>
+          </a:prstGeom>
+          <a:noFill/>
+          <a:ln/>
+        </p:spPr>
+        <p:txBody>
+          <a:bodyPr wrap="square" lIns="0" tIns="0" rIns="0" bIns="0" rtlCol="0" anchor="ctr"/>
+          <a:lstStyle/>
+          <a:p>
+            <a:pPr indent="0" marL="0">
+              <a:buNone/>
+            </a:pPr>
+            <a:r>
+              <a:rPr lang="en-US" sz="1800" dirty="0">
+                <a:solidFill>
+                  <a:srgbClr val="F2A93B"/>
+                </a:solidFill>
+                <a:latin typeface="Calibri" pitchFamily="34" charset="0"/>
+                <a:ea typeface="Calibri" pitchFamily="34" charset="-122"/>
+                <a:cs typeface="Calibri" pitchFamily="34" charset="-120"/>
+              </a:rPr>
+              <a:t>A transpose in the FFT, and a padded-size mismatch — both fixed on the JS side.</a:t>
+            </a:r>
+            <a:endParaRPr lang="en-US" sz="1800" dirty="0"/>
+          </a:p>
+        </p:txBody>
+      </p:sp>
+      <p:sp>
+        <p:nvSpPr>
+          <p:cNvPr id="4" name="Text 2"/>
+          <p:cNvSpPr txBox="1"/>
+          <p:nvPr/>
+        </p:nvSpPr>
+        <p:spPr>
+          <a:xfrm>
+            <a:off x="822960" y="6126480"/>
+            <a:ext cx="10515600" cy="365760"/>
+          </a:xfrm>
+          <a:prstGeom prst="rect">
+            <a:avLst/>
+          </a:prstGeom>
+          <a:noFill/>
+          <a:ln/>
+        </p:spPr>
+        <p:txBody>
+          <a:bodyPr wrap="square" lIns="0" tIns="0" rIns="0" bIns="0" rtlCol="0" anchor="ctr"/>
+          <a:lstStyle/>
+          <a:p>
+            <a:pPr indent="0" marL="0">
+              <a:buNone/>
+            </a:pPr>
+            <a:r>
+              <a:rPr lang="en-US" sz="1200" dirty="0">
+                <a:solidFill>
+                  <a:srgbClr val="AFC9E8"/>
+                </a:solidFill>
+                <a:latin typeface="Calibri" pitchFamily="34" charset="0"/>
+                <a:ea typeface="Calibri" pitchFamily="34" charset="-122"/>
+                <a:cs typeface="Calibri" pitchFamily="34" charset="-120"/>
+              </a:rPr>
+              <a:t>3KIDNAS · JS/Fortran bit-exactness investigation · 2026-09-29</a:t>
+            </a:r>
+            <a:endParaRPr lang="en-US" sz="1200" dirty="0"/>
+          </a:p>
+        </p:txBody>
+      </p:sp>
+    </p:spTree>
+  </p:cSld>
+  <p:clrMapOvr>
+    <a:masterClrMapping/>
+  </p:clrMapOvr>
+</p:sld>
+</file>
+
+<file path=ppt/slides/slide22.xml><?xml version="1.0" encoding="utf-8"?>
+<p:sld xmlns:a="http://schemas.openxmlformats.org/drawingml/2006/main" xmlns:p="http://schemas.openxmlformats.org/presentationml/2006/main" xmlns:r="http://schemas.openxmlformats.org/officeDocument/2006/relationships">
+  <p:cSld>
+    <p:spTree>
+      <p:nvGrpSpPr>
+        <p:cNvPr id="1" name=""/>
+        <p:cNvGrpSpPr/>
+        <p:nvPr/>
+      </p:nvGrpSpPr>
+      <p:grpSpPr/>
+      <p:sp>
+        <p:nvSpPr>
+          <p:cNvPr id="2" name="Text 0"/>
+          <p:cNvSpPr txBox="1"/>
+          <p:nvPr/>
+        </p:nvSpPr>
+        <p:spPr>
+          <a:xfrm>
+            <a:off x="548640" y="365760"/>
+            <a:ext cx="7315200" cy="320040"/>
+          </a:xfrm>
+          <a:prstGeom prst="rect">
+            <a:avLst/>
+          </a:prstGeom>
+          <a:noFill/>
+          <a:ln/>
+        </p:spPr>
+        <p:txBody>
+          <a:bodyPr wrap="square" lIns="0" tIns="0" rIns="0" bIns="0" rtlCol="0" anchor="ctr"/>
+          <a:lstStyle/>
+          <a:p>
+            <a:pPr indent="0" marL="0">
+              <a:buNone/>
+            </a:pPr>
+            <a:r>
+              <a:rPr lang="en-US" sz="1200" b="1" spc="200" kern="0" dirty="0">
+                <a:solidFill>
+                  <a:srgbClr val="F2A93B"/>
+                </a:solidFill>
+                <a:latin typeface="Calibri" pitchFamily="34" charset="0"/>
+                <a:ea typeface="Calibri" pitchFamily="34" charset="-122"/>
+                <a:cs typeface="Calibri" pitchFamily="34" charset="-120"/>
+              </a:rPr>
+              <a:t>END-TO-END, CONFIRMED</a:t>
+            </a:r>
+            <a:endParaRPr lang="en-US" sz="1200" dirty="0"/>
+          </a:p>
+        </p:txBody>
+      </p:sp>
+      <p:sp>
+        <p:nvSpPr>
+          <p:cNvPr id="3" name="Text 1"/>
+          <p:cNvSpPr txBox="1"/>
+          <p:nvPr/>
+        </p:nvSpPr>
+        <p:spPr>
+          <a:xfrm>
+            <a:off x="548640" y="685800"/>
+            <a:ext cx="11064240" cy="822960"/>
+          </a:xfrm>
+          <a:prstGeom prst="rect">
+            <a:avLst/>
+          </a:prstGeom>
+          <a:noFill/>
+          <a:ln/>
+        </p:spPr>
+        <p:txBody>
+          <a:bodyPr wrap="square" lIns="0" tIns="0" rIns="0" bIns="0" rtlCol="0" anchor="ctr"/>
+          <a:lstStyle/>
+          <a:p>
+            <a:pPr indent="0" marL="0">
+              <a:buNone/>
+            </a:pPr>
+            <a:r>
+              <a:rPr lang="en-US" sz="3000" b="1" dirty="0">
+                <a:solidFill>
+                  <a:srgbClr val="0B1E3F"/>
+                </a:solidFill>
+                <a:latin typeface="Cambria" pitchFamily="34" charset="0"/>
+                <a:ea typeface="Cambria" pitchFamily="34" charset="-122"/>
+                <a:cs typeface="Cambria" pitchFamily="34" charset="-120"/>
+              </a:rPr>
+              <a:t>10 real bootstraps, real native Fortran vs the fixed JS pipeline, same seed</a:t>
+            </a:r>
+            <a:endParaRPr lang="en-US" sz="3000" dirty="0"/>
+          </a:p>
+        </p:txBody>
+      </p:sp>
+      <p:sp>
+        <p:nvSpPr>
+          <p:cNvPr id="4" name="Text 2"/>
+          <p:cNvSpPr txBox="1"/>
+          <p:nvPr/>
+        </p:nvSpPr>
+        <p:spPr>
+          <a:xfrm>
+            <a:off x="548640" y="1600200"/>
+            <a:ext cx="11064240" cy="640080"/>
+          </a:xfrm>
+          <a:prstGeom prst="rect">
+            <a:avLst/>
+          </a:prstGeom>
+          <a:noFill/>
+          <a:ln/>
+        </p:spPr>
+        <p:txBody>
+          <a:bodyPr wrap="square" lIns="0" tIns="0" rIns="0" bIns="0" rtlCol="0" anchor="ctr"/>
+          <a:lstStyle/>
+          <a:p>
+            <a:pPr indent="0" marL="0">
+              <a:buNone/>
+            </a:pPr>
+            <a:r>
+              <a:rPr lang="en-US" sz="1400" dirty="0">
+                <a:solidFill>
+                  <a:srgbClr val="4A5B72"/>
+                </a:solidFill>
+                <a:latin typeface="Calibri" pitchFamily="34" charset="0"/>
+                <a:ea typeface="Calibri" pitchFamily="34" charset="-122"/>
+                <a:cs typeface="Calibri" pitchFamily="34" charset="-120"/>
+              </a:rPr>
+              <a:t>run_both.js, seed 42, cloudDensity=100, WALLABY_J100336-262923 -- the exact case this search chased. Both legs ran for real (native compiled Fortran binary vs the in-process JS pipeline, no mocking), same seed, same config, compared field by field across all 10 realizations.</a:t>
+            </a:r>
+            <a:endParaRPr lang="en-US" sz="1400" dirty="0"/>
+          </a:p>
+        </p:txBody>
+      </p:sp>
+      <p:sp>
+        <p:nvSpPr>
+          <p:cNvPr id="5" name="Shape 3"/>
+          <p:cNvSpPr/>
+          <p:nvPr/>
+        </p:nvSpPr>
+        <p:spPr>
+          <a:xfrm>
+            <a:off x="548640" y="2560320"/>
+            <a:ext cx="3383280" cy="2651760"/>
+          </a:xfrm>
+          <a:prstGeom prst="roundRect">
+            <a:avLst>
+              <a:gd name="adj" fmla="val 2759"/>
+            </a:avLst>
+          </a:prstGeom>
+          <a:solidFill>
+            <a:srgbClr val="EAF1FB"/>
+          </a:solidFill>
+          <a:ln/>
+          <a:effectLst>
+            <a:outerShdw sx="100000" sy="100000" kx="0" ky="0" algn="bl" rotWithShape="0" blurRad="76200" dist="25400" dir="5400000">
+              <a:srgbClr val="9AAEC7">
+                <a:alpha val="35000"/>
+              </a:srgbClr>
+            </a:outerShdw>
+          </a:effectLst>
+        </p:spPr>
+      </p:sp>
+      <p:sp>
+        <p:nvSpPr>
+          <p:cNvPr id="6" name="Text 4"/>
+          <p:cNvSpPr txBox="1"/>
+          <p:nvPr/>
+        </p:nvSpPr>
+        <p:spPr>
+          <a:xfrm>
+            <a:off x="777240" y="2880360"/>
+            <a:ext cx="2926080" cy="822960"/>
+          </a:xfrm>
+          <a:prstGeom prst="rect">
+            <a:avLst/>
+          </a:prstGeom>
+          <a:noFill/>
+          <a:ln/>
+        </p:spPr>
+        <p:txBody>
+          <a:bodyPr wrap="square" lIns="0" tIns="0" rIns="0" bIns="0" rtlCol="0" anchor="ctr"/>
+          <a:lstStyle/>
+          <a:p>
+            <a:pPr indent="0" marL="0">
+              <a:buNone/>
+            </a:pPr>
+            <a:r>
+              <a:rPr lang="en-US" sz="4000" b="1" dirty="0">
+                <a:solidFill>
+                  <a:srgbClr val="F2A93B"/>
+                </a:solidFill>
+                <a:latin typeface="Cambria" pitchFamily="34" charset="0"/>
+                <a:ea typeface="Cambria" pitchFamily="34" charset="-122"/>
+                <a:cs typeface="Cambria" pitchFamily="34" charset="-120"/>
+              </a:rPr>
+              <a:t>10 / 10</a:t>
+            </a:r>
+            <a:endParaRPr lang="en-US" sz="4000" dirty="0"/>
+          </a:p>
+        </p:txBody>
+      </p:sp>
+      <p:sp>
+        <p:nvSpPr>
+          <p:cNvPr id="7" name="Text 5"/>
+          <p:cNvSpPr txBox="1"/>
+          <p:nvPr/>
+        </p:nvSpPr>
+        <p:spPr>
+          <a:xfrm>
+            <a:off x="777240" y="3794760"/>
+            <a:ext cx="2926080" cy="1188720"/>
+          </a:xfrm>
+          <a:prstGeom prst="rect">
+            <a:avLst/>
+          </a:prstGeom>
+          <a:noFill/>
+          <a:ln/>
+        </p:spPr>
+        <p:txBody>
+          <a:bodyPr wrap="square" lIns="0" tIns="0" rIns="0" bIns="0" rtlCol="0" anchor="ctr"/>
+          <a:lstStyle/>
+          <a:p>
+            <a:pPr indent="0" marL="0">
+              <a:lnSpc>
+                <a:spcPct val="115000"/>
+              </a:lnSpc>
+              <a:buNone/>
+            </a:pPr>
+            <a:r>
+              <a:rPr lang="en-US" sz="1300" dirty="0">
+                <a:solidFill>
+                  <a:srgbClr val="4A5B72"/>
+                </a:solidFill>
+                <a:latin typeface="Calibri" pitchFamily="34" charset="0"/>
+                <a:ea typeface="Calibri" pitchFamily="34" charset="-122"/>
+                <a:cs typeface="Calibri" pitchFamily="34" charset="-120"/>
+              </a:rPr>
+              <a:t>Bootstrap realizations</a:t>
+            </a:r>
+            <a:endParaRPr lang="en-US" sz="1300" dirty="0"/>
+          </a:p>
+          <a:p>
+            <a:pPr indent="0" marL="0">
+              <a:lnSpc>
+                <a:spcPct val="115000"/>
+              </a:lnSpc>
+              <a:buNone/>
+            </a:pPr>
+            <a:r>
+              <a:rPr lang="en-US" sz="1300" dirty="0">
+                <a:solidFill>
+                  <a:srgbClr val="4A5B72"/>
+                </a:solidFill>
+                <a:latin typeface="Calibri" pitchFamily="34" charset="0"/>
+                <a:ea typeface="Calibri" pitchFamily="34" charset="-122"/>
+                <a:cs typeface="Calibri" pitchFamily="34" charset="-120"/>
+              </a:rPr>
+              <a:t>succeeded on both sides,</a:t>
+            </a:r>
+            <a:endParaRPr lang="en-US" sz="1300" dirty="0"/>
+          </a:p>
+          <a:p>
+            <a:pPr indent="0" marL="0">
+              <a:lnSpc>
+                <a:spcPct val="115000"/>
+              </a:lnSpc>
+              <a:buNone/>
+            </a:pPr>
+            <a:r>
+              <a:rPr lang="en-US" sz="1300" dirty="0">
+                <a:solidFill>
+                  <a:srgbClr val="4A5B72"/>
+                </a:solidFill>
+                <a:latin typeface="Calibri" pitchFamily="34" charset="0"/>
+                <a:ea typeface="Calibri" pitchFamily="34" charset="-122"/>
+                <a:cs typeface="Calibri" pitchFamily="34" charset="-120"/>
+              </a:rPr>
+              <a:t>same seed</a:t>
+            </a:r>
+            <a:endParaRPr lang="en-US" sz="1300" dirty="0"/>
+          </a:p>
+        </p:txBody>
+      </p:sp>
+      <p:sp>
+        <p:nvSpPr>
+          <p:cNvPr id="8" name="Shape 6"/>
+          <p:cNvSpPr/>
+          <p:nvPr/>
+        </p:nvSpPr>
+        <p:spPr>
+          <a:xfrm>
+            <a:off x="4251960" y="2560320"/>
+            <a:ext cx="3383280" cy="2651760"/>
+          </a:xfrm>
+          <a:prstGeom prst="roundRect">
+            <a:avLst>
+              <a:gd name="adj" fmla="val 2759"/>
+            </a:avLst>
+          </a:prstGeom>
+          <a:solidFill>
+            <a:srgbClr val="EAF1FB"/>
+          </a:solidFill>
+          <a:ln/>
+          <a:effectLst>
+            <a:outerShdw sx="100000" sy="100000" kx="0" ky="0" algn="bl" rotWithShape="0" blurRad="76200" dist="25400" dir="5400000">
+              <a:srgbClr val="9AAEC7">
+                <a:alpha val="35000"/>
+              </a:srgbClr>
+            </a:outerShdw>
+          </a:effectLst>
+        </p:spPr>
+      </p:sp>
+      <p:sp>
+        <p:nvSpPr>
+          <p:cNvPr id="9" name="Text 7"/>
+          <p:cNvSpPr txBox="1"/>
+          <p:nvPr/>
+        </p:nvSpPr>
+        <p:spPr>
+          <a:xfrm>
+            <a:off x="4480560" y="2880360"/>
+            <a:ext cx="2926080" cy="822960"/>
+          </a:xfrm>
+          <a:prstGeom prst="rect">
+            <a:avLst/>
+          </a:prstGeom>
+          <a:noFill/>
+          <a:ln/>
+        </p:spPr>
+        <p:txBody>
+          <a:bodyPr wrap="square" lIns="0" tIns="0" rIns="0" bIns="0" rtlCol="0" anchor="ctr"/>
+          <a:lstStyle/>
+          <a:p>
+            <a:pPr indent="0" marL="0">
+              <a:buNone/>
+            </a:pPr>
+            <a:r>
+              <a:rPr lang="en-US" sz="4000" b="1" dirty="0">
+                <a:solidFill>
+                  <a:srgbClr val="1C9C8B"/>
+                </a:solidFill>
+                <a:latin typeface="Cambria" pitchFamily="34" charset="0"/>
+                <a:ea typeface="Cambria" pitchFamily="34" charset="-122"/>
+                <a:cs typeface="Cambria" pitchFamily="34" charset="-120"/>
+              </a:rPr>
+              <a:t>6 / 10</a:t>
+            </a:r>
+            <a:endParaRPr lang="en-US" sz="4000" dirty="0"/>
+          </a:p>
+        </p:txBody>
+      </p:sp>
+      <p:sp>
+        <p:nvSpPr>
+          <p:cNvPr id="10" name="Text 8"/>
+          <p:cNvSpPr txBox="1"/>
+          <p:nvPr/>
+        </p:nvSpPr>
+        <p:spPr>
+          <a:xfrm>
+            <a:off x="4480560" y="3794760"/>
+            <a:ext cx="2926080" cy="1188720"/>
+          </a:xfrm>
+          <a:prstGeom prst="rect">
+            <a:avLst/>
+          </a:prstGeom>
+          <a:noFill/>
+          <a:ln/>
+        </p:spPr>
+        <p:txBody>
+          <a:bodyPr wrap="square" lIns="0" tIns="0" rIns="0" bIns="0" rtlCol="0" anchor="ctr"/>
+          <a:lstStyle/>
+          <a:p>
+            <a:pPr indent="0" marL="0">
+              <a:lnSpc>
+                <a:spcPct val="115000"/>
+              </a:lnSpc>
+              <a:buNone/>
+            </a:pPr>
+            <a:r>
+              <a:rPr lang="en-US" sz="1300" dirty="0">
+                <a:solidFill>
+                  <a:srgbClr val="4A5B72"/>
+                </a:solidFill>
+                <a:latin typeface="Calibri" pitchFamily="34" charset="0"/>
+                <a:ea typeface="Calibri" pitchFamily="34" charset="-122"/>
+                <a:cs typeface="Calibri" pitchFamily="34" charset="-120"/>
+              </a:rPr>
+              <a:t>Fitted fields exactly</a:t>
+            </a:r>
+            <a:endParaRPr lang="en-US" sz="1300" dirty="0"/>
+          </a:p>
+          <a:p>
+            <a:pPr indent="0" marL="0">
+              <a:lnSpc>
+                <a:spcPct val="115000"/>
+              </a:lnSpc>
+              <a:buNone/>
+            </a:pPr>
+            <a:r>
+              <a:rPr lang="en-US" sz="1300" dirty="0">
+                <a:solidFill>
+                  <a:srgbClr val="4A5B72"/>
+                </a:solidFill>
+                <a:latin typeface="Calibri" pitchFamily="34" charset="0"/>
+                <a:ea typeface="Calibri" pitchFamily="34" charset="-122"/>
+                <a:cs typeface="Calibri" pitchFamily="34" charset="-120"/>
+              </a:rPr>
+              <a:t>0.000000 diff -- identical</a:t>
+            </a:r>
+            <a:endParaRPr lang="en-US" sz="1300" dirty="0"/>
+          </a:p>
+          <a:p>
+            <a:pPr indent="0" marL="0">
+              <a:lnSpc>
+                <a:spcPct val="115000"/>
+              </a:lnSpc>
+              <a:buNone/>
+            </a:pPr>
+            <a:r>
+              <a:rPr lang="en-US" sz="1300" dirty="0">
+                <a:solidFill>
+                  <a:srgbClr val="4A5B72"/>
+                </a:solidFill>
+                <a:latin typeface="Calibri" pitchFamily="34" charset="0"/>
+                <a:ea typeface="Calibri" pitchFamily="34" charset="-122"/>
+                <a:cs typeface="Calibri" pitchFamily="34" charset="-120"/>
+              </a:rPr>
+              <a:t>strings, full float32 precision</a:t>
+            </a:r>
+            <a:endParaRPr lang="en-US" sz="1300" dirty="0"/>
+          </a:p>
+        </p:txBody>
+      </p:sp>
+      <p:sp>
+        <p:nvSpPr>
+          <p:cNvPr id="11" name="Shape 9"/>
+          <p:cNvSpPr/>
+          <p:nvPr/>
+        </p:nvSpPr>
+        <p:spPr>
+          <a:xfrm>
+            <a:off x="7955280" y="2560320"/>
+            <a:ext cx="3383280" cy="2651760"/>
+          </a:xfrm>
+          <a:prstGeom prst="roundRect">
+            <a:avLst>
+              <a:gd name="adj" fmla="val 2759"/>
+            </a:avLst>
+          </a:prstGeom>
+          <a:solidFill>
+            <a:srgbClr val="EAF1FB"/>
+          </a:solidFill>
+          <a:ln/>
+          <a:effectLst>
+            <a:outerShdw sx="100000" sy="100000" kx="0" ky="0" algn="bl" rotWithShape="0" blurRad="76200" dist="25400" dir="5400000">
+              <a:srgbClr val="9AAEC7">
+                <a:alpha val="35000"/>
+              </a:srgbClr>
+            </a:outerShdw>
+          </a:effectLst>
+        </p:spPr>
+      </p:sp>
+      <p:sp>
+        <p:nvSpPr>
+          <p:cNvPr id="12" name="Text 10"/>
+          <p:cNvSpPr txBox="1"/>
+          <p:nvPr/>
+        </p:nvSpPr>
+        <p:spPr>
+          <a:xfrm>
+            <a:off x="8183880" y="2880360"/>
+            <a:ext cx="2926080" cy="822960"/>
+          </a:xfrm>
+          <a:prstGeom prst="rect">
+            <a:avLst/>
+          </a:prstGeom>
+          <a:noFill/>
+          <a:ln/>
+        </p:spPr>
+        <p:txBody>
+          <a:bodyPr wrap="square" lIns="0" tIns="0" rIns="0" bIns="0" rtlCol="0" anchor="ctr"/>
+          <a:lstStyle/>
+          <a:p>
+            <a:pPr indent="0" marL="0">
+              <a:buNone/>
+            </a:pPr>
+            <a:r>
+              <a:rPr lang="en-US" sz="4000" b="1" dirty="0">
+                <a:solidFill>
+                  <a:srgbClr val="0B1E3F"/>
+                </a:solidFill>
+                <a:latin typeface="Cambria" pitchFamily="34" charset="0"/>
+                <a:ea typeface="Cambria" pitchFamily="34" charset="-122"/>
+                <a:cs typeface="Cambria" pitchFamily="34" charset="-120"/>
+              </a:rPr>
+              <a:t>0.00%</a:t>
+            </a:r>
+            <a:endParaRPr lang="en-US" sz="4000" dirty="0"/>
+          </a:p>
+        </p:txBody>
+      </p:sp>
+      <p:sp>
+        <p:nvSpPr>
+          <p:cNvPr id="13" name="Text 11"/>
+          <p:cNvSpPr txBox="1"/>
+          <p:nvPr/>
+        </p:nvSpPr>
+        <p:spPr>
+          <a:xfrm>
+            <a:off x="8183880" y="3794760"/>
+            <a:ext cx="2926080" cy="1188720"/>
+          </a:xfrm>
+          <a:prstGeom prst="rect">
+            <a:avLst/>
+          </a:prstGeom>
+          <a:noFill/>
+          <a:ln/>
+        </p:spPr>
+        <p:txBody>
+          <a:bodyPr wrap="square" lIns="0" tIns="0" rIns="0" bIns="0" rtlCol="0" anchor="ctr"/>
+          <a:lstStyle/>
+          <a:p>
+            <a:pPr indent="0" marL="0">
+              <a:lnSpc>
+                <a:spcPct val="115000"/>
+              </a:lnSpc>
+              <a:buNone/>
+            </a:pPr>
+            <a:r>
+              <a:rPr lang="en-US" sz="1300" dirty="0">
+                <a:solidFill>
+                  <a:srgbClr val="4A5B72"/>
+                </a:solidFill>
+                <a:latin typeface="Calibri" pitchFamily="34" charset="0"/>
+                <a:ea typeface="Calibri" pitchFamily="34" charset="-122"/>
+                <a:cs typeface="Calibri" pitchFamily="34" charset="-120"/>
+              </a:rPr>
+              <a:t>Max relative difference</a:t>
+            </a:r>
+            <a:endParaRPr lang="en-US" sz="1300" dirty="0"/>
+          </a:p>
+          <a:p>
+            <a:pPr indent="0" marL="0">
+              <a:lnSpc>
+                <a:spcPct val="115000"/>
+              </a:lnSpc>
+              <a:buNone/>
+            </a:pPr>
+            <a:r>
+              <a:rPr lang="en-US" sz="1300" dirty="0">
+                <a:solidFill>
+                  <a:srgbClr val="4A5B72"/>
+                </a:solidFill>
+                <a:latin typeface="Calibri" pitchFamily="34" charset="0"/>
+                <a:ea typeface="Calibri" pitchFamily="34" charset="-122"/>
+                <a:cs typeface="Calibri" pitchFamily="34" charset="-120"/>
+              </a:rPr>
+              <a:t>on every remaining field</a:t>
+            </a:r>
+            <a:endParaRPr lang="en-US" sz="1300" dirty="0"/>
+          </a:p>
+          <a:p>
+            <a:pPr indent="0" marL="0">
+              <a:lnSpc>
+                <a:spcPct val="115000"/>
+              </a:lnSpc>
+              <a:buNone/>
+            </a:pPr>
+            <a:r>
+              <a:rPr lang="en-US" sz="1300" dirty="0">
+                <a:solidFill>
+                  <a:srgbClr val="4A5B72"/>
+                </a:solidFill>
+                <a:latin typeface="Calibri" pitchFamily="34" charset="0"/>
+                <a:ea typeface="Calibri" pitchFamily="34" charset="-122"/>
+                <a:cs typeface="Calibri" pitchFamily="34" charset="-120"/>
+              </a:rPr>
+              <a:t>(was 58.49% exact pre-fix)</a:t>
+            </a:r>
+            <a:endParaRPr lang="en-US" sz="1300" dirty="0"/>
+          </a:p>
+        </p:txBody>
+      </p:sp>
+      <p:sp>
+        <p:nvSpPr>
+          <p:cNvPr id="14" name="Text 12"/>
+          <p:cNvSpPr txBox="1"/>
+          <p:nvPr/>
+        </p:nvSpPr>
+        <p:spPr>
+          <a:xfrm>
+            <a:off x="11521440" y="6446520"/>
+            <a:ext cx="457200" cy="274320"/>
+          </a:xfrm>
+          <a:prstGeom prst="rect">
+            <a:avLst/>
+          </a:prstGeom>
+          <a:noFill/>
+          <a:ln/>
+        </p:spPr>
+        <p:txBody>
+          <a:bodyPr wrap="square" lIns="0" tIns="0" rIns="0" bIns="0" rtlCol="0" anchor="ctr"/>
+          <a:lstStyle/>
+          <a:p>
+            <a:pPr algn="r" indent="0" marL="0">
+              <a:buNone/>
+            </a:pPr>
+            <a:r>
+              <a:rPr lang="en-US" sz="1000" dirty="0">
+                <a:solidFill>
+                  <a:srgbClr val="4A5B72"/>
+                </a:solidFill>
+                <a:latin typeface="Calibri" pitchFamily="34" charset="0"/>
+                <a:ea typeface="Calibri" pitchFamily="34" charset="-122"/>
+                <a:cs typeface="Calibri" pitchFamily="34" charset="-120"/>
+              </a:rPr>
+              <a:t>16</a:t>
+            </a:r>
+            <a:endParaRPr lang="en-US" sz="1000" dirty="0"/>
+          </a:p>
+        </p:txBody>
+      </p:sp>
+    </p:spTree>
+  </p:cSld>
+  <p:clrMapOvr>
+    <a:masterClrMapping/>
+  </p:clrMapOvr>
+</p:sld>
+</file>
+
 <file path=ppt/slides/slide3.xml><?xml version="1.0" encoding="utf-8"?>
 <p:sld xmlns:a="http://schemas.openxmlformats.org/drawingml/2006/main" xmlns:r="http://schemas.openxmlformats.org/officeDocument/2006/relationships" xmlns:p="http://schemas.openxmlformats.org/presentationml/2006/main">
   <p:cSld name="Slide 3">
@@ -13324,29 +17502,15 @@
 </file>
 
 <file path=ppt/slides/slide9.xml><?xml version="1.0" encoding="utf-8"?>
-<p:sld xmlns:a="http://schemas.openxmlformats.org/drawingml/2006/main" xmlns:r="http://schemas.openxmlformats.org/officeDocument/2006/relationships" xmlns:p="http://schemas.openxmlformats.org/presentationml/2006/main">
-  <p:cSld name="Slide 9">
-    <p:bg>
-      <p:bgPr>
-        <a:solidFill>
-          <a:srgbClr val="FFFFFF"/>
-        </a:solidFill>
-      </p:bgPr>
-    </p:bg>
+<p:sld xmlns:a="http://schemas.openxmlformats.org/drawingml/2006/main" xmlns:p="http://schemas.openxmlformats.org/presentationml/2006/main" xmlns:r="http://schemas.openxmlformats.org/officeDocument/2006/relationships">
+  <p:cSld>
     <p:spTree>
       <p:nvGrpSpPr>
         <p:cNvPr id="1" name=""/>
         <p:cNvGrpSpPr/>
         <p:nvPr/>
       </p:nvGrpSpPr>
-      <p:grpSpPr>
-        <a:xfrm>
-          <a:off x="0" y="0"/>
-          <a:ext cx="0" cy="0"/>
-          <a:chOff x="0" y="0"/>
-          <a:chExt cx="0" cy="0"/>
-        </a:xfrm>
-      </p:grpSpPr>
+      <p:grpSpPr/>
       <p:sp>
         <p:nvSpPr>
           <p:cNvPr id="2" name="Text 0"/>
@@ -13380,7 +17544,7 @@
                 <a:ea typeface="Calibri" pitchFamily="34" charset="-122"/>
                 <a:cs typeface="Calibri" pitchFamily="34" charset="-120"/>
               </a:rPr>
-              <a:t>THE PROOF</a:t>
+              <a:t>SIX MORE BUGS</a:t>
             </a:r>
             <a:endParaRPr lang="en-US" sz="1200" dirty="0"/>
           </a:p>
@@ -13395,167 +17559,287 @@
         <p:spPr>
           <a:xfrm>
             <a:off x="548640" y="685800"/>
-            <a:ext cx="11064240" cy="822960"/>
-          </a:xfrm>
-          <a:prstGeom prst="rect">
-            <a:avLst/>
-          </a:prstGeom>
-          <a:noFill/>
-          <a:ln/>
-        </p:spPr>
-        <p:txBody>
-          <a:bodyPr wrap="square" lIns="0" tIns="0" rIns="0" bIns="0" rtlCol="0" anchor="ctr"/>
-          <a:lstStyle/>
-          <a:p>
-            <a:pPr indent="0" marL="0">
-              <a:buNone/>
-            </a:pPr>
-            <a:r>
-              <a:rPr lang="en-US" sz="3000" b="1" dirty="0">
-                <a:solidFill>
-                  <a:srgbClr val="0B1E3F"/>
+            <a:ext cx="11064240" cy="640080"/>
+          </a:xfrm>
+          <a:prstGeom prst="rect">
+            <a:avLst/>
+          </a:prstGeom>
+          <a:noFill/>
+          <a:ln/>
+        </p:spPr>
+        <p:txBody>
+          <a:bodyPr wrap="square" lIns="0" tIns="0" rIns="0" bIns="0" rtlCol="0" anchor="ctr"/>
+          <a:lstStyle/>
+          <a:p>
+            <a:pPr indent="0" marL="0">
+              <a:buNone/>
+            </a:pPr>
+            <a:r>
+              <a:rPr lang="en-US" sz="2800" b="1" dirty="0">
+                <a:solidFill>
+                  <a:srgbClr val="FFFFFF"/>
                 </a:solidFill>
                 <a:latin typeface="Cambria" pitchFamily="34" charset="0"/>
                 <a:ea typeface="Cambria" pitchFamily="34" charset="-122"/>
                 <a:cs typeface="Cambria" pitchFamily="34" charset="-120"/>
               </a:rPr>
-              <a:t>Force identical inputs, get identical outputs</a:t>
-            </a:r>
-            <a:endParaRPr lang="en-US" sz="3000" dirty="0"/>
-          </a:p>
-        </p:txBody>
-      </p:sp>
-      <p:sp>
-        <p:nvSpPr>
-          <p:cNvPr id="4" name="Text 2"/>
-          <p:cNvSpPr txBox="1"/>
-          <p:nvPr/>
-        </p:nvSpPr>
-        <p:spPr>
-          <a:xfrm>
-            <a:off x="548640" y="1783080"/>
-            <a:ext cx="10881360" cy="457200"/>
-          </a:xfrm>
-          <a:prstGeom prst="rect">
-            <a:avLst/>
-          </a:prstGeom>
-          <a:noFill/>
-          <a:ln/>
-        </p:spPr>
-        <p:txBody>
-          <a:bodyPr wrap="square" lIns="0" tIns="0" rIns="0" bIns="0" rtlCol="0" anchor="ctr"/>
-          <a:lstStyle/>
-          <a:p>
-            <a:pPr indent="0" marL="0">
-              <a:buNone/>
-            </a:pPr>
-            <a:r>
-              <a:rPr lang="en-US" sz="1300" dirty="0">
-                <a:solidFill>
-                  <a:srgbClr val="4A5B72"/>
-                </a:solidFill>
-                <a:latin typeface="Calibri" pitchFamily="34" charset="0"/>
-                <a:ea typeface="Calibri" pitchFamily="34" charset="-122"/>
-                <a:cs typeface="Calibri" pitchFamily="34" charset="-120"/>
-              </a:rPr>
-              <a:t>This session went further: no forcing at all. Fortran and JS were run completely independently, from their own natural starting points, using only the shared seed (42).</a:t>
-            </a:r>
-            <a:endParaRPr lang="en-US" sz="1300" dirty="0"/>
-          </a:p>
-        </p:txBody>
-      </p:sp>
-      <p:sp>
-        <p:nvSpPr>
-          <p:cNvPr id="5" name="Text 3"/>
-          <p:cNvSpPr txBox="1"/>
-          <p:nvPr/>
-        </p:nvSpPr>
-        <p:spPr>
-          <a:xfrm>
-            <a:off x="548640" y="2286000"/>
-            <a:ext cx="3657600" cy="274320"/>
-          </a:xfrm>
-          <a:prstGeom prst="rect">
-            <a:avLst/>
-          </a:prstGeom>
-          <a:noFill/>
-          <a:ln/>
-        </p:spPr>
-        <p:txBody>
-          <a:bodyPr wrap="square" lIns="0" tIns="0" rIns="0" bIns="0" rtlCol="0" anchor="ctr"/>
-          <a:lstStyle/>
-          <a:p>
-            <a:pPr indent="0" marL="0">
-              <a:buNone/>
-            </a:pPr>
-            <a:r>
-              <a:rPr lang="en-US" sz="1100" b="1" dirty="0">
-                <a:solidFill>
-                  <a:srgbClr val="C0392B"/>
-                </a:solidFill>
-                <a:latin typeface="Calibri" pitchFamily="34" charset="0"/>
-                <a:ea typeface="Calibri" pitchFamily="34" charset="-122"/>
-                <a:cs typeface="Calibri" pitchFamily="34" charset="-120"/>
-              </a:rPr>
-              <a:t>FULLY NATURAL RUN</a:t>
-            </a:r>
-            <a:endParaRPr lang="en-US" sz="1100" dirty="0"/>
-          </a:p>
-        </p:txBody>
-      </p:sp>
-      <p:sp>
-        <p:nvSpPr>
-          <p:cNvPr id="6" name="Shape 4"/>
+              <a:t>Found chasing a harder test case (cloudDensity=100) after the first seven</a:t>
+            </a:r>
+            <a:endParaRPr lang="en-US" sz="2800" dirty="0"/>
+          </a:p>
+        </p:txBody>
+      </p:sp>
+      <p:sp>
+        <p:nvSpPr>
+          <p:cNvPr id="4" name="Shape 2"/>
           <p:cNvSpPr/>
           <p:nvPr/>
         </p:nvSpPr>
         <p:spPr>
           <a:xfrm>
-            <a:off x="548640" y="2606040"/>
-            <a:ext cx="10881360" cy="502920"/>
+            <a:off x="548640" y="1645920"/>
+            <a:ext cx="384048" cy="384048"/>
           </a:xfrm>
           <a:prstGeom prst="roundRect">
             <a:avLst>
-              <a:gd name="adj" fmla="val 10909"/>
+              <a:gd name="adj" fmla="val 50000"/>
             </a:avLst>
           </a:prstGeom>
           <a:solidFill>
-            <a:srgbClr val="F3D9CC"/>
+            <a:srgbClr val="F2A93B"/>
           </a:solidFill>
           <a:ln/>
         </p:spPr>
       </p:sp>
       <p:sp>
         <p:nvSpPr>
-          <p:cNvPr id="7" name="Shape 5"/>
+          <p:cNvPr id="5" name="Text 3"/>
+          <p:cNvSpPr txBox="1"/>
+          <p:nvPr/>
+        </p:nvSpPr>
+        <p:spPr>
+          <a:xfrm>
+            <a:off x="548640" y="1645920"/>
+            <a:ext cx="384048" cy="384048"/>
+          </a:xfrm>
+          <a:prstGeom prst="rect">
+            <a:avLst/>
+          </a:prstGeom>
+          <a:noFill/>
+          <a:ln/>
+        </p:spPr>
+        <p:txBody>
+          <a:bodyPr wrap="square" lIns="0" tIns="0" rIns="0" bIns="0" rtlCol="0" anchor="ctr"/>
+          <a:lstStyle/>
+          <a:p>
+            <a:pPr algn="ctr" indent="0" marL="0">
+              <a:buNone/>
+            </a:pPr>
+            <a:r>
+              <a:rPr lang="en-US" sz="1500" b="1" dirty="0">
+                <a:solidFill>
+                  <a:srgbClr val="071427"/>
+                </a:solidFill>
+                <a:latin typeface="Calibri" pitchFamily="34" charset="0"/>
+                <a:ea typeface="Calibri" pitchFamily="34" charset="-122"/>
+                <a:cs typeface="Calibri" pitchFamily="34" charset="-120"/>
+              </a:rPr>
+              <a:t>1</a:t>
+            </a:r>
+            <a:endParaRPr lang="en-US" sz="1500" dirty="0"/>
+          </a:p>
+        </p:txBody>
+      </p:sp>
+      <p:sp>
+        <p:nvSpPr>
+          <p:cNvPr id="6" name="Text 4"/>
+          <p:cNvSpPr txBox="1"/>
+          <p:nvPr/>
+        </p:nvSpPr>
+        <p:spPr>
+          <a:xfrm>
+            <a:off x="1143000" y="1600200"/>
+            <a:ext cx="10241280" cy="365760"/>
+          </a:xfrm>
+          <a:prstGeom prst="rect">
+            <a:avLst/>
+          </a:prstGeom>
+          <a:noFill/>
+          <a:ln/>
+        </p:spPr>
+        <p:txBody>
+          <a:bodyPr wrap="square" lIns="0" tIns="0" rIns="0" bIns="0" rtlCol="0" anchor="ctr"/>
+          <a:lstStyle/>
+          <a:p>
+            <a:pPr indent="0" marL="0">
+              <a:buNone/>
+            </a:pPr>
+            <a:r>
+              <a:rPr lang="en-US" sz="1500" b="1" dirty="0">
+                <a:solidFill>
+                  <a:srgbClr val="FFFFFF"/>
+                </a:solidFill>
+                <a:latin typeface="Calibri" pitchFamily="34" charset="0"/>
+                <a:ea typeface="Calibri" pitchFamily="34" charset="-122"/>
+                <a:cs typeface="Calibri" pitchFamily="34" charset="-120"/>
+              </a:rPr>
+              <a:t>RAD2DEG double-rounding</a:t>
+            </a:r>
+            <a:endParaRPr lang="en-US" sz="1500" dirty="0"/>
+          </a:p>
+        </p:txBody>
+      </p:sp>
+      <p:sp>
+        <p:nvSpPr>
+          <p:cNvPr id="7" name="Text 5"/>
+          <p:cNvSpPr txBox="1"/>
+          <p:nvPr/>
+        </p:nvSpPr>
+        <p:spPr>
+          <a:xfrm>
+            <a:off x="1143000" y="1947672"/>
+            <a:ext cx="10241280" cy="502920"/>
+          </a:xfrm>
+          <a:prstGeom prst="rect">
+            <a:avLst/>
+          </a:prstGeom>
+          <a:noFill/>
+          <a:ln/>
+        </p:spPr>
+        <p:txBody>
+          <a:bodyPr wrap="square" lIns="0" tIns="0" rIns="0" bIns="0" rtlCol="0" anchor="ctr"/>
+          <a:lstStyle/>
+          <a:p>
+            <a:pPr indent="0" marL="0">
+              <a:lnSpc>
+                <a:spcPct val="110000"/>
+              </a:lnSpc>
+              <a:buNone/>
+            </a:pPr>
+            <a:r>
+              <a:rPr lang="en-US" sz="1200" dirty="0">
+                <a:solidFill>
+                  <a:srgbClr val="AFC9E8"/>
+                </a:solidFill>
+                <a:latin typeface="Calibri" pitchFamily="34" charset="0"/>
+                <a:ea typeface="Calibri" pitchFamily="34" charset="-122"/>
+                <a:cs typeface="Calibri" pitchFamily="34" charset="-120"/>
+              </a:rPr>
+              <a:t>Beam position angle converted degrees→radians→degrees through two separate f32 rounding steps instead of one; fixed to match Fortran’s single conversion exactly.</a:t>
+            </a:r>
+            <a:endParaRPr lang="en-US" sz="1200" dirty="0"/>
+          </a:p>
+        </p:txBody>
+      </p:sp>
+      <p:sp>
+        <p:nvSpPr>
+          <p:cNvPr id="8" name="Shape 6"/>
           <p:cNvSpPr/>
           <p:nvPr/>
         </p:nvSpPr>
         <p:spPr>
           <a:xfrm>
-            <a:off x="548640" y="2606040"/>
-            <a:ext cx="320040" cy="502920"/>
+            <a:off x="548640" y="2578608"/>
+            <a:ext cx="384048" cy="384048"/>
           </a:xfrm>
           <a:prstGeom prst="roundRect">
             <a:avLst>
-              <a:gd name="adj" fmla="val 17143"/>
+              <a:gd name="adj" fmla="val 50000"/>
             </a:avLst>
           </a:prstGeom>
           <a:solidFill>
-            <a:srgbClr val="2E8B57"/>
+            <a:srgbClr val="F2A93B"/>
           </a:solidFill>
           <a:ln/>
         </p:spPr>
       </p:sp>
       <p:sp>
         <p:nvSpPr>
-          <p:cNvPr id="8" name="Text 6"/>
-          <p:cNvSpPr txBox="1"/>
-          <p:nvPr/>
-        </p:nvSpPr>
-        <p:spPr>
-          <a:xfrm>
-            <a:off x="1005840" y="2606040"/>
+          <p:cNvPr id="9" name="Text 7"/>
+          <p:cNvSpPr txBox="1"/>
+          <p:nvPr/>
+        </p:nvSpPr>
+        <p:spPr>
+          <a:xfrm>
+            <a:off x="548640" y="2578608"/>
+            <a:ext cx="384048" cy="384048"/>
+          </a:xfrm>
+          <a:prstGeom prst="rect">
+            <a:avLst/>
+          </a:prstGeom>
+          <a:noFill/>
+          <a:ln/>
+        </p:spPr>
+        <p:txBody>
+          <a:bodyPr wrap="square" lIns="0" tIns="0" rIns="0" bIns="0" rtlCol="0" anchor="ctr"/>
+          <a:lstStyle/>
+          <a:p>
+            <a:pPr algn="ctr" indent="0" marL="0">
+              <a:buNone/>
+            </a:pPr>
+            <a:r>
+              <a:rPr lang="en-US" sz="1500" b="1" dirty="0">
+                <a:solidFill>
+                  <a:srgbClr val="071427"/>
+                </a:solidFill>
+                <a:latin typeface="Calibri" pitchFamily="34" charset="0"/>
+                <a:ea typeface="Calibri" pitchFamily="34" charset="-122"/>
+                <a:cs typeface="Calibri" pitchFamily="34" charset="-120"/>
+              </a:rPr>
+              <a:t>2</a:t>
+            </a:r>
+            <a:endParaRPr lang="en-US" sz="1500" dirty="0"/>
+          </a:p>
+        </p:txBody>
+      </p:sp>
+      <p:sp>
+        <p:nvSpPr>
+          <p:cNvPr id="10" name="Text 8"/>
+          <p:cNvSpPr txBox="1"/>
+          <p:nvPr/>
+        </p:nvSpPr>
+        <p:spPr>
+          <a:xfrm>
+            <a:off x="1143000" y="2532888"/>
+            <a:ext cx="10241280" cy="365760"/>
+          </a:xfrm>
+          <a:prstGeom prst="rect">
+            <a:avLst/>
+          </a:prstGeom>
+          <a:noFill/>
+          <a:ln/>
+        </p:spPr>
+        <p:txBody>
+          <a:bodyPr wrap="square" lIns="0" tIns="0" rIns="0" bIns="0" rtlCol="0" anchor="ctr"/>
+          <a:lstStyle/>
+          <a:p>
+            <a:pPr indent="0" marL="0">
+              <a:buNone/>
+            </a:pPr>
+            <a:r>
+              <a:rPr lang="en-US" sz="1500" b="1" dirty="0">
+                <a:solidFill>
+                  <a:srgbClr val="FFFFFF"/>
+                </a:solidFill>
+                <a:latin typeface="Calibri" pitchFamily="34" charset="0"/>
+                <a:ea typeface="Calibri" pitchFamily="34" charset="-122"/>
+                <a:cs typeface="Calibri" pitchFamily="34" charset="-120"/>
+              </a:rPr>
+              <a:t>RHI_AS radial-profile precision</a:t>
+            </a:r>
+            <a:endParaRPr lang="en-US" sz="1500" dirty="0"/>
+          </a:p>
+        </p:txBody>
+      </p:sp>
+      <p:sp>
+        <p:nvSpPr>
+          <p:cNvPr id="11" name="Text 9"/>
+          <p:cNvSpPr txBox="1"/>
+          <p:nvPr/>
+        </p:nvSpPr>
+        <p:spPr>
+          <a:xfrm>
+            <a:off x="1143000" y="2880360"/>
             <a:ext cx="10241280" cy="502920"/>
           </a:xfrm>
           <a:prstGeom prst="rect">
@@ -13569,18 +17853,21 @@
           <a:lstStyle/>
           <a:p>
             <a:pPr indent="0" marL="0">
+              <a:lnSpc>
+                <a:spcPct val="110000"/>
+              </a:lnSpc>
               <a:buNone/>
             </a:pPr>
             <a:r>
               <a:rPr lang="en-US" sz="1200" dirty="0">
                 <a:solidFill>
-                  <a:srgbClr val="8A3B26"/>
-                </a:solidFill>
-                <a:latin typeface="Calibri" pitchFamily="34" charset="0"/>
-                <a:ea typeface="Calibri" pitchFamily="34" charset="-122"/>
-                <a:cs typeface="Calibri" pitchFamily="34" charset="-120"/>
-              </a:rPr>
-              <a:t>pass 1 (65 iterations) and pass 2 (1,715 iterations, to ITMAX) — every rtol/y[ihi]/y[ilo] bit-identical throughout</a:t>
+                  <a:srgbClr val="AFC9E8"/>
+                </a:solidFill>
+                <a:latin typeface="Calibri" pitchFamily="34" charset="0"/>
+                <a:ea typeface="Calibri" pitchFamily="34" charset="-122"/>
+                <a:cs typeface="Calibri" pitchFamily="34" charset="-120"/>
+              </a:rPr>
+              <a:t>A radial-profile interpolation carried extra double precision on the JS side where Fortran keeps it in real*4; matched to f32 throughout.</a:t>
             </a:r>
             <a:endParaRPr lang="en-US" sz="1200" dirty="0"/>
           </a:p>
@@ -13588,138 +17875,141 @@
       </p:sp>
       <p:sp>
         <p:nvSpPr>
-          <p:cNvPr id="9" name="Text 7"/>
-          <p:cNvSpPr txBox="1"/>
-          <p:nvPr/>
-        </p:nvSpPr>
-        <p:spPr>
-          <a:xfrm>
-            <a:off x="548640" y="3383280"/>
-            <a:ext cx="10881360" cy="457200"/>
-          </a:xfrm>
-          <a:prstGeom prst="rect">
-            <a:avLst/>
-          </a:prstGeom>
-          <a:noFill/>
-          <a:ln/>
-        </p:spPr>
-        <p:txBody>
-          <a:bodyPr wrap="square" lIns="0" tIns="0" rIns="0" bIns="0" rtlCol="0" anchor="ctr"/>
-          <a:lstStyle/>
-          <a:p>
-            <a:pPr indent="0" marL="0">
-              <a:buNone/>
-            </a:pPr>
-            <a:r>
-              <a:rPr lang="en-US" sz="1300" dirty="0">
-                <a:solidFill>
-                  <a:srgbClr val="4A5B72"/>
-                </a:solidFill>
-                <a:latin typeface="Calibri" pitchFamily="34" charset="0"/>
-                <a:ea typeface="Calibri" pitchFamily="34" charset="-122"/>
-                <a:cs typeface="Calibri" pitchFamily="34" charset="-120"/>
-              </a:rPr>
-              <a:t>The raw best-fit parameter vector (all 15 parameters) was then compared directly — no forcing, no transplant.</a:t>
-            </a:r>
-            <a:endParaRPr lang="en-US" sz="1300" dirty="0"/>
-          </a:p>
-        </p:txBody>
-      </p:sp>
-      <p:sp>
-        <p:nvSpPr>
-          <p:cNvPr id="10" name="Text 8"/>
-          <p:cNvSpPr txBox="1"/>
-          <p:nvPr/>
-        </p:nvSpPr>
-        <p:spPr>
-          <a:xfrm>
-            <a:off x="548640" y="3886200"/>
-            <a:ext cx="3657600" cy="274320"/>
-          </a:xfrm>
-          <a:prstGeom prst="rect">
-            <a:avLst/>
-          </a:prstGeom>
-          <a:noFill/>
-          <a:ln/>
-        </p:spPr>
-        <p:txBody>
-          <a:bodyPr wrap="square" lIns="0" tIns="0" rIns="0" bIns="0" rtlCol="0" anchor="ctr"/>
-          <a:lstStyle/>
-          <a:p>
-            <a:pPr indent="0" marL="0">
-              <a:buNone/>
-            </a:pPr>
-            <a:r>
-              <a:rPr lang="en-US" sz="1100" b="1" dirty="0">
-                <a:solidFill>
-                  <a:srgbClr val="2E8B57"/>
-                </a:solidFill>
-                <a:latin typeface="Calibri" pitchFamily="34" charset="0"/>
-                <a:ea typeface="Calibri" pitchFamily="34" charset="-122"/>
-                <a:cs typeface="Calibri" pitchFamily="34" charset="-120"/>
-              </a:rPr>
-              <a:t>RESULT</a:t>
-            </a:r>
-            <a:endParaRPr lang="en-US" sz="1100" dirty="0"/>
-          </a:p>
-        </p:txBody>
-      </p:sp>
-      <p:sp>
-        <p:nvSpPr>
-          <p:cNvPr id="11" name="Shape 9"/>
+          <p:cNvPr id="12" name="Shape 10"/>
           <p:cNvSpPr/>
           <p:nvPr/>
         </p:nvSpPr>
         <p:spPr>
           <a:xfrm>
-            <a:off x="548640" y="4206240"/>
-            <a:ext cx="10881360" cy="502920"/>
+            <a:off x="548640" y="3511296"/>
+            <a:ext cx="384048" cy="384048"/>
           </a:xfrm>
           <a:prstGeom prst="roundRect">
             <a:avLst>
-              <a:gd name="adj" fmla="val 10909"/>
+              <a:gd name="adj" fmla="val 50000"/>
             </a:avLst>
           </a:prstGeom>
           <a:solidFill>
-            <a:srgbClr val="CFE8DA"/>
+            <a:srgbClr val="F2A93B"/>
           </a:solidFill>
           <a:ln/>
         </p:spPr>
       </p:sp>
       <p:sp>
         <p:nvSpPr>
-          <p:cNvPr id="12" name="Text 10"/>
-          <p:cNvSpPr txBox="1"/>
-          <p:nvPr/>
-        </p:nvSpPr>
-        <p:spPr>
-          <a:xfrm>
-            <a:off x="822960" y="4206240"/>
-            <a:ext cx="10332720" cy="502920"/>
-          </a:xfrm>
-          <a:prstGeom prst="rect">
-            <a:avLst/>
-          </a:prstGeom>
-          <a:noFill/>
-          <a:ln/>
-        </p:spPr>
-        <p:txBody>
-          <a:bodyPr wrap="square" lIns="0" tIns="0" rIns="0" bIns="0" rtlCol="0" anchor="ctr"/>
-          <a:lstStyle/>
-          <a:p>
-            <a:pPr indent="0" marL="0">
-              <a:buNone/>
-            </a:pPr>
-            <a:r>
-              <a:rPr lang="en-US" sz="1200" b="1" dirty="0">
-                <a:solidFill>
-                  <a:srgbClr val="1E5C3D"/>
-                </a:solidFill>
-                <a:latin typeface="Calibri" pitchFamily="34" charset="0"/>
-                <a:ea typeface="Calibri" pitchFamily="34" charset="-122"/>
-                <a:cs typeface="Calibri" pitchFamily="34" charset="-120"/>
-              </a:rPr>
-              <a:t>bit-identical, every parameter, full precision</a:t>
+          <p:cNvPr id="13" name="Text 11"/>
+          <p:cNvSpPr txBox="1"/>
+          <p:nvPr/>
+        </p:nvSpPr>
+        <p:spPr>
+          <a:xfrm>
+            <a:off x="548640" y="3511296"/>
+            <a:ext cx="384048" cy="384048"/>
+          </a:xfrm>
+          <a:prstGeom prst="rect">
+            <a:avLst/>
+          </a:prstGeom>
+          <a:noFill/>
+          <a:ln/>
+        </p:spPr>
+        <p:txBody>
+          <a:bodyPr wrap="square" lIns="0" tIns="0" rIns="0" bIns="0" rtlCol="0" anchor="ctr"/>
+          <a:lstStyle/>
+          <a:p>
+            <a:pPr algn="ctr" indent="0" marL="0">
+              <a:buNone/>
+            </a:pPr>
+            <a:r>
+              <a:rPr lang="en-US" sz="1500" b="1" dirty="0">
+                <a:solidFill>
+                  <a:srgbClr val="071427"/>
+                </a:solidFill>
+                <a:latin typeface="Calibri" pitchFamily="34" charset="0"/>
+                <a:ea typeface="Calibri" pitchFamily="34" charset="-122"/>
+                <a:cs typeface="Calibri" pitchFamily="34" charset="-120"/>
+              </a:rPr>
+              <a:t>3</a:t>
+            </a:r>
+            <a:endParaRPr lang="en-US" sz="1500" dirty="0"/>
+          </a:p>
+        </p:txBody>
+      </p:sp>
+      <p:sp>
+        <p:nvSpPr>
+          <p:cNvPr id="14" name="Text 12"/>
+          <p:cNvSpPr txBox="1"/>
+          <p:nvPr/>
+        </p:nvSpPr>
+        <p:spPr>
+          <a:xfrm>
+            <a:off x="1143000" y="3465576"/>
+            <a:ext cx="10241280" cy="365760"/>
+          </a:xfrm>
+          <a:prstGeom prst="rect">
+            <a:avLst/>
+          </a:prstGeom>
+          <a:noFill/>
+          <a:ln/>
+        </p:spPr>
+        <p:txBody>
+          <a:bodyPr wrap="square" lIns="0" tIns="0" rIns="0" bIns="0" rtlCol="0" anchor="ctr"/>
+          <a:lstStyle/>
+          <a:p>
+            <a:pPr indent="0" marL="0">
+              <a:buNone/>
+            </a:pPr>
+            <a:r>
+              <a:rPr lang="en-US" sz="1500" b="1" dirty="0">
+                <a:solidFill>
+                  <a:srgbClr val="FFFFFF"/>
+                </a:solidFill>
+                <a:latin typeface="Calibri" pitchFamily="34" charset="0"/>
+                <a:ea typeface="Calibri" pitchFamily="34" charset="-122"/>
+                <a:cs typeface="Calibri" pitchFamily="34" charset="-120"/>
+              </a:rPr>
+              <a:t>resampleBeam.beamPositionAngle never set</a:t>
+            </a:r>
+            <a:endParaRPr lang="en-US" sz="1500" dirty="0"/>
+          </a:p>
+        </p:txBody>
+      </p:sp>
+      <p:sp>
+        <p:nvSpPr>
+          <p:cNvPr id="15" name="Text 13"/>
+          <p:cNvSpPr txBox="1"/>
+          <p:nvPr/>
+        </p:nvSpPr>
+        <p:spPr>
+          <a:xfrm>
+            <a:off x="1143000" y="3813048"/>
+            <a:ext cx="10241280" cy="502920"/>
+          </a:xfrm>
+          <a:prstGeom prst="rect">
+            <a:avLst/>
+          </a:prstGeom>
+          <a:noFill/>
+          <a:ln/>
+        </p:spPr>
+        <p:txBody>
+          <a:bodyPr wrap="square" lIns="0" tIns="0" rIns="0" bIns="0" rtlCol="0" anchor="ctr"/>
+          <a:lstStyle/>
+          <a:p>
+            <a:pPr indent="0" marL="0">
+              <a:lnSpc>
+                <a:spcPct val="110000"/>
+              </a:lnSpc>
+              <a:buNone/>
+            </a:pPr>
+            <a:r>
+              <a:rPr lang="en-US" sz="1200" dirty="0">
+                <a:solidFill>
+                  <a:srgbClr val="AFC9E8"/>
+                </a:solidFill>
+                <a:latin typeface="Calibri" pitchFamily="34" charset="0"/>
+                <a:ea typeface="Calibri" pitchFamily="34" charset="-122"/>
+                <a:cs typeface="Calibri" pitchFamily="34" charset="-120"/>
+              </a:rPr>
+              <a:t>The bootstrap realization’s resampled beam always defaulted to 0.0 instead of inheriting the anchor fit’s own already-correct beam angle.</a:t>
             </a:r>
             <a:endParaRPr lang="en-US" sz="1200" dirty="0"/>
           </a:p>
@@ -13727,75 +18017,114 @@
       </p:sp>
       <p:sp>
         <p:nvSpPr>
-          <p:cNvPr id="13" name="Shape 11"/>
+          <p:cNvPr id="16" name="Shape 14"/>
           <p:cNvSpPr/>
           <p:nvPr/>
         </p:nvSpPr>
         <p:spPr>
           <a:xfrm>
-            <a:off x="548640" y="4937760"/>
-            <a:ext cx="10881360" cy="1371600"/>
+            <a:off x="548640" y="4443984"/>
+            <a:ext cx="384048" cy="384048"/>
           </a:xfrm>
           <a:prstGeom prst="roundRect">
             <a:avLst>
-              <a:gd name="adj" fmla="val 6667"/>
+              <a:gd name="adj" fmla="val 50000"/>
             </a:avLst>
           </a:prstGeom>
           <a:solidFill>
-            <a:srgbClr val="0B1E3F"/>
+            <a:srgbClr val="F2A93B"/>
           </a:solidFill>
           <a:ln/>
         </p:spPr>
       </p:sp>
       <p:sp>
         <p:nvSpPr>
-          <p:cNvPr id="14" name="Text 12"/>
-          <p:cNvSpPr txBox="1"/>
-          <p:nvPr/>
-        </p:nvSpPr>
-        <p:spPr>
-          <a:xfrm>
-            <a:off x="822960" y="5074920"/>
-            <a:ext cx="3200400" cy="1097280"/>
-          </a:xfrm>
-          <a:prstGeom prst="rect">
-            <a:avLst/>
-          </a:prstGeom>
-          <a:noFill/>
-          <a:ln/>
-        </p:spPr>
-        <p:txBody>
-          <a:bodyPr wrap="square" lIns="0" tIns="0" rIns="0" bIns="0" rtlCol="0" anchor="ctr"/>
-          <a:lstStyle/>
-          <a:p>
-            <a:pPr indent="0" marL="0">
-              <a:buNone/>
-            </a:pPr>
-            <a:r>
-              <a:rPr lang="en-US" sz="4200" b="1" dirty="0">
-                <a:solidFill>
-                  <a:srgbClr val="F2A93B"/>
-                </a:solidFill>
-                <a:latin typeface="Cambria" pitchFamily="34" charset="0"/>
-                <a:ea typeface="Cambria" pitchFamily="34" charset="-122"/>
-                <a:cs typeface="Cambria" pitchFamily="34" charset="-120"/>
-              </a:rPr>
-              <a:t>1,715 / 1,715</a:t>
-            </a:r>
-            <a:endParaRPr lang="en-US" sz="4200" dirty="0"/>
-          </a:p>
-        </p:txBody>
-      </p:sp>
-      <p:sp>
-        <p:nvSpPr>
-          <p:cNvPr id="15" name="Text 13"/>
-          <p:cNvSpPr txBox="1"/>
-          <p:nvPr/>
-        </p:nvSpPr>
-        <p:spPr>
-          <a:xfrm>
-            <a:off x="4206240" y="5074920"/>
-            <a:ext cx="6949440" cy="1097280"/>
+          <p:cNvPr id="17" name="Text 15"/>
+          <p:cNvSpPr txBox="1"/>
+          <p:nvPr/>
+        </p:nvSpPr>
+        <p:spPr>
+          <a:xfrm>
+            <a:off x="548640" y="4443984"/>
+            <a:ext cx="384048" cy="384048"/>
+          </a:xfrm>
+          <a:prstGeom prst="rect">
+            <a:avLst/>
+          </a:prstGeom>
+          <a:noFill/>
+          <a:ln/>
+        </p:spPr>
+        <p:txBody>
+          <a:bodyPr wrap="square" lIns="0" tIns="0" rIns="0" bIns="0" rtlCol="0" anchor="ctr"/>
+          <a:lstStyle/>
+          <a:p>
+            <a:pPr algn="ctr" indent="0" marL="0">
+              <a:buNone/>
+            </a:pPr>
+            <a:r>
+              <a:rPr lang="en-US" sz="1500" b="1" dirty="0">
+                <a:solidFill>
+                  <a:srgbClr val="071427"/>
+                </a:solidFill>
+                <a:latin typeface="Calibri" pitchFamily="34" charset="0"/>
+                <a:ea typeface="Calibri" pitchFamily="34" charset="-122"/>
+                <a:cs typeface="Calibri" pitchFamily="34" charset="-120"/>
+              </a:rPr>
+              <a:t>4</a:t>
+            </a:r>
+            <a:endParaRPr lang="en-US" sz="1500" dirty="0"/>
+          </a:p>
+        </p:txBody>
+      </p:sp>
+      <p:sp>
+        <p:nvSpPr>
+          <p:cNvPr id="18" name="Text 16"/>
+          <p:cNvSpPr txBox="1"/>
+          <p:nvPr/>
+        </p:nvSpPr>
+        <p:spPr>
+          <a:xfrm>
+            <a:off x="1143000" y="4398264"/>
+            <a:ext cx="10241280" cy="365760"/>
+          </a:xfrm>
+          <a:prstGeom prst="rect">
+            <a:avLst/>
+          </a:prstGeom>
+          <a:noFill/>
+          <a:ln/>
+        </p:spPr>
+        <p:txBody>
+          <a:bodyPr wrap="square" lIns="0" tIns="0" rIns="0" bIns="0" rtlCol="0" anchor="ctr"/>
+          <a:lstStyle/>
+          <a:p>
+            <a:pPr indent="0" marL="0">
+              <a:buNone/>
+            </a:pPr>
+            <a:r>
+              <a:rPr lang="en-US" sz="1500" b="1" dirty="0">
+                <a:solidFill>
+                  <a:srgbClr val="FFFFFF"/>
+                </a:solidFill>
+                <a:latin typeface="Calibri" pitchFamily="34" charset="0"/>
+                <a:ea typeface="Calibri" pitchFamily="34" charset="-122"/>
+                <a:cs typeface="Calibri" pitchFamily="34" charset="-120"/>
+              </a:rPr>
+              <a:t>FITS BPA written in the wrong units</a:t>
+            </a:r>
+            <a:endParaRPr lang="en-US" sz="1500" dirty="0"/>
+          </a:p>
+        </p:txBody>
+      </p:sp>
+      <p:sp>
+        <p:nvSpPr>
+          <p:cNvPr id="19" name="Text 17"/>
+          <p:cNvSpPr txBox="1"/>
+          <p:nvPr/>
+        </p:nvSpPr>
+        <p:spPr>
+          <a:xfrm>
+            <a:off x="1143000" y="4745736"/>
+            <a:ext cx="10241280" cy="502920"/>
           </a:xfrm>
           <a:prstGeom prst="rect">
             <a:avLst/>
@@ -13809,12 +18138,12 @@
           <a:p>
             <a:pPr indent="0" marL="0">
               <a:lnSpc>
-                <a:spcPct val="115000"/>
+                <a:spcPct val="110000"/>
               </a:lnSpc>
               <a:buNone/>
             </a:pPr>
             <a:r>
-              <a:rPr lang="en-US" sz="1250" dirty="0">
+              <a:rPr lang="en-US" sz="1200" dirty="0">
                 <a:solidFill>
                   <a:srgbClr val="AFC9E8"/>
                 </a:solidFill>
@@ -13822,15 +18151,157 @@
                 <a:ea typeface="Calibri" pitchFamily="34" charset="-122"/>
                 <a:cs typeface="Calibri" pitchFamily="34" charset="-120"/>
               </a:rPr>
-              <a:t>Every Pass-2 iteration bit-identical, unforced, to ITMAX — proving the entire per-evaluation math (particle generation, tilted-ring projection, convolution, χ2 sum, amoeba, vertex perturbation) has zero remaining bugs.</a:t>
-            </a:r>
-            <a:endParaRPr lang="en-US" sz="1250" dirty="0"/>
-          </a:p>
-        </p:txBody>
-      </p:sp>
-      <p:sp>
-        <p:nvSpPr>
-          <p:cNvPr id="16" name="Text 14"/>
+              <a:t>Beam position angle was written to the output FITS header in radians; the BPA keyword convention requires degrees.</a:t>
+            </a:r>
+            <a:endParaRPr lang="en-US" sz="1200" dirty="0"/>
+          </a:p>
+        </p:txBody>
+      </p:sp>
+      <p:sp>
+        <p:nvSpPr>
+          <p:cNvPr id="20" name="Shape 18"/>
+          <p:cNvSpPr/>
+          <p:nvPr/>
+        </p:nvSpPr>
+        <p:spPr>
+          <a:xfrm>
+            <a:off x="548640" y="6309360"/>
+            <a:ext cx="384048" cy="384048"/>
+          </a:xfrm>
+          <a:prstGeom prst="roundRect">
+            <a:avLst>
+              <a:gd name="adj" fmla="val 50000"/>
+            </a:avLst>
+          </a:prstGeom>
+          <a:solidFill>
+            <a:srgbClr val="F2A93B"/>
+          </a:solidFill>
+          <a:ln/>
+        </p:spPr>
+      </p:sp>
+      <p:sp>
+        <p:nvSpPr>
+          <p:cNvPr id="21" name="Text 19"/>
+          <p:cNvSpPr txBox="1"/>
+          <p:nvPr/>
+        </p:nvSpPr>
+        <p:spPr>
+          <a:xfrm>
+            <a:off x="548640" y="6309360"/>
+            <a:ext cx="384048" cy="384048"/>
+          </a:xfrm>
+          <a:prstGeom prst="rect">
+            <a:avLst/>
+          </a:prstGeom>
+          <a:noFill/>
+          <a:ln/>
+        </p:spPr>
+        <p:txBody>
+          <a:bodyPr wrap="square" lIns="0" tIns="0" rIns="0" bIns="0" rtlCol="0" anchor="ctr"/>
+          <a:lstStyle/>
+          <a:p>
+            <a:pPr algn="ctr" indent="0" marL="0">
+              <a:buNone/>
+            </a:pPr>
+            <a:r>
+              <a:rPr lang="en-US" sz="1500" b="1" dirty="0">
+                <a:solidFill>
+                  <a:srgbClr val="071427"/>
+                </a:solidFill>
+                <a:latin typeface="Calibri" pitchFamily="34" charset="0"/>
+                <a:ea typeface="Calibri" pitchFamily="34" charset="-122"/>
+                <a:cs typeface="Calibri" pitchFamily="34" charset="-120"/>
+              </a:rPr>
+              <a:t>5</a:t>
+            </a:r>
+            <a:endParaRPr lang="en-US" sz="1500" dirty="0"/>
+          </a:p>
+        </p:txBody>
+      </p:sp>
+      <p:sp>
+        <p:nvSpPr>
+          <p:cNvPr id="22" name="Text 20"/>
+          <p:cNvSpPr txBox="1"/>
+          <p:nvPr/>
+        </p:nvSpPr>
+        <p:spPr>
+          <a:xfrm>
+            <a:off x="1143000" y="6263640"/>
+            <a:ext cx="10241280" cy="365760"/>
+          </a:xfrm>
+          <a:prstGeom prst="rect">
+            <a:avLst/>
+          </a:prstGeom>
+          <a:noFill/>
+          <a:ln/>
+        </p:spPr>
+        <p:txBody>
+          <a:bodyPr wrap="square" lIns="0" tIns="0" rIns="0" bIns="0" rtlCol="0" anchor="ctr"/>
+          <a:lstStyle/>
+          <a:p>
+            <a:pPr indent="0" marL="0">
+              <a:buNone/>
+            </a:pPr>
+            <a:r>
+              <a:rPr lang="en-US" sz="1500" b="1" dirty="0">
+                <a:solidFill>
+                  <a:srgbClr val="FFFFFF"/>
+                </a:solidFill>
+                <a:latin typeface="Calibri" pitchFamily="34" charset="0"/>
+                <a:ea typeface="Calibri" pitchFamily="34" charset="-122"/>
+                <a:cs typeface="Calibri" pitchFamily="34" charset="-120"/>
+              </a:rPr>
+              <a:t>FITS CTYPE3/CUNIT3 hardcoded wrong</a:t>
+            </a:r>
+            <a:endParaRPr lang="en-US" sz="1500" dirty="0"/>
+          </a:p>
+        </p:txBody>
+      </p:sp>
+      <p:sp>
+        <p:nvSpPr>
+          <p:cNvPr id="23" name="Text 21"/>
+          <p:cNvSpPr txBox="1"/>
+          <p:nvPr/>
+        </p:nvSpPr>
+        <p:spPr>
+          <a:xfrm>
+            <a:off x="1143000" y="6611112"/>
+            <a:ext cx="10241280" cy="502920"/>
+          </a:xfrm>
+          <a:prstGeom prst="rect">
+            <a:avLst/>
+          </a:prstGeom>
+          <a:noFill/>
+          <a:ln/>
+        </p:spPr>
+        <p:txBody>
+          <a:bodyPr wrap="square" lIns="0" tIns="0" rIns="0" bIns="0" rtlCol="0" anchor="ctr"/>
+          <a:lstStyle/>
+          <a:p>
+            <a:pPr indent="0" marL="0">
+              <a:lnSpc>
+                <a:spcPct val="110000"/>
+              </a:lnSpc>
+              <a:buNone/>
+            </a:pPr>
+            <a:r>
+              <a:rPr lang="en-US" sz="1200" dirty="0">
+                <a:solidFill>
+                  <a:srgbClr val="AFC9E8"/>
+                </a:solidFill>
+                <a:latin typeface="Calibri" pitchFamily="34" charset="0"/>
+                <a:ea typeface="Calibri" pitchFamily="34" charset="-122"/>
+                <a:cs typeface="Calibri" pitchFamily="34" charset="-120"/>
+              </a:rPr>
+              <a:t>Spectral axis header was hardcoded to VELO-LSR/km-s regardless of the real cube’s convention; real WALLABY cubes use VOPT/m-s.</a:t>
+            </a:r>
+            <a:endParaRPr lang="en-US" sz="1200" dirty="0"/>
+          </a:p>
+        </p:txBody>
+      </p:sp>
+      <p:sp>
+        <p:nvSpPr>
+          <p:cNvPr id="24" name="Text 22"/>
           <p:cNvSpPr txBox="1"/>
           <p:nvPr/>
         </p:nvSpPr>
@@ -13864,6 +18335,148 @@
               <a:t>9</a:t>
             </a:r>
             <a:endParaRPr lang="en-US" sz="1000" dirty="0"/>
+          </a:p>
+        </p:txBody>
+      </p:sp>
+      <p:sp>
+        <p:nvSpPr>
+          <p:cNvPr id="20" name="Shape 18"/>
+          <p:cNvSpPr/>
+          <p:nvPr/>
+        </p:nvSpPr>
+        <p:spPr>
+          <a:xfrm>
+            <a:off x="548640" y="5376672"/>
+            <a:ext cx="384048" cy="384048"/>
+          </a:xfrm>
+          <a:prstGeom prst="roundRect">
+            <a:avLst>
+              <a:gd name="adj" fmla="val 50000"/>
+            </a:avLst>
+          </a:prstGeom>
+          <a:solidFill>
+            <a:srgbClr val="F2A93B"/>
+          </a:solidFill>
+          <a:ln/>
+        </p:spPr>
+      </p:sp>
+      <p:sp>
+        <p:nvSpPr>
+          <p:cNvPr id="21" name="Text 19"/>
+          <p:cNvSpPr txBox="1"/>
+          <p:nvPr/>
+        </p:nvSpPr>
+        <p:spPr>
+          <a:xfrm>
+            <a:off x="548640" y="5376672"/>
+            <a:ext cx="384048" cy="384048"/>
+          </a:xfrm>
+          <a:prstGeom prst="rect">
+            <a:avLst/>
+          </a:prstGeom>
+          <a:noFill/>
+          <a:ln/>
+        </p:spPr>
+        <p:txBody>
+          <a:bodyPr wrap="square" lIns="0" tIns="0" rIns="0" bIns="0" rtlCol="0" anchor="ctr"/>
+          <a:lstStyle/>
+          <a:p>
+            <a:pPr algn="ctr" indent="0" marL="0">
+              <a:buNone/>
+            </a:pPr>
+            <a:r>
+              <a:rPr lang="en-US" sz="1500" b="1" dirty="0">
+                <a:solidFill>
+                  <a:srgbClr val="071427"/>
+                </a:solidFill>
+                <a:latin typeface="Calibri" pitchFamily="34" charset="0"/>
+                <a:ea typeface="Calibri" pitchFamily="34" charset="-122"/>
+                <a:cs typeface="Calibri" pitchFamily="34" charset="-120"/>
+              </a:rPr>
+              <a:t>6</a:t>
+            </a:r>
+            <a:endParaRPr lang="en-US" sz="1500" dirty="0"/>
+          </a:p>
+        </p:txBody>
+      </p:sp>
+      <p:sp>
+        <p:nvSpPr>
+          <p:cNvPr id="22" name="Text 20"/>
+          <p:cNvSpPr txBox="1"/>
+          <p:nvPr/>
+        </p:nvSpPr>
+        <p:spPr>
+          <a:xfrm>
+            <a:off x="1143000" y="5330952"/>
+            <a:ext cx="10241280" cy="365760"/>
+          </a:xfrm>
+          <a:prstGeom prst="rect">
+            <a:avLst/>
+          </a:prstGeom>
+          <a:noFill/>
+          <a:ln/>
+        </p:spPr>
+        <p:txBody>
+          <a:bodyPr wrap="square" lIns="0" tIns="0" rIns="0" bIns="0" rtlCol="0" anchor="ctr"/>
+          <a:lstStyle/>
+          <a:p>
+            <a:pPr indent="0" marL="0">
+              <a:buNone/>
+            </a:pPr>
+            <a:r>
+              <a:rPr lang="en-US" sz="1500" b="1" dirty="0">
+                <a:solidFill>
+                  <a:srgbClr val="FFFFFF"/>
+                </a:solidFill>
+                <a:latin typeface="Calibri" pitchFamily="34" charset="0"/>
+                <a:ea typeface="Calibri" pitchFamily="34" charset="-122"/>
+                <a:cs typeface="Calibri" pitchFamily="34" charset="-120"/>
+              </a:rPr>
+              <a:t>FITS cubes written in double precision</a:t>
+            </a:r>
+            <a:endParaRPr lang="en-US" sz="1500" dirty="0"/>
+          </a:p>
+        </p:txBody>
+      </p:sp>
+      <p:sp>
+        <p:nvSpPr>
+          <p:cNvPr id="23" name="Text 21"/>
+          <p:cNvSpPr txBox="1"/>
+          <p:nvPr/>
+        </p:nvSpPr>
+        <p:spPr>
+          <a:xfrm>
+            <a:off x="1143000" y="5678424"/>
+            <a:ext cx="10241280" cy="502920"/>
+          </a:xfrm>
+          <a:prstGeom prst="rect">
+            <a:avLst/>
+          </a:prstGeom>
+          <a:noFill/>
+          <a:ln/>
+        </p:spPr>
+        <p:txBody>
+          <a:bodyPr wrap="square" lIns="0" tIns="0" rIns="0" bIns="0" rtlCol="0" anchor="ctr"/>
+          <a:lstStyle/>
+          <a:p>
+            <a:pPr indent="0" marL="0">
+              <a:lnSpc>
+                <a:spcPct val="110000"/>
+              </a:lnSpc>
+              <a:buNone/>
+            </a:pPr>
+            <a:r>
+              <a:rPr lang="en-US" sz="1200" dirty="0">
+                <a:solidFill>
+                  <a:srgbClr val="AFC9E8"/>
+                </a:solidFill>
+                <a:latin typeface="Calibri" pitchFamily="34" charset="0"/>
+                <a:ea typeface="Calibri" pitchFamily="34" charset="-122"/>
+                <a:cs typeface="Calibri" pitchFamily="34" charset="-120"/>
+              </a:rPr>
+              <a:t>Output cubes were written as BITPIX=-64 even though the underlying data is Float32Array — pure precision inflation on the way out, not real extra precision. Added a proper float32 (-32) write path.</a:t>
+            </a:r>
+            <a:endParaRPr lang="en-US" sz="1200" dirty="0"/>
           </a:p>
         </p:txBody>
       </p:sp>
